--- a/Vigneshbabu_Retail_Sales_Pulse.pptx
+++ b/Vigneshbabu_Retail_Sales_Pulse.pptx
@@ -5,7 +5,7 @@
     <p:sldMasterId id="2147483648" r:id="rId1"/>
   </p:sldMasterIdLst>
   <p:notesMasterIdLst>
-    <p:notesMasterId r:id="rId30"/>
+    <p:notesMasterId r:id="rId31"/>
   </p:notesMasterIdLst>
   <p:sldIdLst>
     <p:sldId id="256" r:id="rId2"/>
@@ -34,8 +34,9 @@
     <p:sldId id="281" r:id="rId25"/>
     <p:sldId id="270" r:id="rId26"/>
     <p:sldId id="271" r:id="rId27"/>
-    <p:sldId id="282" r:id="rId28"/>
-    <p:sldId id="283" r:id="rId29"/>
+    <p:sldId id="284" r:id="rId28"/>
+    <p:sldId id="282" r:id="rId29"/>
+    <p:sldId id="283" r:id="rId30"/>
   </p:sldIdLst>
   <p:sldSz cx="12192000" cy="6858000"/>
   <p:notesSz cx="6858000" cy="9144000"/>
@@ -235,7 +236,7 @@
           <a:p>
             <a:fld id="{5E3E73F2-78EE-45B1-8146-3E67A2C29411}" type="datetimeFigureOut">
               <a:rPr lang="en-US" smtClean="0"/>
-              <a:t>9/4/2026</a:t>
+              <a:t>9/19/2026</a:t>
             </a:fld>
             <a:endParaRPr lang="en-US"/>
           </a:p>
@@ -765,7 +766,7 @@
           <a:p>
             <a:fld id="{5BCAD085-E8A6-8845-BD4E-CB4CCA059FC4}" type="datetimeFigureOut">
               <a:rPr lang="en-US" smtClean="0"/>
-              <a:t>9/4/2026</a:t>
+              <a:t>9/19/2026</a:t>
             </a:fld>
             <a:endParaRPr lang="en-US"/>
           </a:p>
@@ -933,7 +934,7 @@
           <a:p>
             <a:fld id="{5BCAD085-E8A6-8845-BD4E-CB4CCA059FC4}" type="datetimeFigureOut">
               <a:rPr lang="en-US" smtClean="0"/>
-              <a:t>9/4/2026</a:t>
+              <a:t>9/19/2026</a:t>
             </a:fld>
             <a:endParaRPr lang="en-US"/>
           </a:p>
@@ -1111,7 +1112,7 @@
           <a:p>
             <a:fld id="{5BCAD085-E8A6-8845-BD4E-CB4CCA059FC4}" type="datetimeFigureOut">
               <a:rPr lang="en-US" smtClean="0"/>
-              <a:t>9/4/2026</a:t>
+              <a:t>9/19/2026</a:t>
             </a:fld>
             <a:endParaRPr lang="en-US"/>
           </a:p>
@@ -1279,7 +1280,7 @@
           <a:p>
             <a:fld id="{5BCAD085-E8A6-8845-BD4E-CB4CCA059FC4}" type="datetimeFigureOut">
               <a:rPr lang="en-US" smtClean="0"/>
-              <a:t>9/4/2026</a:t>
+              <a:t>9/19/2026</a:t>
             </a:fld>
             <a:endParaRPr lang="en-US"/>
           </a:p>
@@ -1524,7 +1525,7 @@
           <a:p>
             <a:fld id="{5BCAD085-E8A6-8845-BD4E-CB4CCA059FC4}" type="datetimeFigureOut">
               <a:rPr lang="en-US" smtClean="0"/>
-              <a:t>9/4/2026</a:t>
+              <a:t>9/19/2026</a:t>
             </a:fld>
             <a:endParaRPr lang="en-US"/>
           </a:p>
@@ -1809,7 +1810,7 @@
           <a:p>
             <a:fld id="{5BCAD085-E8A6-8845-BD4E-CB4CCA059FC4}" type="datetimeFigureOut">
               <a:rPr lang="en-US" smtClean="0"/>
-              <a:t>9/4/2026</a:t>
+              <a:t>9/19/2026</a:t>
             </a:fld>
             <a:endParaRPr lang="en-US"/>
           </a:p>
@@ -2228,7 +2229,7 @@
           <a:p>
             <a:fld id="{5BCAD085-E8A6-8845-BD4E-CB4CCA059FC4}" type="datetimeFigureOut">
               <a:rPr lang="en-US" smtClean="0"/>
-              <a:t>9/4/2026</a:t>
+              <a:t>9/19/2026</a:t>
             </a:fld>
             <a:endParaRPr lang="en-US"/>
           </a:p>
@@ -2345,7 +2346,7 @@
           <a:p>
             <a:fld id="{5BCAD085-E8A6-8845-BD4E-CB4CCA059FC4}" type="datetimeFigureOut">
               <a:rPr lang="en-US" smtClean="0"/>
-              <a:t>9/4/2026</a:t>
+              <a:t>9/19/2026</a:t>
             </a:fld>
             <a:endParaRPr lang="en-US"/>
           </a:p>
@@ -2440,7 +2441,7 @@
           <a:p>
             <a:fld id="{5BCAD085-E8A6-8845-BD4E-CB4CCA059FC4}" type="datetimeFigureOut">
               <a:rPr lang="en-US" smtClean="0"/>
-              <a:t>9/4/2026</a:t>
+              <a:t>9/19/2026</a:t>
             </a:fld>
             <a:endParaRPr lang="en-US"/>
           </a:p>
@@ -2715,7 +2716,7 @@
           <a:p>
             <a:fld id="{5BCAD085-E8A6-8845-BD4E-CB4CCA059FC4}" type="datetimeFigureOut">
               <a:rPr lang="en-US" smtClean="0"/>
-              <a:t>9/4/2026</a:t>
+              <a:t>9/19/2026</a:t>
             </a:fld>
             <a:endParaRPr lang="en-US"/>
           </a:p>
@@ -2967,7 +2968,7 @@
           <a:p>
             <a:fld id="{5BCAD085-E8A6-8845-BD4E-CB4CCA059FC4}" type="datetimeFigureOut">
               <a:rPr lang="en-US" smtClean="0"/>
-              <a:t>9/4/2026</a:t>
+              <a:t>9/19/2026</a:t>
             </a:fld>
             <a:endParaRPr lang="en-US"/>
           </a:p>
@@ -3178,7 +3179,7 @@
           <a:p>
             <a:fld id="{5BCAD085-E8A6-8845-BD4E-CB4CCA059FC4}" type="datetimeFigureOut">
               <a:rPr lang="en-US" smtClean="0"/>
-              <a:t>9/4/2026</a:t>
+              <a:t>9/19/2026</a:t>
             </a:fld>
             <a:endParaRPr lang="en-US"/>
           </a:p>
@@ -5277,50 +5278,6 @@
       </p:sp>
       <p:sp>
         <p:nvSpPr>
-          <p:cNvPr id="7" name="Rounded Rectangle 6"/>
-          <p:cNvSpPr/>
-          <p:nvPr/>
-        </p:nvSpPr>
-        <p:spPr>
-          <a:xfrm>
-            <a:off x="960120" y="1481328"/>
-            <a:ext cx="73152" cy="2569464"/>
-          </a:xfrm>
-          <a:prstGeom prst="roundRect">
-            <a:avLst/>
-          </a:prstGeom>
-          <a:solidFill>
-            <a:srgbClr val="6C43B4"/>
-          </a:solidFill>
-          <a:ln>
-            <a:noFill/>
-          </a:ln>
-        </p:spPr>
-        <p:style>
-          <a:lnRef idx="1">
-            <a:schemeClr val="accent1"/>
-          </a:lnRef>
-          <a:fillRef idx="3">
-            <a:schemeClr val="accent1"/>
-          </a:fillRef>
-          <a:effectRef idx="2">
-            <a:schemeClr val="accent1"/>
-          </a:effectRef>
-          <a:fontRef idx="minor">
-            <a:schemeClr val="lt1"/>
-          </a:fontRef>
-        </p:style>
-        <p:txBody>
-          <a:bodyPr rtlCol="0" anchor="ctr"/>
-          <a:lstStyle/>
-          <a:p>
-            <a:pPr algn="ctr"/>
-            <a:endParaRPr/>
-          </a:p>
-        </p:txBody>
-      </p:sp>
-      <p:sp>
-        <p:nvSpPr>
           <p:cNvPr id="8" name="TextBox 7"/>
           <p:cNvSpPr txBox="1"/>
           <p:nvPr/>
@@ -6017,7 +5974,7 @@
                                           </p:stCondLst>
                                         </p:cTn>
                                         <p:tgtEl>
-                                          <p:spTgt spid="7"/>
+                                          <p:spTgt spid="8"/>
                                         </p:tgtEl>
                                         <p:attrNameLst>
                                           <p:attrName>style.visibility</p:attrName>
@@ -6030,41 +5987,6 @@
                                     <p:animEffect transition="in" filter="fade">
                                       <p:cBhvr>
                                         <p:cTn id="10" dur="500"/>
-                                        <p:tgtEl>
-                                          <p:spTgt spid="7"/>
-                                        </p:tgtEl>
-                                      </p:cBhvr>
-                                    </p:animEffect>
-                                  </p:childTnLst>
-                                </p:cTn>
-                              </p:par>
-                              <p:par>
-                                <p:cTn id="11" presetID="10" presetClass="entr" presetSubtype="0" fill="hold" grpId="0" nodeType="withEffect">
-                                  <p:stCondLst>
-                                    <p:cond delay="0"/>
-                                  </p:stCondLst>
-                                  <p:childTnLst>
-                                    <p:set>
-                                      <p:cBhvr>
-                                        <p:cTn id="12" dur="1" fill="hold">
-                                          <p:stCondLst>
-                                            <p:cond delay="0"/>
-                                          </p:stCondLst>
-                                        </p:cTn>
-                                        <p:tgtEl>
-                                          <p:spTgt spid="8"/>
-                                        </p:tgtEl>
-                                        <p:attrNameLst>
-                                          <p:attrName>style.visibility</p:attrName>
-                                        </p:attrNameLst>
-                                      </p:cBhvr>
-                                      <p:to>
-                                        <p:strVal val="visible"/>
-                                      </p:to>
-                                    </p:set>
-                                    <p:animEffect transition="in" filter="fade">
-                                      <p:cBhvr>
-                                        <p:cTn id="13" dur="500"/>
                                         <p:tgtEl>
                                           <p:spTgt spid="8"/>
                                         </p:tgtEl>
@@ -6080,26 +6002,26 @@
                     </p:cTn>
                   </p:par>
                   <p:par>
-                    <p:cTn id="14" fill="hold">
+                    <p:cTn id="11" fill="hold">
                       <p:stCondLst>
                         <p:cond delay="indefinite"/>
                       </p:stCondLst>
                       <p:childTnLst>
                         <p:par>
-                          <p:cTn id="15" fill="hold">
+                          <p:cTn id="12" fill="hold">
                             <p:stCondLst>
                               <p:cond delay="0"/>
                             </p:stCondLst>
                             <p:childTnLst>
                               <p:par>
-                                <p:cTn id="16" presetID="10" presetClass="entr" presetSubtype="0" fill="hold" grpId="0" nodeType="clickEffect">
+                                <p:cTn id="13" presetID="10" presetClass="entr" presetSubtype="0" fill="hold" grpId="0" nodeType="clickEffect">
                                   <p:stCondLst>
                                     <p:cond delay="0"/>
                                   </p:stCondLst>
                                   <p:childTnLst>
                                     <p:set>
                                       <p:cBhvr>
-                                        <p:cTn id="17" dur="1" fill="hold">
+                                        <p:cTn id="14" dur="1" fill="hold">
                                           <p:stCondLst>
                                             <p:cond delay="0"/>
                                           </p:stCondLst>
@@ -6117,7 +6039,7 @@
                                     </p:set>
                                     <p:animEffect transition="in" filter="fade">
                                       <p:cBhvr>
-                                        <p:cTn id="18" dur="500"/>
+                                        <p:cTn id="15" dur="500"/>
                                         <p:tgtEl>
                                           <p:spTgt spid="9"/>
                                         </p:tgtEl>
@@ -6155,7 +6077,6 @@
     </p:tnLst>
     <p:bldLst>
       <p:bldP spid="6" grpId="0" animBg="1"/>
-      <p:bldP spid="7" grpId="0" animBg="1"/>
       <p:bldP spid="8" grpId="0"/>
       <p:bldP spid="9" grpId="0"/>
     </p:bldLst>
@@ -6441,50 +6362,6 @@
       </p:sp>
       <p:sp>
         <p:nvSpPr>
-          <p:cNvPr id="10" name="Rounded Rectangle 9"/>
-          <p:cNvSpPr/>
-          <p:nvPr/>
-        </p:nvSpPr>
-        <p:spPr>
-          <a:xfrm>
-            <a:off x="1180846" y="1409748"/>
-            <a:ext cx="74422" cy="1934149"/>
-          </a:xfrm>
-          <a:prstGeom prst="roundRect">
-            <a:avLst/>
-          </a:prstGeom>
-          <a:solidFill>
-            <a:srgbClr val="E65CA4"/>
-          </a:solidFill>
-          <a:ln>
-            <a:noFill/>
-          </a:ln>
-        </p:spPr>
-        <p:style>
-          <a:lnRef idx="1">
-            <a:schemeClr val="accent1"/>
-          </a:lnRef>
-          <a:fillRef idx="3">
-            <a:schemeClr val="accent1"/>
-          </a:fillRef>
-          <a:effectRef idx="2">
-            <a:schemeClr val="accent1"/>
-          </a:effectRef>
-          <a:fontRef idx="minor">
-            <a:schemeClr val="lt1"/>
-          </a:fontRef>
-        </p:style>
-        <p:txBody>
-          <a:bodyPr rtlCol="0" anchor="ctr"/>
-          <a:lstStyle/>
-          <a:p>
-            <a:pPr algn="ctr"/>
-            <a:endParaRPr/>
-          </a:p>
-        </p:txBody>
-      </p:sp>
-      <p:sp>
-        <p:nvSpPr>
           <p:cNvPr id="11" name="TextBox 10"/>
           <p:cNvSpPr txBox="1"/>
           <p:nvPr/>
@@ -7010,6 +6887,9 @@
                     <p:cTn id="3" fill="hold">
                       <p:stCondLst>
                         <p:cond delay="indefinite"/>
+                        <p:cond evt="onBegin" delay="0">
+                          <p:tn val="2"/>
+                        </p:cond>
                       </p:stCondLst>
                       <p:childTnLst>
                         <p:par>
@@ -7019,7 +6899,7 @@
                             </p:stCondLst>
                             <p:childTnLst>
                               <p:par>
-                                <p:cTn id="5" presetID="10" presetClass="entr" presetSubtype="0" fill="hold" grpId="0" nodeType="clickEffect">
+                                <p:cTn id="5" presetID="10" presetClass="entr" presetSubtype="0" fill="hold" grpId="0" nodeType="withEffect">
                                   <p:stCondLst>
                                     <p:cond delay="0"/>
                                   </p:stCondLst>
@@ -7032,7 +6912,7 @@
                                           </p:stCondLst>
                                         </p:cTn>
                                         <p:tgtEl>
-                                          <p:spTgt spid="10"/>
+                                          <p:spTgt spid="9"/>
                                         </p:tgtEl>
                                         <p:attrNameLst>
                                           <p:attrName>style.visibility</p:attrName>
@@ -7046,7 +6926,7 @@
                                       <p:cBhvr>
                                         <p:cTn id="7" dur="500"/>
                                         <p:tgtEl>
-                                          <p:spTgt spid="10"/>
+                                          <p:spTgt spid="9"/>
                                         </p:tgtEl>
                                       </p:cBhvr>
                                     </p:animEffect>
@@ -7067,7 +6947,7 @@
                                           </p:stCondLst>
                                         </p:cTn>
                                         <p:tgtEl>
-                                          <p:spTgt spid="9"/>
+                                          <p:spTgt spid="11"/>
                                         </p:tgtEl>
                                         <p:attrNameLst>
                                           <p:attrName>style.visibility</p:attrName>
@@ -7081,7 +6961,7 @@
                                       <p:cBhvr>
                                         <p:cTn id="10" dur="500"/>
                                         <p:tgtEl>
-                                          <p:spTgt spid="9"/>
+                                          <p:spTgt spid="11"/>
                                         </p:tgtEl>
                                       </p:cBhvr>
                                     </p:animEffect>
@@ -7102,7 +6982,7 @@
                                           </p:stCondLst>
                                         </p:cTn>
                                         <p:tgtEl>
-                                          <p:spTgt spid="11"/>
+                                          <p:spTgt spid="12"/>
                                         </p:tgtEl>
                                         <p:attrNameLst>
                                           <p:attrName>style.visibility</p:attrName>
@@ -7115,41 +6995,6 @@
                                     <p:animEffect transition="in" filter="fade">
                                       <p:cBhvr>
                                         <p:cTn id="13" dur="500"/>
-                                        <p:tgtEl>
-                                          <p:spTgt spid="11"/>
-                                        </p:tgtEl>
-                                      </p:cBhvr>
-                                    </p:animEffect>
-                                  </p:childTnLst>
-                                </p:cTn>
-                              </p:par>
-                              <p:par>
-                                <p:cTn id="14" presetID="10" presetClass="entr" presetSubtype="0" fill="hold" grpId="0" nodeType="withEffect">
-                                  <p:stCondLst>
-                                    <p:cond delay="0"/>
-                                  </p:stCondLst>
-                                  <p:childTnLst>
-                                    <p:set>
-                                      <p:cBhvr>
-                                        <p:cTn id="15" dur="1" fill="hold">
-                                          <p:stCondLst>
-                                            <p:cond delay="0"/>
-                                          </p:stCondLst>
-                                        </p:cTn>
-                                        <p:tgtEl>
-                                          <p:spTgt spid="12"/>
-                                        </p:tgtEl>
-                                        <p:attrNameLst>
-                                          <p:attrName>style.visibility</p:attrName>
-                                        </p:attrNameLst>
-                                      </p:cBhvr>
-                                      <p:to>
-                                        <p:strVal val="visible"/>
-                                      </p:to>
-                                    </p:set>
-                                    <p:animEffect transition="in" filter="fade">
-                                      <p:cBhvr>
-                                        <p:cTn id="16" dur="500"/>
                                         <p:tgtEl>
                                           <p:spTgt spid="12"/>
                                         </p:tgtEl>
@@ -7165,32 +7010,67 @@
                     </p:cTn>
                   </p:par>
                   <p:par>
-                    <p:cTn id="17" fill="hold">
+                    <p:cTn id="14" fill="hold">
                       <p:stCondLst>
                         <p:cond delay="indefinite"/>
                       </p:stCondLst>
                       <p:childTnLst>
                         <p:par>
-                          <p:cTn id="18" fill="hold">
+                          <p:cTn id="15" fill="hold">
                             <p:stCondLst>
                               <p:cond delay="0"/>
                             </p:stCondLst>
                             <p:childTnLst>
                               <p:par>
-                                <p:cTn id="19" presetID="10" presetClass="entr" presetSubtype="0" fill="hold" grpId="0" nodeType="clickEffect">
+                                <p:cTn id="16" presetID="10" presetClass="entr" presetSubtype="0" fill="hold" grpId="0" nodeType="clickEffect">
                                   <p:stCondLst>
                                     <p:cond delay="0"/>
                                   </p:stCondLst>
                                   <p:childTnLst>
                                     <p:set>
                                       <p:cBhvr>
+                                        <p:cTn id="17" dur="1" fill="hold">
+                                          <p:stCondLst>
+                                            <p:cond delay="0"/>
+                                          </p:stCondLst>
+                                        </p:cTn>
+                                        <p:tgtEl>
+                                          <p:spTgt spid="18"/>
+                                        </p:tgtEl>
+                                        <p:attrNameLst>
+                                          <p:attrName>style.visibility</p:attrName>
+                                        </p:attrNameLst>
+                                      </p:cBhvr>
+                                      <p:to>
+                                        <p:strVal val="visible"/>
+                                      </p:to>
+                                    </p:set>
+                                    <p:animEffect transition="in" filter="fade">
+                                      <p:cBhvr>
+                                        <p:cTn id="18" dur="500"/>
+                                        <p:tgtEl>
+                                          <p:spTgt spid="18"/>
+                                        </p:tgtEl>
+                                      </p:cBhvr>
+                                    </p:animEffect>
+                                  </p:childTnLst>
+                                </p:cTn>
+                              </p:par>
+                              <p:par>
+                                <p:cTn id="19" presetID="10" presetClass="entr" presetSubtype="0" fill="hold" grpId="0" nodeType="withEffect">
+                                  <p:stCondLst>
+                                    <p:cond delay="0"/>
+                                  </p:stCondLst>
+                                  <p:childTnLst>
+                                    <p:set>
+                                      <p:cBhvr>
                                         <p:cTn id="20" dur="1" fill="hold">
                                           <p:stCondLst>
                                             <p:cond delay="0"/>
                                           </p:stCondLst>
                                         </p:cTn>
                                         <p:tgtEl>
-                                          <p:spTgt spid="18"/>
+                                          <p:spTgt spid="14"/>
                                         </p:tgtEl>
                                         <p:attrNameLst>
                                           <p:attrName>style.visibility</p:attrName>
@@ -7203,41 +7083,6 @@
                                     <p:animEffect transition="in" filter="fade">
                                       <p:cBhvr>
                                         <p:cTn id="21" dur="500"/>
-                                        <p:tgtEl>
-                                          <p:spTgt spid="18"/>
-                                        </p:tgtEl>
-                                      </p:cBhvr>
-                                    </p:animEffect>
-                                  </p:childTnLst>
-                                </p:cTn>
-                              </p:par>
-                              <p:par>
-                                <p:cTn id="22" presetID="10" presetClass="entr" presetSubtype="0" fill="hold" grpId="0" nodeType="withEffect">
-                                  <p:stCondLst>
-                                    <p:cond delay="0"/>
-                                  </p:stCondLst>
-                                  <p:childTnLst>
-                                    <p:set>
-                                      <p:cBhvr>
-                                        <p:cTn id="23" dur="1" fill="hold">
-                                          <p:stCondLst>
-                                            <p:cond delay="0"/>
-                                          </p:stCondLst>
-                                        </p:cTn>
-                                        <p:tgtEl>
-                                          <p:spTgt spid="14"/>
-                                        </p:tgtEl>
-                                        <p:attrNameLst>
-                                          <p:attrName>style.visibility</p:attrName>
-                                        </p:attrNameLst>
-                                      </p:cBhvr>
-                                      <p:to>
-                                        <p:strVal val="visible"/>
-                                      </p:to>
-                                    </p:set>
-                                    <p:animEffect transition="in" filter="fade">
-                                      <p:cBhvr>
-                                        <p:cTn id="24" dur="500"/>
                                         <p:tgtEl>
                                           <p:spTgt spid="14"/>
                                         </p:tgtEl>
@@ -7275,7 +7120,6 @@
     </p:tnLst>
     <p:bldLst>
       <p:bldP spid="9" grpId="0" animBg="1"/>
-      <p:bldP spid="10" grpId="0" animBg="1"/>
       <p:bldP spid="11" grpId="0"/>
       <p:bldP spid="12" grpId="0"/>
       <p:bldP spid="14" grpId="0" animBg="1"/>
@@ -8358,50 +8202,6 @@
       </p:sp>
       <p:sp>
         <p:nvSpPr>
-          <p:cNvPr id="7" name="Rounded Rectangle 6"/>
-          <p:cNvSpPr/>
-          <p:nvPr/>
-        </p:nvSpPr>
-        <p:spPr>
-          <a:xfrm>
-            <a:off x="868680" y="1435607"/>
-            <a:ext cx="67056" cy="3792791"/>
-          </a:xfrm>
-          <a:prstGeom prst="roundRect">
-            <a:avLst/>
-          </a:prstGeom>
-          <a:solidFill>
-            <a:srgbClr val="6C43B4"/>
-          </a:solidFill>
-          <a:ln>
-            <a:noFill/>
-          </a:ln>
-        </p:spPr>
-        <p:style>
-          <a:lnRef idx="1">
-            <a:schemeClr val="accent1"/>
-          </a:lnRef>
-          <a:fillRef idx="3">
-            <a:schemeClr val="accent1"/>
-          </a:fillRef>
-          <a:effectRef idx="2">
-            <a:schemeClr val="accent1"/>
-          </a:effectRef>
-          <a:fontRef idx="minor">
-            <a:schemeClr val="lt1"/>
-          </a:fontRef>
-        </p:style>
-        <p:txBody>
-          <a:bodyPr rtlCol="0" anchor="ctr"/>
-          <a:lstStyle/>
-          <a:p>
-            <a:pPr algn="ctr"/>
-            <a:endParaRPr/>
-          </a:p>
-        </p:txBody>
-      </p:sp>
-      <p:sp>
-        <p:nvSpPr>
           <p:cNvPr id="9" name="TextBox 8"/>
           <p:cNvSpPr txBox="1"/>
           <p:nvPr/>
@@ -9469,7 +9269,7 @@
                                           </p:stCondLst>
                                         </p:cTn>
                                         <p:tgtEl>
-                                          <p:spTgt spid="7"/>
+                                          <p:spTgt spid="6"/>
                                         </p:tgtEl>
                                         <p:attrNameLst>
                                           <p:attrName>style.visibility</p:attrName>
@@ -9483,7 +9283,7 @@
                                       <p:cBhvr>
                                         <p:cTn id="16" dur="500"/>
                                         <p:tgtEl>
-                                          <p:spTgt spid="7"/>
+                                          <p:spTgt spid="6"/>
                                         </p:tgtEl>
                                       </p:cBhvr>
                                     </p:animEffect>
@@ -9504,7 +9304,7 @@
                                           </p:stCondLst>
                                         </p:cTn>
                                         <p:tgtEl>
-                                          <p:spTgt spid="6"/>
+                                          <p:spTgt spid="11"/>
                                         </p:tgtEl>
                                         <p:attrNameLst>
                                           <p:attrName>style.visibility</p:attrName>
@@ -9518,7 +9318,7 @@
                                       <p:cBhvr>
                                         <p:cTn id="19" dur="500"/>
                                         <p:tgtEl>
-                                          <p:spTgt spid="6"/>
+                                          <p:spTgt spid="11"/>
                                         </p:tgtEl>
                                       </p:cBhvr>
                                     </p:animEffect>
@@ -9539,7 +9339,7 @@
                                           </p:stCondLst>
                                         </p:cTn>
                                         <p:tgtEl>
-                                          <p:spTgt spid="11"/>
+                                          <p:spTgt spid="10"/>
                                         </p:tgtEl>
                                         <p:attrNameLst>
                                           <p:attrName>style.visibility</p:attrName>
@@ -9553,7 +9353,7 @@
                                       <p:cBhvr>
                                         <p:cTn id="22" dur="500"/>
                                         <p:tgtEl>
-                                          <p:spTgt spid="11"/>
+                                          <p:spTgt spid="10"/>
                                         </p:tgtEl>
                                       </p:cBhvr>
                                     </p:animEffect>
@@ -9574,7 +9374,7 @@
                                           </p:stCondLst>
                                         </p:cTn>
                                         <p:tgtEl>
-                                          <p:spTgt spid="10"/>
+                                          <p:spTgt spid="12"/>
                                         </p:tgtEl>
                                         <p:attrNameLst>
                                           <p:attrName>style.visibility</p:attrName>
@@ -9588,7 +9388,7 @@
                                       <p:cBhvr>
                                         <p:cTn id="25" dur="500"/>
                                         <p:tgtEl>
-                                          <p:spTgt spid="10"/>
+                                          <p:spTgt spid="12"/>
                                         </p:tgtEl>
                                       </p:cBhvr>
                                     </p:animEffect>
@@ -9609,7 +9409,7 @@
                                           </p:stCondLst>
                                         </p:cTn>
                                         <p:tgtEl>
-                                          <p:spTgt spid="12"/>
+                                          <p:spTgt spid="14"/>
                                         </p:tgtEl>
                                         <p:attrNameLst>
                                           <p:attrName>style.visibility</p:attrName>
@@ -9623,7 +9423,7 @@
                                       <p:cBhvr>
                                         <p:cTn id="28" dur="500"/>
                                         <p:tgtEl>
-                                          <p:spTgt spid="12"/>
+                                          <p:spTgt spid="14"/>
                                         </p:tgtEl>
                                       </p:cBhvr>
                                     </p:animEffect>
@@ -9644,7 +9444,7 @@
                                           </p:stCondLst>
                                         </p:cTn>
                                         <p:tgtEl>
-                                          <p:spTgt spid="14"/>
+                                          <p:spTgt spid="13"/>
                                         </p:tgtEl>
                                         <p:attrNameLst>
                                           <p:attrName>style.visibility</p:attrName>
@@ -9658,7 +9458,7 @@
                                       <p:cBhvr>
                                         <p:cTn id="31" dur="500"/>
                                         <p:tgtEl>
-                                          <p:spTgt spid="14"/>
+                                          <p:spTgt spid="13"/>
                                         </p:tgtEl>
                                       </p:cBhvr>
                                     </p:animEffect>
@@ -9679,7 +9479,7 @@
                                           </p:stCondLst>
                                         </p:cTn>
                                         <p:tgtEl>
-                                          <p:spTgt spid="13"/>
+                                          <p:spTgt spid="15"/>
                                         </p:tgtEl>
                                         <p:attrNameLst>
                                           <p:attrName>style.visibility</p:attrName>
@@ -9693,7 +9493,7 @@
                                       <p:cBhvr>
                                         <p:cTn id="34" dur="500"/>
                                         <p:tgtEl>
-                                          <p:spTgt spid="13"/>
+                                          <p:spTgt spid="15"/>
                                         </p:tgtEl>
                                       </p:cBhvr>
                                     </p:animEffect>
@@ -9714,7 +9514,7 @@
                                           </p:stCondLst>
                                         </p:cTn>
                                         <p:tgtEl>
-                                          <p:spTgt spid="15"/>
+                                          <p:spTgt spid="17"/>
                                         </p:tgtEl>
                                         <p:attrNameLst>
                                           <p:attrName>style.visibility</p:attrName>
@@ -9728,7 +9528,7 @@
                                       <p:cBhvr>
                                         <p:cTn id="37" dur="500"/>
                                         <p:tgtEl>
-                                          <p:spTgt spid="15"/>
+                                          <p:spTgt spid="17"/>
                                         </p:tgtEl>
                                       </p:cBhvr>
                                     </p:animEffect>
@@ -9749,7 +9549,7 @@
                                           </p:stCondLst>
                                         </p:cTn>
                                         <p:tgtEl>
-                                          <p:spTgt spid="17"/>
+                                          <p:spTgt spid="18"/>
                                         </p:tgtEl>
                                         <p:attrNameLst>
                                           <p:attrName>style.visibility</p:attrName>
@@ -9763,7 +9563,7 @@
                                       <p:cBhvr>
                                         <p:cTn id="40" dur="500"/>
                                         <p:tgtEl>
-                                          <p:spTgt spid="17"/>
+                                          <p:spTgt spid="18"/>
                                         </p:tgtEl>
                                       </p:cBhvr>
                                     </p:animEffect>
@@ -9784,7 +9584,7 @@
                                           </p:stCondLst>
                                         </p:cTn>
                                         <p:tgtEl>
-                                          <p:spTgt spid="18"/>
+                                          <p:spTgt spid="16"/>
                                         </p:tgtEl>
                                         <p:attrNameLst>
                                           <p:attrName>style.visibility</p:attrName>
@@ -9797,41 +9597,6 @@
                                     <p:animEffect transition="in" filter="fade">
                                       <p:cBhvr>
                                         <p:cTn id="43" dur="500"/>
-                                        <p:tgtEl>
-                                          <p:spTgt spid="18"/>
-                                        </p:tgtEl>
-                                      </p:cBhvr>
-                                    </p:animEffect>
-                                  </p:childTnLst>
-                                </p:cTn>
-                              </p:par>
-                              <p:par>
-                                <p:cTn id="44" presetID="10" presetClass="entr" presetSubtype="0" fill="hold" grpId="0" nodeType="withEffect">
-                                  <p:stCondLst>
-                                    <p:cond delay="0"/>
-                                  </p:stCondLst>
-                                  <p:childTnLst>
-                                    <p:set>
-                                      <p:cBhvr>
-                                        <p:cTn id="45" dur="1" fill="hold">
-                                          <p:stCondLst>
-                                            <p:cond delay="0"/>
-                                          </p:stCondLst>
-                                        </p:cTn>
-                                        <p:tgtEl>
-                                          <p:spTgt spid="16"/>
-                                        </p:tgtEl>
-                                        <p:attrNameLst>
-                                          <p:attrName>style.visibility</p:attrName>
-                                        </p:attrNameLst>
-                                      </p:cBhvr>
-                                      <p:to>
-                                        <p:strVal val="visible"/>
-                                      </p:to>
-                                    </p:set>
-                                    <p:animEffect transition="in" filter="fade">
-                                      <p:cBhvr>
-                                        <p:cTn id="46" dur="500"/>
                                         <p:tgtEl>
                                           <p:spTgt spid="16"/>
                                         </p:tgtEl>
@@ -9869,7 +9634,6 @@
     </p:tnLst>
     <p:bldLst>
       <p:bldP spid="6" grpId="0" animBg="1"/>
-      <p:bldP spid="7" grpId="0" animBg="1"/>
       <p:bldP spid="9" grpId="0"/>
       <p:bldP spid="10" grpId="0" animBg="1"/>
       <p:bldP spid="11" grpId="0"/>
@@ -10362,7 +10126,7 @@
         <p:spPr>
           <a:xfrm>
             <a:off x="640080" y="1234440"/>
-            <a:ext cx="5394960" cy="4389120"/>
+            <a:ext cx="4978295" cy="2922781"/>
           </a:xfrm>
           <a:prstGeom prst="roundRect">
             <a:avLst/>
@@ -10401,56 +10165,6 @@
       </p:sp>
       <p:sp>
         <p:nvSpPr>
-          <p:cNvPr id="7" name="Rounded Rectangle 6">
-            <a:extLst>
-              <a:ext uri="{FF2B5EF4-FFF2-40B4-BE49-F238E27FC236}">
-                <a16:creationId xmlns:a16="http://schemas.microsoft.com/office/drawing/2014/main" id="{45E5D80E-D538-BC4C-7262-29830B39764D}"/>
-              </a:ext>
-            </a:extLst>
-          </p:cNvPr>
-          <p:cNvSpPr/>
-          <p:nvPr/>
-        </p:nvSpPr>
-        <p:spPr>
-          <a:xfrm>
-            <a:off x="873205" y="1595628"/>
-            <a:ext cx="73152" cy="3493197"/>
-          </a:xfrm>
-          <a:prstGeom prst="roundRect">
-            <a:avLst/>
-          </a:prstGeom>
-          <a:solidFill>
-            <a:srgbClr val="6C43B4"/>
-          </a:solidFill>
-          <a:ln>
-            <a:noFill/>
-          </a:ln>
-        </p:spPr>
-        <p:style>
-          <a:lnRef idx="1">
-            <a:schemeClr val="accent1"/>
-          </a:lnRef>
-          <a:fillRef idx="3">
-            <a:schemeClr val="accent1"/>
-          </a:fillRef>
-          <a:effectRef idx="2">
-            <a:schemeClr val="accent1"/>
-          </a:effectRef>
-          <a:fontRef idx="minor">
-            <a:schemeClr val="lt1"/>
-          </a:fontRef>
-        </p:style>
-        <p:txBody>
-          <a:bodyPr rtlCol="0" anchor="ctr"/>
-          <a:lstStyle/>
-          <a:p>
-            <a:pPr algn="ctr"/>
-            <a:endParaRPr/>
-          </a:p>
-        </p:txBody>
-      </p:sp>
-      <p:sp>
-        <p:nvSpPr>
           <p:cNvPr id="8" name="TextBox 7">
             <a:extLst>
               <a:ext uri="{FF2B5EF4-FFF2-40B4-BE49-F238E27FC236}">
@@ -10572,8 +10286,8 @@
         </p:nvSpPr>
         <p:spPr>
           <a:xfrm>
-            <a:off x="6217920" y="1234440"/>
-            <a:ext cx="5303520" cy="4389120"/>
+            <a:off x="6506849" y="1234440"/>
+            <a:ext cx="4892040" cy="2922781"/>
           </a:xfrm>
           <a:prstGeom prst="roundRect">
             <a:avLst/>
@@ -10612,56 +10326,6 @@
       </p:sp>
       <p:sp>
         <p:nvSpPr>
-          <p:cNvPr id="11" name="Rounded Rectangle 10">
-            <a:extLst>
-              <a:ext uri="{FF2B5EF4-FFF2-40B4-BE49-F238E27FC236}">
-                <a16:creationId xmlns:a16="http://schemas.microsoft.com/office/drawing/2014/main" id="{98EFDB1E-419D-3837-E91C-A2E2B36C31E8}"/>
-              </a:ext>
-            </a:extLst>
-          </p:cNvPr>
-          <p:cNvSpPr/>
-          <p:nvPr/>
-        </p:nvSpPr>
-        <p:spPr>
-          <a:xfrm>
-            <a:off x="6400517" y="1672975"/>
-            <a:ext cx="73152" cy="3512050"/>
-          </a:xfrm>
-          <a:prstGeom prst="roundRect">
-            <a:avLst/>
-          </a:prstGeom>
-          <a:solidFill>
-            <a:srgbClr val="E65CA4"/>
-          </a:solidFill>
-          <a:ln>
-            <a:noFill/>
-          </a:ln>
-        </p:spPr>
-        <p:style>
-          <a:lnRef idx="1">
-            <a:schemeClr val="accent1"/>
-          </a:lnRef>
-          <a:fillRef idx="3">
-            <a:schemeClr val="accent1"/>
-          </a:fillRef>
-          <a:effectRef idx="2">
-            <a:schemeClr val="accent1"/>
-          </a:effectRef>
-          <a:fontRef idx="minor">
-            <a:schemeClr val="lt1"/>
-          </a:fontRef>
-        </p:style>
-        <p:txBody>
-          <a:bodyPr rtlCol="0" anchor="ctr"/>
-          <a:lstStyle/>
-          <a:p>
-            <a:pPr algn="ctr"/>
-            <a:endParaRPr/>
-          </a:p>
-        </p:txBody>
-      </p:sp>
-      <p:sp>
-        <p:nvSpPr>
           <p:cNvPr id="12" name="TextBox 11">
             <a:extLst>
               <a:ext uri="{FF2B5EF4-FFF2-40B4-BE49-F238E27FC236}">
@@ -10674,7 +10338,7 @@
         </p:nvSpPr>
         <p:spPr>
           <a:xfrm>
-            <a:off x="6565392" y="1435608"/>
+            <a:off x="6766560" y="1423541"/>
             <a:ext cx="4800600" cy="320040"/>
           </a:xfrm>
           <a:prstGeom prst="rect">
@@ -10697,6 +10361,7 @@
               </a:defRPr>
             </a:pPr>
             <a:r>
+              <a:rPr dirty="0"/>
               <a:t>Where is the transaction data?</a:t>
             </a:r>
           </a:p>
@@ -10716,7 +10381,7 @@
         </p:nvSpPr>
         <p:spPr>
           <a:xfrm>
-            <a:off x="6565392" y="1856232"/>
+            <a:off x="6748272" y="1856231"/>
             <a:ext cx="4773168" cy="3611879"/>
           </a:xfrm>
           <a:prstGeom prst="rect">
@@ -10786,6 +10451,98 @@
             </a:pPr>
             <a:r>
               <a:t>10</a:t>
+            </a:r>
+          </a:p>
+        </p:txBody>
+      </p:sp>
+      <p:sp>
+        <p:nvSpPr>
+          <p:cNvPr id="16" name="TextBox 15">
+            <a:extLst>
+              <a:ext uri="{FF2B5EF4-FFF2-40B4-BE49-F238E27FC236}">
+                <a16:creationId xmlns:a16="http://schemas.microsoft.com/office/drawing/2014/main" id="{1E278987-3DEB-6F5F-EF7E-D070A7845FED}"/>
+              </a:ext>
+            </a:extLst>
+          </p:cNvPr>
+          <p:cNvSpPr txBox="1"/>
+          <p:nvPr/>
+        </p:nvSpPr>
+        <p:spPr>
+          <a:xfrm>
+            <a:off x="796564" y="5025674"/>
+            <a:ext cx="10404835" cy="369332"/>
+          </a:xfrm>
+          <a:prstGeom prst="rect">
+            <a:avLst/>
+          </a:prstGeom>
+          <a:noFill/>
+        </p:spPr>
+        <p:txBody>
+          <a:bodyPr wrap="square">
+            <a:spAutoFit/>
+          </a:bodyPr>
+          <a:lstStyle/>
+          <a:p>
+            <a:r>
+              <a:rPr lang="en-US" sz="1800" b="1" dirty="0">
+                <a:solidFill>
+                  <a:srgbClr val="1A3A5C"/>
+                </a:solidFill>
+                <a:effectLst/>
+                <a:latin typeface="Calibri" panose="020F0502020204030204" pitchFamily="34" charset="0"/>
+                <a:ea typeface="Calibri" panose="020F0502020204030204" pitchFamily="34" charset="0"/>
+              </a:rPr>
+              <a:t>MUC01_Weekly_Sales_API_Response.json =</a:t>
+            </a:r>
+            <a:r>
+              <a:rPr lang="en-US" b="1" dirty="0"/>
+              <a:t> the last 7 days of sales data (Jun 24–30) structured as a JSON </a:t>
+            </a:r>
+          </a:p>
+        </p:txBody>
+      </p:sp>
+      <p:sp>
+        <p:nvSpPr>
+          <p:cNvPr id="18" name="TextBox 17">
+            <a:extLst>
+              <a:ext uri="{FF2B5EF4-FFF2-40B4-BE49-F238E27FC236}">
+                <a16:creationId xmlns:a16="http://schemas.microsoft.com/office/drawing/2014/main" id="{BB4C1C94-DC18-F0F3-460D-0F6D4D9B1B10}"/>
+              </a:ext>
+            </a:extLst>
+          </p:cNvPr>
+          <p:cNvSpPr txBox="1"/>
+          <p:nvPr/>
+        </p:nvSpPr>
+        <p:spPr>
+          <a:xfrm>
+            <a:off x="796563" y="5451772"/>
+            <a:ext cx="8403997" cy="369332"/>
+          </a:xfrm>
+          <a:prstGeom prst="rect">
+            <a:avLst/>
+          </a:prstGeom>
+          <a:noFill/>
+        </p:spPr>
+        <p:txBody>
+          <a:bodyPr wrap="square">
+            <a:spAutoFit/>
+          </a:bodyPr>
+          <a:lstStyle/>
+          <a:p>
+            <a:r>
+              <a:rPr lang="en-US" sz="1800" b="1" dirty="0">
+                <a:solidFill>
+                  <a:srgbClr val="1A3A5C"/>
+                </a:solidFill>
+                <a:effectLst/>
+                <a:latin typeface="Calibri" panose="020F0502020204030204" pitchFamily="34" charset="0"/>
+                <a:ea typeface="Calibri" panose="020F0502020204030204" pitchFamily="34" charset="0"/>
+              </a:rPr>
+              <a:t>MUC01_Weekly_Sales_API_Corrupt.json = </a:t>
+            </a:r>
+            <a:r>
+              <a:rPr lang="en-US" b="1" dirty="0"/>
+              <a:t>Used for the validation exercise.</a:t>
             </a:r>
           </a:p>
         </p:txBody>
@@ -10869,7 +10626,7 @@
                                           </p:stCondLst>
                                         </p:cTn>
                                         <p:tgtEl>
-                                          <p:spTgt spid="7"/>
+                                          <p:spTgt spid="8"/>
                                         </p:tgtEl>
                                         <p:attrNameLst>
                                           <p:attrName>style.visibility</p:attrName>
@@ -10883,7 +10640,7 @@
                                       <p:cBhvr>
                                         <p:cTn id="10" dur="500"/>
                                         <p:tgtEl>
-                                          <p:spTgt spid="7"/>
+                                          <p:spTgt spid="8"/>
                                         </p:tgtEl>
                                       </p:cBhvr>
                                     </p:animEffect>
@@ -10904,7 +10661,7 @@
                                           </p:stCondLst>
                                         </p:cTn>
                                         <p:tgtEl>
-                                          <p:spTgt spid="8"/>
+                                          <p:spTgt spid="9"/>
                                         </p:tgtEl>
                                         <p:attrNameLst>
                                           <p:attrName>style.visibility</p:attrName>
@@ -10918,7 +10675,7 @@
                                       <p:cBhvr>
                                         <p:cTn id="13" dur="500"/>
                                         <p:tgtEl>
-                                          <p:spTgt spid="8"/>
+                                          <p:spTgt spid="9"/>
                                         </p:tgtEl>
                                       </p:cBhvr>
                                     </p:animEffect>
@@ -10939,7 +10696,7 @@
                                           </p:stCondLst>
                                         </p:cTn>
                                         <p:tgtEl>
-                                          <p:spTgt spid="9"/>
+                                          <p:spTgt spid="10"/>
                                         </p:tgtEl>
                                         <p:attrNameLst>
                                           <p:attrName>style.visibility</p:attrName>
@@ -10953,7 +10710,7 @@
                                       <p:cBhvr>
                                         <p:cTn id="16" dur="500"/>
                                         <p:tgtEl>
-                                          <p:spTgt spid="9"/>
+                                          <p:spTgt spid="10"/>
                                         </p:tgtEl>
                                       </p:cBhvr>
                                     </p:animEffect>
@@ -10974,7 +10731,7 @@
                                           </p:stCondLst>
                                         </p:cTn>
                                         <p:tgtEl>
-                                          <p:spTgt spid="10"/>
+                                          <p:spTgt spid="12"/>
                                         </p:tgtEl>
                                         <p:attrNameLst>
                                           <p:attrName>style.visibility</p:attrName>
@@ -10988,7 +10745,7 @@
                                       <p:cBhvr>
                                         <p:cTn id="19" dur="500"/>
                                         <p:tgtEl>
-                                          <p:spTgt spid="10"/>
+                                          <p:spTgt spid="12"/>
                                         </p:tgtEl>
                                       </p:cBhvr>
                                     </p:animEffect>
@@ -11009,7 +10766,7 @@
                                           </p:stCondLst>
                                         </p:cTn>
                                         <p:tgtEl>
-                                          <p:spTgt spid="11"/>
+                                          <p:spTgt spid="13"/>
                                         </p:tgtEl>
                                         <p:attrNameLst>
                                           <p:attrName>style.visibility</p:attrName>
@@ -11023,7 +10780,7 @@
                                       <p:cBhvr>
                                         <p:cTn id="22" dur="500"/>
                                         <p:tgtEl>
-                                          <p:spTgt spid="11"/>
+                                          <p:spTgt spid="13"/>
                                         </p:tgtEl>
                                       </p:cBhvr>
                                     </p:animEffect>
@@ -11044,7 +10801,7 @@
                                           </p:stCondLst>
                                         </p:cTn>
                                         <p:tgtEl>
-                                          <p:spTgt spid="12"/>
+                                          <p:spTgt spid="14"/>
                                         </p:tgtEl>
                                         <p:attrNameLst>
                                           <p:attrName>style.visibility</p:attrName>
@@ -11057,76 +10814,6 @@
                                     <p:animEffect transition="in" filter="fade">
                                       <p:cBhvr>
                                         <p:cTn id="25" dur="500"/>
-                                        <p:tgtEl>
-                                          <p:spTgt spid="12"/>
-                                        </p:tgtEl>
-                                      </p:cBhvr>
-                                    </p:animEffect>
-                                  </p:childTnLst>
-                                </p:cTn>
-                              </p:par>
-                              <p:par>
-                                <p:cTn id="26" presetID="10" presetClass="entr" presetSubtype="0" fill="hold" grpId="0" nodeType="withEffect">
-                                  <p:stCondLst>
-                                    <p:cond delay="0"/>
-                                  </p:stCondLst>
-                                  <p:childTnLst>
-                                    <p:set>
-                                      <p:cBhvr>
-                                        <p:cTn id="27" dur="1" fill="hold">
-                                          <p:stCondLst>
-                                            <p:cond delay="0"/>
-                                          </p:stCondLst>
-                                        </p:cTn>
-                                        <p:tgtEl>
-                                          <p:spTgt spid="13"/>
-                                        </p:tgtEl>
-                                        <p:attrNameLst>
-                                          <p:attrName>style.visibility</p:attrName>
-                                        </p:attrNameLst>
-                                      </p:cBhvr>
-                                      <p:to>
-                                        <p:strVal val="visible"/>
-                                      </p:to>
-                                    </p:set>
-                                    <p:animEffect transition="in" filter="fade">
-                                      <p:cBhvr>
-                                        <p:cTn id="28" dur="500"/>
-                                        <p:tgtEl>
-                                          <p:spTgt spid="13"/>
-                                        </p:tgtEl>
-                                      </p:cBhvr>
-                                    </p:animEffect>
-                                  </p:childTnLst>
-                                </p:cTn>
-                              </p:par>
-                              <p:par>
-                                <p:cTn id="29" presetID="10" presetClass="entr" presetSubtype="0" fill="hold" grpId="0" nodeType="withEffect">
-                                  <p:stCondLst>
-                                    <p:cond delay="0"/>
-                                  </p:stCondLst>
-                                  <p:childTnLst>
-                                    <p:set>
-                                      <p:cBhvr>
-                                        <p:cTn id="30" dur="1" fill="hold">
-                                          <p:stCondLst>
-                                            <p:cond delay="0"/>
-                                          </p:stCondLst>
-                                        </p:cTn>
-                                        <p:tgtEl>
-                                          <p:spTgt spid="14"/>
-                                        </p:tgtEl>
-                                        <p:attrNameLst>
-                                          <p:attrName>style.visibility</p:attrName>
-                                        </p:attrNameLst>
-                                      </p:cBhvr>
-                                      <p:to>
-                                        <p:strVal val="visible"/>
-                                      </p:to>
-                                    </p:set>
-                                    <p:animEffect transition="in" filter="fade">
-                                      <p:cBhvr>
-                                        <p:cTn id="31" dur="500"/>
                                         <p:tgtEl>
                                           <p:spTgt spid="14"/>
                                         </p:tgtEl>
@@ -11164,11 +10851,9 @@
     </p:tnLst>
     <p:bldLst>
       <p:bldP spid="6" grpId="0" animBg="1"/>
-      <p:bldP spid="7" grpId="0" animBg="1"/>
       <p:bldP spid="8" grpId="0"/>
       <p:bldP spid="9" grpId="0"/>
       <p:bldP spid="10" grpId="0" animBg="1"/>
-      <p:bldP spid="11" grpId="0" animBg="1"/>
       <p:bldP spid="12" grpId="0"/>
       <p:bldP spid="13" grpId="0"/>
       <p:bldP spid="14" grpId="0"/>
@@ -12556,50 +12241,6 @@
       </p:sp>
       <p:sp>
         <p:nvSpPr>
-          <p:cNvPr id="19" name="Rounded Rectangle 18"/>
-          <p:cNvSpPr/>
-          <p:nvPr/>
-        </p:nvSpPr>
-        <p:spPr>
-          <a:xfrm>
-            <a:off x="868680" y="3218688"/>
-            <a:ext cx="73152" cy="2249424"/>
-          </a:xfrm>
-          <a:prstGeom prst="roundRect">
-            <a:avLst/>
-          </a:prstGeom>
-          <a:solidFill>
-            <a:srgbClr val="6C43B4"/>
-          </a:solidFill>
-          <a:ln>
-            <a:noFill/>
-          </a:ln>
-        </p:spPr>
-        <p:style>
-          <a:lnRef idx="1">
-            <a:schemeClr val="accent1"/>
-          </a:lnRef>
-          <a:fillRef idx="3">
-            <a:schemeClr val="accent1"/>
-          </a:fillRef>
-          <a:effectRef idx="2">
-            <a:schemeClr val="accent1"/>
-          </a:effectRef>
-          <a:fontRef idx="minor">
-            <a:schemeClr val="lt1"/>
-          </a:fontRef>
-        </p:style>
-        <p:txBody>
-          <a:bodyPr rtlCol="0" anchor="ctr"/>
-          <a:lstStyle/>
-          <a:p>
-            <a:pPr algn="ctr"/>
-            <a:endParaRPr/>
-          </a:p>
-        </p:txBody>
-      </p:sp>
-      <p:sp>
-        <p:nvSpPr>
           <p:cNvPr id="20" name="TextBox 19"/>
           <p:cNvSpPr txBox="1"/>
           <p:nvPr/>
@@ -13199,7 +12840,7 @@
                                           </p:stCondLst>
                                         </p:cTn>
                                         <p:tgtEl>
-                                          <p:spTgt spid="19"/>
+                                          <p:spTgt spid="20"/>
                                         </p:tgtEl>
                                         <p:attrNameLst>
                                           <p:attrName>style.visibility</p:attrName>
@@ -13213,7 +12854,7 @@
                                       <p:cBhvr>
                                         <p:cTn id="46" dur="500"/>
                                         <p:tgtEl>
-                                          <p:spTgt spid="19"/>
+                                          <p:spTgt spid="20"/>
                                         </p:tgtEl>
                                       </p:cBhvr>
                                     </p:animEffect>
@@ -13234,7 +12875,7 @@
                                           </p:stCondLst>
                                         </p:cTn>
                                         <p:tgtEl>
-                                          <p:spTgt spid="20"/>
+                                          <p:spTgt spid="21"/>
                                         </p:tgtEl>
                                         <p:attrNameLst>
                                           <p:attrName>style.visibility</p:attrName>
@@ -13248,7 +12889,7 @@
                                       <p:cBhvr>
                                         <p:cTn id="49" dur="500"/>
                                         <p:tgtEl>
-                                          <p:spTgt spid="20"/>
+                                          <p:spTgt spid="21"/>
                                         </p:tgtEl>
                                       </p:cBhvr>
                                     </p:animEffect>
@@ -13269,7 +12910,7 @@
                                           </p:stCondLst>
                                         </p:cTn>
                                         <p:tgtEl>
-                                          <p:spTgt spid="21"/>
+                                          <p:spTgt spid="22"/>
                                         </p:tgtEl>
                                         <p:attrNameLst>
                                           <p:attrName>style.visibility</p:attrName>
@@ -13282,41 +12923,6 @@
                                     <p:animEffect transition="in" filter="fade">
                                       <p:cBhvr>
                                         <p:cTn id="52" dur="500"/>
-                                        <p:tgtEl>
-                                          <p:spTgt spid="21"/>
-                                        </p:tgtEl>
-                                      </p:cBhvr>
-                                    </p:animEffect>
-                                  </p:childTnLst>
-                                </p:cTn>
-                              </p:par>
-                              <p:par>
-                                <p:cTn id="53" presetID="10" presetClass="entr" presetSubtype="0" fill="hold" grpId="0" nodeType="withEffect">
-                                  <p:stCondLst>
-                                    <p:cond delay="0"/>
-                                  </p:stCondLst>
-                                  <p:childTnLst>
-                                    <p:set>
-                                      <p:cBhvr>
-                                        <p:cTn id="54" dur="1" fill="hold">
-                                          <p:stCondLst>
-                                            <p:cond delay="0"/>
-                                          </p:stCondLst>
-                                        </p:cTn>
-                                        <p:tgtEl>
-                                          <p:spTgt spid="22"/>
-                                        </p:tgtEl>
-                                        <p:attrNameLst>
-                                          <p:attrName>style.visibility</p:attrName>
-                                        </p:attrNameLst>
-                                      </p:cBhvr>
-                                      <p:to>
-                                        <p:strVal val="visible"/>
-                                      </p:to>
-                                    </p:set>
-                                    <p:animEffect transition="in" filter="fade">
-                                      <p:cBhvr>
-                                        <p:cTn id="55" dur="500"/>
                                         <p:tgtEl>
                                           <p:spTgt spid="22"/>
                                         </p:tgtEl>
@@ -13366,7 +12972,6 @@
       <p:bldP spid="16" grpId="0"/>
       <p:bldP spid="17" grpId="0"/>
       <p:bldP spid="18" grpId="0" animBg="1"/>
-      <p:bldP spid="19" grpId="0" animBg="1"/>
       <p:bldP spid="20" grpId="0"/>
       <p:bldP spid="21" grpId="0"/>
       <p:bldP spid="22" grpId="0"/>
@@ -13616,50 +13221,6 @@
       </p:sp>
       <p:sp>
         <p:nvSpPr>
-          <p:cNvPr id="7" name="Rounded Rectangle 6"/>
-          <p:cNvSpPr/>
-          <p:nvPr/>
-        </p:nvSpPr>
-        <p:spPr>
-          <a:xfrm>
-            <a:off x="874874" y="1389888"/>
-            <a:ext cx="73152" cy="1254989"/>
-          </a:xfrm>
-          <a:prstGeom prst="roundRect">
-            <a:avLst/>
-          </a:prstGeom>
-          <a:solidFill>
-            <a:srgbClr val="6C43B4"/>
-          </a:solidFill>
-          <a:ln>
-            <a:noFill/>
-          </a:ln>
-        </p:spPr>
-        <p:style>
-          <a:lnRef idx="1">
-            <a:schemeClr val="accent1"/>
-          </a:lnRef>
-          <a:fillRef idx="3">
-            <a:schemeClr val="accent1"/>
-          </a:fillRef>
-          <a:effectRef idx="2">
-            <a:schemeClr val="accent1"/>
-          </a:effectRef>
-          <a:fontRef idx="minor">
-            <a:schemeClr val="lt1"/>
-          </a:fontRef>
-        </p:style>
-        <p:txBody>
-          <a:bodyPr rtlCol="0" anchor="ctr"/>
-          <a:lstStyle/>
-          <a:p>
-            <a:pPr algn="ctr"/>
-            <a:endParaRPr/>
-          </a:p>
-        </p:txBody>
-      </p:sp>
-      <p:sp>
-        <p:nvSpPr>
           <p:cNvPr id="8" name="TextBox 7"/>
           <p:cNvSpPr txBox="1"/>
           <p:nvPr/>
@@ -13799,50 +13360,6 @@
       </p:sp>
       <p:sp>
         <p:nvSpPr>
-          <p:cNvPr id="11" name="Rounded Rectangle 10"/>
-          <p:cNvSpPr/>
-          <p:nvPr/>
-        </p:nvSpPr>
-        <p:spPr>
-          <a:xfrm flipH="1">
-            <a:off x="4553711" y="1389888"/>
-            <a:ext cx="45719" cy="1254989"/>
-          </a:xfrm>
-          <a:prstGeom prst="roundRect">
-            <a:avLst/>
-          </a:prstGeom>
-          <a:solidFill>
-            <a:srgbClr val="E65CA4"/>
-          </a:solidFill>
-          <a:ln>
-            <a:noFill/>
-          </a:ln>
-        </p:spPr>
-        <p:style>
-          <a:lnRef idx="1">
-            <a:schemeClr val="accent1"/>
-          </a:lnRef>
-          <a:fillRef idx="3">
-            <a:schemeClr val="accent1"/>
-          </a:fillRef>
-          <a:effectRef idx="2">
-            <a:schemeClr val="accent1"/>
-          </a:effectRef>
-          <a:fontRef idx="minor">
-            <a:schemeClr val="lt1"/>
-          </a:fontRef>
-        </p:style>
-        <p:txBody>
-          <a:bodyPr rtlCol="0" anchor="ctr"/>
-          <a:lstStyle/>
-          <a:p>
-            <a:pPr algn="ctr"/>
-            <a:endParaRPr/>
-          </a:p>
-        </p:txBody>
-      </p:sp>
-      <p:sp>
-        <p:nvSpPr>
           <p:cNvPr id="12" name="TextBox 11"/>
           <p:cNvSpPr txBox="1"/>
           <p:nvPr/>
@@ -13949,50 +13466,6 @@
             <a:solidFill>
               <a:srgbClr val="E8DFF0"/>
             </a:solidFill>
-          </a:ln>
-        </p:spPr>
-        <p:style>
-          <a:lnRef idx="1">
-            <a:schemeClr val="accent1"/>
-          </a:lnRef>
-          <a:fillRef idx="3">
-            <a:schemeClr val="accent1"/>
-          </a:fillRef>
-          <a:effectRef idx="2">
-            <a:schemeClr val="accent1"/>
-          </a:effectRef>
-          <a:fontRef idx="minor">
-            <a:schemeClr val="lt1"/>
-          </a:fontRef>
-        </p:style>
-        <p:txBody>
-          <a:bodyPr rtlCol="0" anchor="ctr"/>
-          <a:lstStyle/>
-          <a:p>
-            <a:pPr algn="ctr"/>
-            <a:endParaRPr/>
-          </a:p>
-        </p:txBody>
-      </p:sp>
-      <p:sp>
-        <p:nvSpPr>
-          <p:cNvPr id="15" name="Rounded Rectangle 14"/>
-          <p:cNvSpPr/>
-          <p:nvPr/>
-        </p:nvSpPr>
-        <p:spPr>
-          <a:xfrm>
-            <a:off x="8183880" y="1389888"/>
-            <a:ext cx="54864" cy="1146835"/>
-          </a:xfrm>
-          <a:prstGeom prst="roundRect">
-            <a:avLst/>
-          </a:prstGeom>
-          <a:solidFill>
-            <a:srgbClr val="CD475D"/>
-          </a:solidFill>
-          <a:ln>
-            <a:noFill/>
           </a:ln>
         </p:spPr>
         <p:style>
@@ -14296,6 +13769,96 @@
           <a:xfrm>
             <a:off x="1225573" y="2880451"/>
             <a:ext cx="2217612" cy="2758679"/>
+          </a:xfrm>
+          <a:prstGeom prst="rect">
+            <a:avLst/>
+          </a:prstGeom>
+        </p:spPr>
+      </p:pic>
+      <p:pic>
+        <p:nvPicPr>
+          <p:cNvPr id="27" name="Picture 26">
+            <a:extLst>
+              <a:ext uri="{FF2B5EF4-FFF2-40B4-BE49-F238E27FC236}">
+                <a16:creationId xmlns:a16="http://schemas.microsoft.com/office/drawing/2014/main" id="{0C638BC7-4299-EF5A-80FC-500EE20DCE7B}"/>
+              </a:ext>
+            </a:extLst>
+          </p:cNvPr>
+          <p:cNvPicPr>
+            <a:picLocks noChangeAspect="1"/>
+          </p:cNvPicPr>
+          <p:nvPr/>
+        </p:nvPicPr>
+        <p:blipFill>
+          <a:blip r:embed="rId5"/>
+          <a:stretch>
+            <a:fillRect/>
+          </a:stretch>
+        </p:blipFill>
+        <p:spPr>
+          <a:xfrm>
+            <a:off x="3314891" y="1783284"/>
+            <a:ext cx="492441" cy="492441"/>
+          </a:xfrm>
+          <a:prstGeom prst="rect">
+            <a:avLst/>
+          </a:prstGeom>
+        </p:spPr>
+      </p:pic>
+      <p:pic>
+        <p:nvPicPr>
+          <p:cNvPr id="28" name="Picture 27">
+            <a:extLst>
+              <a:ext uri="{FF2B5EF4-FFF2-40B4-BE49-F238E27FC236}">
+                <a16:creationId xmlns:a16="http://schemas.microsoft.com/office/drawing/2014/main" id="{3ADEA84D-A28B-3ED5-DBEF-A0ACEDD24B10}"/>
+              </a:ext>
+            </a:extLst>
+          </p:cNvPr>
+          <p:cNvPicPr>
+            <a:picLocks noChangeAspect="1"/>
+          </p:cNvPicPr>
+          <p:nvPr/>
+        </p:nvPicPr>
+        <p:blipFill>
+          <a:blip r:embed="rId5"/>
+          <a:stretch>
+            <a:fillRect/>
+          </a:stretch>
+        </p:blipFill>
+        <p:spPr>
+          <a:xfrm>
+            <a:off x="6930760" y="1725463"/>
+            <a:ext cx="482741" cy="482741"/>
+          </a:xfrm>
+          <a:prstGeom prst="rect">
+            <a:avLst/>
+          </a:prstGeom>
+        </p:spPr>
+      </p:pic>
+      <p:pic>
+        <p:nvPicPr>
+          <p:cNvPr id="29" name="Picture 28">
+            <a:extLst>
+              <a:ext uri="{FF2B5EF4-FFF2-40B4-BE49-F238E27FC236}">
+                <a16:creationId xmlns:a16="http://schemas.microsoft.com/office/drawing/2014/main" id="{ACD27F8E-DDD4-AAD3-322B-FB24FC119F00}"/>
+              </a:ext>
+            </a:extLst>
+          </p:cNvPr>
+          <p:cNvPicPr>
+            <a:picLocks noChangeAspect="1"/>
+          </p:cNvPicPr>
+          <p:nvPr/>
+        </p:nvPicPr>
+        <p:blipFill>
+          <a:blip r:embed="rId5"/>
+          <a:stretch>
+            <a:fillRect/>
+          </a:stretch>
+        </p:blipFill>
+        <p:spPr>
+          <a:xfrm>
+            <a:off x="10380627" y="1729025"/>
+            <a:ext cx="500733" cy="500733"/>
           </a:xfrm>
           <a:prstGeom prst="rect">
             <a:avLst/>
@@ -14411,7 +13974,7 @@
                                           </p:stCondLst>
                                         </p:cTn>
                                         <p:tgtEl>
-                                          <p:spTgt spid="7"/>
+                                          <p:spTgt spid="9"/>
                                         </p:tgtEl>
                                         <p:attrNameLst>
                                           <p:attrName>style.visibility</p:attrName>
@@ -14425,7 +13988,7 @@
                                       <p:cBhvr>
                                         <p:cTn id="13" dur="500"/>
                                         <p:tgtEl>
-                                          <p:spTgt spid="7"/>
+                                          <p:spTgt spid="9"/>
                                         </p:tgtEl>
                                       </p:cBhvr>
                                     </p:animEffect>
@@ -14446,7 +14009,7 @@
                                           </p:stCondLst>
                                         </p:cTn>
                                         <p:tgtEl>
-                                          <p:spTgt spid="9"/>
+                                          <p:spTgt spid="8"/>
                                         </p:tgtEl>
                                         <p:attrNameLst>
                                           <p:attrName>style.visibility</p:attrName>
@@ -14459,41 +14022,6 @@
                                     <p:animEffect transition="in" filter="fade">
                                       <p:cBhvr>
                                         <p:cTn id="16" dur="500"/>
-                                        <p:tgtEl>
-                                          <p:spTgt spid="9"/>
-                                        </p:tgtEl>
-                                      </p:cBhvr>
-                                    </p:animEffect>
-                                  </p:childTnLst>
-                                </p:cTn>
-                              </p:par>
-                              <p:par>
-                                <p:cTn id="17" presetID="10" presetClass="entr" presetSubtype="0" fill="hold" grpId="0" nodeType="withEffect">
-                                  <p:stCondLst>
-                                    <p:cond delay="0"/>
-                                  </p:stCondLst>
-                                  <p:childTnLst>
-                                    <p:set>
-                                      <p:cBhvr>
-                                        <p:cTn id="18" dur="1" fill="hold">
-                                          <p:stCondLst>
-                                            <p:cond delay="0"/>
-                                          </p:stCondLst>
-                                        </p:cTn>
-                                        <p:tgtEl>
-                                          <p:spTgt spid="8"/>
-                                        </p:tgtEl>
-                                        <p:attrNameLst>
-                                          <p:attrName>style.visibility</p:attrName>
-                                        </p:attrNameLst>
-                                      </p:cBhvr>
-                                      <p:to>
-                                        <p:strVal val="visible"/>
-                                      </p:to>
-                                    </p:set>
-                                    <p:animEffect transition="in" filter="fade">
-                                      <p:cBhvr>
-                                        <p:cTn id="19" dur="500"/>
                                         <p:tgtEl>
                                           <p:spTgt spid="8"/>
                                         </p:tgtEl>
@@ -14509,32 +14037,67 @@
                     </p:cTn>
                   </p:par>
                   <p:par>
-                    <p:cTn id="20" fill="hold">
+                    <p:cTn id="17" fill="hold">
                       <p:stCondLst>
                         <p:cond delay="indefinite"/>
                       </p:stCondLst>
                       <p:childTnLst>
                         <p:par>
-                          <p:cTn id="21" fill="hold">
+                          <p:cTn id="18" fill="hold">
                             <p:stCondLst>
                               <p:cond delay="0"/>
                             </p:stCondLst>
                             <p:childTnLst>
                               <p:par>
-                                <p:cTn id="22" presetID="10" presetClass="entr" presetSubtype="0" fill="hold" nodeType="clickEffect">
+                                <p:cTn id="19" presetID="10" presetClass="entr" presetSubtype="0" fill="hold" nodeType="clickEffect">
                                   <p:stCondLst>
                                     <p:cond delay="0"/>
                                   </p:stCondLst>
                                   <p:childTnLst>
                                     <p:set>
                                       <p:cBhvr>
+                                        <p:cTn id="20" dur="1" fill="hold">
+                                          <p:stCondLst>
+                                            <p:cond delay="0"/>
+                                          </p:stCondLst>
+                                        </p:cTn>
+                                        <p:tgtEl>
+                                          <p:spTgt spid="24"/>
+                                        </p:tgtEl>
+                                        <p:attrNameLst>
+                                          <p:attrName>style.visibility</p:attrName>
+                                        </p:attrNameLst>
+                                      </p:cBhvr>
+                                      <p:to>
+                                        <p:strVal val="visible"/>
+                                      </p:to>
+                                    </p:set>
+                                    <p:animEffect transition="in" filter="fade">
+                                      <p:cBhvr>
+                                        <p:cTn id="21" dur="500"/>
+                                        <p:tgtEl>
+                                          <p:spTgt spid="24"/>
+                                        </p:tgtEl>
+                                      </p:cBhvr>
+                                    </p:animEffect>
+                                  </p:childTnLst>
+                                </p:cTn>
+                              </p:par>
+                              <p:par>
+                                <p:cTn id="22" presetID="10" presetClass="entr" presetSubtype="0" fill="hold" grpId="0" nodeType="withEffect">
+                                  <p:stCondLst>
+                                    <p:cond delay="0"/>
+                                  </p:stCondLst>
+                                  <p:childTnLst>
+                                    <p:set>
+                                      <p:cBhvr>
                                         <p:cTn id="23" dur="1" fill="hold">
                                           <p:stCondLst>
                                             <p:cond delay="0"/>
                                           </p:stCondLst>
                                         </p:cTn>
                                         <p:tgtEl>
-                                          <p:spTgt spid="24"/>
+                                          <p:spTgt spid="13"/>
                                         </p:tgtEl>
                                         <p:attrNameLst>
                                           <p:attrName>style.visibility</p:attrName>
@@ -14548,7 +14111,7 @@
                                       <p:cBhvr>
                                         <p:cTn id="24" dur="500"/>
                                         <p:tgtEl>
-                                          <p:spTgt spid="24"/>
+                                          <p:spTgt spid="13"/>
                                         </p:tgtEl>
                                       </p:cBhvr>
                                     </p:animEffect>
@@ -14569,7 +14132,7 @@
                                           </p:stCondLst>
                                         </p:cTn>
                                         <p:tgtEl>
-                                          <p:spTgt spid="13"/>
+                                          <p:spTgt spid="10"/>
                                         </p:tgtEl>
                                         <p:attrNameLst>
                                           <p:attrName>style.visibility</p:attrName>
@@ -14583,7 +14146,7 @@
                                       <p:cBhvr>
                                         <p:cTn id="27" dur="500"/>
                                         <p:tgtEl>
-                                          <p:spTgt spid="13"/>
+                                          <p:spTgt spid="10"/>
                                         </p:tgtEl>
                                       </p:cBhvr>
                                     </p:animEffect>
@@ -14604,7 +14167,7 @@
                                           </p:stCondLst>
                                         </p:cTn>
                                         <p:tgtEl>
-                                          <p:spTgt spid="11"/>
+                                          <p:spTgt spid="12"/>
                                         </p:tgtEl>
                                         <p:attrNameLst>
                                           <p:attrName>style.visibility</p:attrName>
@@ -14617,76 +14180,6 @@
                                     <p:animEffect transition="in" filter="fade">
                                       <p:cBhvr>
                                         <p:cTn id="30" dur="500"/>
-                                        <p:tgtEl>
-                                          <p:spTgt spid="11"/>
-                                        </p:tgtEl>
-                                      </p:cBhvr>
-                                    </p:animEffect>
-                                  </p:childTnLst>
-                                </p:cTn>
-                              </p:par>
-                              <p:par>
-                                <p:cTn id="31" presetID="10" presetClass="entr" presetSubtype="0" fill="hold" grpId="0" nodeType="withEffect">
-                                  <p:stCondLst>
-                                    <p:cond delay="0"/>
-                                  </p:stCondLst>
-                                  <p:childTnLst>
-                                    <p:set>
-                                      <p:cBhvr>
-                                        <p:cTn id="32" dur="1" fill="hold">
-                                          <p:stCondLst>
-                                            <p:cond delay="0"/>
-                                          </p:stCondLst>
-                                        </p:cTn>
-                                        <p:tgtEl>
-                                          <p:spTgt spid="10"/>
-                                        </p:tgtEl>
-                                        <p:attrNameLst>
-                                          <p:attrName>style.visibility</p:attrName>
-                                        </p:attrNameLst>
-                                      </p:cBhvr>
-                                      <p:to>
-                                        <p:strVal val="visible"/>
-                                      </p:to>
-                                    </p:set>
-                                    <p:animEffect transition="in" filter="fade">
-                                      <p:cBhvr>
-                                        <p:cTn id="33" dur="500"/>
-                                        <p:tgtEl>
-                                          <p:spTgt spid="10"/>
-                                        </p:tgtEl>
-                                      </p:cBhvr>
-                                    </p:animEffect>
-                                  </p:childTnLst>
-                                </p:cTn>
-                              </p:par>
-                              <p:par>
-                                <p:cTn id="34" presetID="10" presetClass="entr" presetSubtype="0" fill="hold" grpId="0" nodeType="withEffect">
-                                  <p:stCondLst>
-                                    <p:cond delay="0"/>
-                                  </p:stCondLst>
-                                  <p:childTnLst>
-                                    <p:set>
-                                      <p:cBhvr>
-                                        <p:cTn id="35" dur="1" fill="hold">
-                                          <p:stCondLst>
-                                            <p:cond delay="0"/>
-                                          </p:stCondLst>
-                                        </p:cTn>
-                                        <p:tgtEl>
-                                          <p:spTgt spid="12"/>
-                                        </p:tgtEl>
-                                        <p:attrNameLst>
-                                          <p:attrName>style.visibility</p:attrName>
-                                        </p:attrNameLst>
-                                      </p:cBhvr>
-                                      <p:to>
-                                        <p:strVal val="visible"/>
-                                      </p:to>
-                                    </p:set>
-                                    <p:animEffect transition="in" filter="fade">
-                                      <p:cBhvr>
-                                        <p:cTn id="36" dur="500"/>
                                         <p:tgtEl>
                                           <p:spTgt spid="12"/>
                                         </p:tgtEl>
@@ -14702,32 +14195,102 @@
                     </p:cTn>
                   </p:par>
                   <p:par>
-                    <p:cTn id="37" fill="hold">
+                    <p:cTn id="31" fill="hold">
                       <p:stCondLst>
                         <p:cond delay="indefinite"/>
                       </p:stCondLst>
                       <p:childTnLst>
                         <p:par>
-                          <p:cTn id="38" fill="hold">
+                          <p:cTn id="32" fill="hold">
                             <p:stCondLst>
                               <p:cond delay="0"/>
                             </p:stCondLst>
                             <p:childTnLst>
                               <p:par>
-                                <p:cTn id="39" presetID="10" presetClass="entr" presetSubtype="0" fill="hold" grpId="0" nodeType="clickEffect">
+                                <p:cTn id="33" presetID="10" presetClass="entr" presetSubtype="0" fill="hold" grpId="0" nodeType="clickEffect">
                                   <p:stCondLst>
                                     <p:cond delay="0"/>
                                   </p:stCondLst>
                                   <p:childTnLst>
                                     <p:set>
                                       <p:cBhvr>
+                                        <p:cTn id="34" dur="1" fill="hold">
+                                          <p:stCondLst>
+                                            <p:cond delay="0"/>
+                                          </p:stCondLst>
+                                        </p:cTn>
+                                        <p:tgtEl>
+                                          <p:spTgt spid="17"/>
+                                        </p:tgtEl>
+                                        <p:attrNameLst>
+                                          <p:attrName>style.visibility</p:attrName>
+                                        </p:attrNameLst>
+                                      </p:cBhvr>
+                                      <p:to>
+                                        <p:strVal val="visible"/>
+                                      </p:to>
+                                    </p:set>
+                                    <p:animEffect transition="in" filter="fade">
+                                      <p:cBhvr>
+                                        <p:cTn id="35" dur="500"/>
+                                        <p:tgtEl>
+                                          <p:spTgt spid="17"/>
+                                        </p:tgtEl>
+                                      </p:cBhvr>
+                                    </p:animEffect>
+                                  </p:childTnLst>
+                                </p:cTn>
+                              </p:par>
+                              <p:par>
+                                <p:cTn id="36" presetID="10" presetClass="entr" presetSubtype="0" fill="hold" grpId="0" nodeType="withEffect">
+                                  <p:stCondLst>
+                                    <p:cond delay="0"/>
+                                  </p:stCondLst>
+                                  <p:childTnLst>
+                                    <p:set>
+                                      <p:cBhvr>
+                                        <p:cTn id="37" dur="1" fill="hold">
+                                          <p:stCondLst>
+                                            <p:cond delay="0"/>
+                                          </p:stCondLst>
+                                        </p:cTn>
+                                        <p:tgtEl>
+                                          <p:spTgt spid="14"/>
+                                        </p:tgtEl>
+                                        <p:attrNameLst>
+                                          <p:attrName>style.visibility</p:attrName>
+                                        </p:attrNameLst>
+                                      </p:cBhvr>
+                                      <p:to>
+                                        <p:strVal val="visible"/>
+                                      </p:to>
+                                    </p:set>
+                                    <p:animEffect transition="in" filter="fade">
+                                      <p:cBhvr>
+                                        <p:cTn id="38" dur="500"/>
+                                        <p:tgtEl>
+                                          <p:spTgt spid="14"/>
+                                        </p:tgtEl>
+                                      </p:cBhvr>
+                                    </p:animEffect>
+                                  </p:childTnLst>
+                                </p:cTn>
+                              </p:par>
+                              <p:par>
+                                <p:cTn id="39" presetID="10" presetClass="entr" presetSubtype="0" fill="hold" grpId="0" nodeType="withEffect">
+                                  <p:stCondLst>
+                                    <p:cond delay="0"/>
+                                  </p:stCondLst>
+                                  <p:childTnLst>
+                                    <p:set>
+                                      <p:cBhvr>
                                         <p:cTn id="40" dur="1" fill="hold">
                                           <p:stCondLst>
                                             <p:cond delay="0"/>
                                           </p:stCondLst>
                                         </p:cTn>
                                         <p:tgtEl>
-                                          <p:spTgt spid="17"/>
+                                          <p:spTgt spid="16"/>
                                         </p:tgtEl>
                                         <p:attrNameLst>
                                           <p:attrName>style.visibility</p:attrName>
@@ -14741,7 +14304,7 @@
                                       <p:cBhvr>
                                         <p:cTn id="41" dur="500"/>
                                         <p:tgtEl>
-                                          <p:spTgt spid="17"/>
+                                          <p:spTgt spid="16"/>
                                         </p:tgtEl>
                                       </p:cBhvr>
                                     </p:animEffect>
@@ -14749,7 +14312,7 @@
                                 </p:cTn>
                               </p:par>
                               <p:par>
-                                <p:cTn id="42" presetID="10" presetClass="entr" presetSubtype="0" fill="hold" grpId="0" nodeType="withEffect">
+                                <p:cTn id="42" presetID="10" presetClass="entr" presetSubtype="0" fill="hold" nodeType="withEffect">
                                   <p:stCondLst>
                                     <p:cond delay="0"/>
                                   </p:stCondLst>
@@ -14762,7 +14325,7 @@
                                           </p:stCondLst>
                                         </p:cTn>
                                         <p:tgtEl>
-                                          <p:spTgt spid="15"/>
+                                          <p:spTgt spid="22"/>
                                         </p:tgtEl>
                                         <p:attrNameLst>
                                           <p:attrName>style.visibility</p:attrName>
@@ -14775,111 +14338,6 @@
                                     <p:animEffect transition="in" filter="fade">
                                       <p:cBhvr>
                                         <p:cTn id="44" dur="500"/>
-                                        <p:tgtEl>
-                                          <p:spTgt spid="15"/>
-                                        </p:tgtEl>
-                                      </p:cBhvr>
-                                    </p:animEffect>
-                                  </p:childTnLst>
-                                </p:cTn>
-                              </p:par>
-                              <p:par>
-                                <p:cTn id="45" presetID="10" presetClass="entr" presetSubtype="0" fill="hold" grpId="0" nodeType="withEffect">
-                                  <p:stCondLst>
-                                    <p:cond delay="0"/>
-                                  </p:stCondLst>
-                                  <p:childTnLst>
-                                    <p:set>
-                                      <p:cBhvr>
-                                        <p:cTn id="46" dur="1" fill="hold">
-                                          <p:stCondLst>
-                                            <p:cond delay="0"/>
-                                          </p:stCondLst>
-                                        </p:cTn>
-                                        <p:tgtEl>
-                                          <p:spTgt spid="14"/>
-                                        </p:tgtEl>
-                                        <p:attrNameLst>
-                                          <p:attrName>style.visibility</p:attrName>
-                                        </p:attrNameLst>
-                                      </p:cBhvr>
-                                      <p:to>
-                                        <p:strVal val="visible"/>
-                                      </p:to>
-                                    </p:set>
-                                    <p:animEffect transition="in" filter="fade">
-                                      <p:cBhvr>
-                                        <p:cTn id="47" dur="500"/>
-                                        <p:tgtEl>
-                                          <p:spTgt spid="14"/>
-                                        </p:tgtEl>
-                                      </p:cBhvr>
-                                    </p:animEffect>
-                                  </p:childTnLst>
-                                </p:cTn>
-                              </p:par>
-                              <p:par>
-                                <p:cTn id="48" presetID="10" presetClass="entr" presetSubtype="0" fill="hold" grpId="0" nodeType="withEffect">
-                                  <p:stCondLst>
-                                    <p:cond delay="0"/>
-                                  </p:stCondLst>
-                                  <p:childTnLst>
-                                    <p:set>
-                                      <p:cBhvr>
-                                        <p:cTn id="49" dur="1" fill="hold">
-                                          <p:stCondLst>
-                                            <p:cond delay="0"/>
-                                          </p:stCondLst>
-                                        </p:cTn>
-                                        <p:tgtEl>
-                                          <p:spTgt spid="16"/>
-                                        </p:tgtEl>
-                                        <p:attrNameLst>
-                                          <p:attrName>style.visibility</p:attrName>
-                                        </p:attrNameLst>
-                                      </p:cBhvr>
-                                      <p:to>
-                                        <p:strVal val="visible"/>
-                                      </p:to>
-                                    </p:set>
-                                    <p:animEffect transition="in" filter="fade">
-                                      <p:cBhvr>
-                                        <p:cTn id="50" dur="500"/>
-                                        <p:tgtEl>
-                                          <p:spTgt spid="16"/>
-                                        </p:tgtEl>
-                                      </p:cBhvr>
-                                    </p:animEffect>
-                                  </p:childTnLst>
-                                </p:cTn>
-                              </p:par>
-                              <p:par>
-                                <p:cTn id="51" presetID="10" presetClass="entr" presetSubtype="0" fill="hold" nodeType="withEffect">
-                                  <p:stCondLst>
-                                    <p:cond delay="0"/>
-                                  </p:stCondLst>
-                                  <p:childTnLst>
-                                    <p:set>
-                                      <p:cBhvr>
-                                        <p:cTn id="52" dur="1" fill="hold">
-                                          <p:stCondLst>
-                                            <p:cond delay="0"/>
-                                          </p:stCondLst>
-                                        </p:cTn>
-                                        <p:tgtEl>
-                                          <p:spTgt spid="22"/>
-                                        </p:tgtEl>
-                                        <p:attrNameLst>
-                                          <p:attrName>style.visibility</p:attrName>
-                                        </p:attrNameLst>
-                                      </p:cBhvr>
-                                      <p:to>
-                                        <p:strVal val="visible"/>
-                                      </p:to>
-                                    </p:set>
-                                    <p:animEffect transition="in" filter="fade">
-                                      <p:cBhvr>
-                                        <p:cTn id="53" dur="500"/>
                                         <p:tgtEl>
                                           <p:spTgt spid="22"/>
                                         </p:tgtEl>
@@ -14895,26 +14353,26 @@
                     </p:cTn>
                   </p:par>
                   <p:par>
-                    <p:cTn id="54" fill="hold">
+                    <p:cTn id="45" fill="hold">
                       <p:stCondLst>
                         <p:cond delay="indefinite"/>
                       </p:stCondLst>
                       <p:childTnLst>
                         <p:par>
-                          <p:cTn id="55" fill="hold">
+                          <p:cTn id="46" fill="hold">
                             <p:stCondLst>
                               <p:cond delay="0"/>
                             </p:stCondLst>
                             <p:childTnLst>
                               <p:par>
-                                <p:cTn id="56" presetID="10" presetClass="entr" presetSubtype="0" fill="hold" grpId="0" nodeType="clickEffect">
+                                <p:cTn id="47" presetID="10" presetClass="entr" presetSubtype="0" fill="hold" grpId="0" nodeType="clickEffect">
                                   <p:stCondLst>
                                     <p:cond delay="0"/>
                                   </p:stCondLst>
                                   <p:childTnLst>
                                     <p:set>
                                       <p:cBhvr>
-                                        <p:cTn id="57" dur="1" fill="hold">
+                                        <p:cTn id="48" dur="1" fill="hold">
                                           <p:stCondLst>
                                             <p:cond delay="0"/>
                                           </p:stCondLst>
@@ -14932,7 +14390,7 @@
                                     </p:set>
                                     <p:animEffect transition="in" filter="fade">
                                       <p:cBhvr>
-                                        <p:cTn id="58" dur="500"/>
+                                        <p:cTn id="49" dur="500"/>
                                         <p:tgtEl>
                                           <p:spTgt spid="18"/>
                                         </p:tgtEl>
@@ -14942,14 +14400,14 @@
                                 </p:cTn>
                               </p:par>
                               <p:par>
-                                <p:cTn id="59" presetID="10" presetClass="entr" presetSubtype="0" fill="hold" grpId="0" nodeType="withEffect">
+                                <p:cTn id="50" presetID="10" presetClass="entr" presetSubtype="0" fill="hold" grpId="0" nodeType="withEffect">
                                   <p:stCondLst>
                                     <p:cond delay="0"/>
                                   </p:stCondLst>
                                   <p:childTnLst>
                                     <p:set>
                                       <p:cBhvr>
-                                        <p:cTn id="60" dur="1" fill="hold">
+                                        <p:cTn id="51" dur="1" fill="hold">
                                           <p:stCondLst>
                                             <p:cond delay="0"/>
                                           </p:stCondLst>
@@ -14967,7 +14425,7 @@
                                     </p:set>
                                     <p:animEffect transition="in" filter="fade">
                                       <p:cBhvr>
-                                        <p:cTn id="61" dur="500"/>
+                                        <p:cTn id="52" dur="500"/>
                                         <p:tgtEl>
                                           <p:spTgt spid="19"/>
                                         </p:tgtEl>
@@ -15005,15 +14463,12 @@
     </p:tnLst>
     <p:bldLst>
       <p:bldP spid="6" grpId="0" animBg="1"/>
-      <p:bldP spid="7" grpId="0" animBg="1"/>
       <p:bldP spid="8" grpId="0"/>
       <p:bldP spid="9" grpId="0"/>
       <p:bldP spid="10" grpId="0" animBg="1"/>
-      <p:bldP spid="11" grpId="0" animBg="1"/>
       <p:bldP spid="12" grpId="0"/>
       <p:bldP spid="13" grpId="0"/>
       <p:bldP spid="14" grpId="0" animBg="1"/>
-      <p:bldP spid="15" grpId="0" animBg="1"/>
       <p:bldP spid="16" grpId="0"/>
       <p:bldP spid="17" grpId="0"/>
       <p:bldP spid="18" grpId="0" animBg="1"/>
@@ -15264,50 +14719,6 @@
       </p:sp>
       <p:sp>
         <p:nvSpPr>
-          <p:cNvPr id="7" name="Rounded Rectangle 6"/>
-          <p:cNvSpPr/>
-          <p:nvPr/>
-        </p:nvSpPr>
-        <p:spPr>
-          <a:xfrm>
-            <a:off x="896109" y="1731698"/>
-            <a:ext cx="64010" cy="3708982"/>
-          </a:xfrm>
-          <a:prstGeom prst="roundRect">
-            <a:avLst/>
-          </a:prstGeom>
-          <a:solidFill>
-            <a:srgbClr val="6C43B4"/>
-          </a:solidFill>
-          <a:ln>
-            <a:noFill/>
-          </a:ln>
-        </p:spPr>
-        <p:style>
-          <a:lnRef idx="1">
-            <a:schemeClr val="accent1"/>
-          </a:lnRef>
-          <a:fillRef idx="3">
-            <a:schemeClr val="accent1"/>
-          </a:fillRef>
-          <a:effectRef idx="2">
-            <a:schemeClr val="accent1"/>
-          </a:effectRef>
-          <a:fontRef idx="minor">
-            <a:schemeClr val="lt1"/>
-          </a:fontRef>
-        </p:style>
-        <p:txBody>
-          <a:bodyPr rtlCol="0" anchor="ctr"/>
-          <a:lstStyle/>
-          <a:p>
-            <a:pPr algn="ctr"/>
-            <a:endParaRPr/>
-          </a:p>
-        </p:txBody>
-      </p:sp>
-      <p:sp>
-        <p:nvSpPr>
           <p:cNvPr id="8" name="TextBox 7"/>
           <p:cNvSpPr txBox="1"/>
           <p:nvPr/>
@@ -15436,50 +14847,6 @@
             <a:solidFill>
               <a:srgbClr val="E8DFF0"/>
             </a:solidFill>
-          </a:ln>
-        </p:spPr>
-        <p:style>
-          <a:lnRef idx="1">
-            <a:schemeClr val="accent1"/>
-          </a:lnRef>
-          <a:fillRef idx="3">
-            <a:schemeClr val="accent1"/>
-          </a:fillRef>
-          <a:effectRef idx="2">
-            <a:schemeClr val="accent1"/>
-          </a:effectRef>
-          <a:fontRef idx="minor">
-            <a:schemeClr val="lt1"/>
-          </a:fontRef>
-        </p:style>
-        <p:txBody>
-          <a:bodyPr rtlCol="0" anchor="ctr"/>
-          <a:lstStyle/>
-          <a:p>
-            <a:pPr algn="ctr"/>
-            <a:endParaRPr/>
-          </a:p>
-        </p:txBody>
-      </p:sp>
-      <p:sp>
-        <p:nvSpPr>
-          <p:cNvPr id="11" name="Rounded Rectangle 10"/>
-          <p:cNvSpPr/>
-          <p:nvPr/>
-        </p:nvSpPr>
-        <p:spPr>
-          <a:xfrm>
-            <a:off x="6364224" y="1731698"/>
-            <a:ext cx="45720" cy="3708982"/>
-          </a:xfrm>
-          <a:prstGeom prst="roundRect">
-            <a:avLst/>
-          </a:prstGeom>
-          <a:solidFill>
-            <a:srgbClr val="E65CA4"/>
-          </a:solidFill>
-          <a:ln>
-            <a:noFill/>
           </a:ln>
         </p:spPr>
         <p:style>
@@ -15716,7 +15083,7 @@
                                           </p:stCondLst>
                                         </p:cTn>
                                         <p:tgtEl>
-                                          <p:spTgt spid="7"/>
+                                          <p:spTgt spid="6"/>
                                         </p:tgtEl>
                                         <p:attrNameLst>
                                           <p:attrName>style.visibility</p:attrName>
@@ -15730,7 +15097,7 @@
                                       <p:cBhvr>
                                         <p:cTn id="10" dur="500"/>
                                         <p:tgtEl>
-                                          <p:spTgt spid="7"/>
+                                          <p:spTgt spid="6"/>
                                         </p:tgtEl>
                                       </p:cBhvr>
                                     </p:animEffect>
@@ -15751,7 +15118,7 @@
                                           </p:stCondLst>
                                         </p:cTn>
                                         <p:tgtEl>
-                                          <p:spTgt spid="6"/>
+                                          <p:spTgt spid="9"/>
                                         </p:tgtEl>
                                         <p:attrNameLst>
                                           <p:attrName>style.visibility</p:attrName>
@@ -15765,7 +15132,7 @@
                                       <p:cBhvr>
                                         <p:cTn id="13" dur="500"/>
                                         <p:tgtEl>
-                                          <p:spTgt spid="6"/>
+                                          <p:spTgt spid="9"/>
                                         </p:tgtEl>
                                       </p:cBhvr>
                                     </p:animEffect>
@@ -15786,7 +15153,7 @@
                                           </p:stCondLst>
                                         </p:cTn>
                                         <p:tgtEl>
-                                          <p:spTgt spid="9"/>
+                                          <p:spTgt spid="13"/>
                                         </p:tgtEl>
                                         <p:attrNameLst>
                                           <p:attrName>style.visibility</p:attrName>
@@ -15800,46 +15167,28 @@
                                       <p:cBhvr>
                                         <p:cTn id="16" dur="500"/>
                                         <p:tgtEl>
-                                          <p:spTgt spid="9"/>
+                                          <p:spTgt spid="13"/>
                                         </p:tgtEl>
                                       </p:cBhvr>
                                     </p:animEffect>
                                   </p:childTnLst>
                                 </p:cTn>
                               </p:par>
-                            </p:childTnLst>
-                          </p:cTn>
-                        </p:par>
-                      </p:childTnLst>
-                    </p:cTn>
-                  </p:par>
-                  <p:par>
-                    <p:cTn id="17" fill="hold">
-                      <p:stCondLst>
-                        <p:cond delay="indefinite"/>
-                      </p:stCondLst>
-                      <p:childTnLst>
-                        <p:par>
-                          <p:cTn id="18" fill="hold">
-                            <p:stCondLst>
-                              <p:cond delay="0"/>
-                            </p:stCondLst>
-                            <p:childTnLst>
                               <p:par>
-                                <p:cTn id="19" presetID="10" presetClass="entr" presetSubtype="0" fill="hold" grpId="0" nodeType="clickEffect">
+                                <p:cTn id="17" presetID="10" presetClass="entr" presetSubtype="0" fill="hold" grpId="0" nodeType="withEffect">
                                   <p:stCondLst>
                                     <p:cond delay="0"/>
                                   </p:stCondLst>
                                   <p:childTnLst>
                                     <p:set>
                                       <p:cBhvr>
-                                        <p:cTn id="20" dur="1" fill="hold">
+                                        <p:cTn id="18" dur="1" fill="hold">
                                           <p:stCondLst>
                                             <p:cond delay="0"/>
                                           </p:stCondLst>
                                         </p:cTn>
                                         <p:tgtEl>
-                                          <p:spTgt spid="11"/>
+                                          <p:spTgt spid="10"/>
                                         </p:tgtEl>
                                         <p:attrNameLst>
                                           <p:attrName>style.visibility</p:attrName>
@@ -15851,9 +15200,9 @@
                                     </p:set>
                                     <p:animEffect transition="in" filter="fade">
                                       <p:cBhvr>
-                                        <p:cTn id="21" dur="500"/>
-                                        <p:tgtEl>
-                                          <p:spTgt spid="11"/>
+                                        <p:cTn id="19" dur="500"/>
+                                        <p:tgtEl>
+                                          <p:spTgt spid="10"/>
                                         </p:tgtEl>
                                       </p:cBhvr>
                                     </p:animEffect>
@@ -15861,20 +15210,20 @@
                                 </p:cTn>
                               </p:par>
                               <p:par>
-                                <p:cTn id="22" presetID="10" presetClass="entr" presetSubtype="0" fill="hold" grpId="0" nodeType="withEffect">
+                                <p:cTn id="20" presetID="10" presetClass="entr" presetSubtype="0" fill="hold" grpId="0" nodeType="withEffect">
                                   <p:stCondLst>
                                     <p:cond delay="0"/>
                                   </p:stCondLst>
                                   <p:childTnLst>
                                     <p:set>
                                       <p:cBhvr>
-                                        <p:cTn id="23" dur="1" fill="hold">
+                                        <p:cTn id="21" dur="1" fill="hold">
                                           <p:stCondLst>
                                             <p:cond delay="0"/>
                                           </p:stCondLst>
                                         </p:cTn>
                                         <p:tgtEl>
-                                          <p:spTgt spid="13"/>
+                                          <p:spTgt spid="12"/>
                                         </p:tgtEl>
                                         <p:attrNameLst>
                                           <p:attrName>style.visibility</p:attrName>
@@ -15886,77 +15235,7 @@
                                     </p:set>
                                     <p:animEffect transition="in" filter="fade">
                                       <p:cBhvr>
-                                        <p:cTn id="24" dur="500"/>
-                                        <p:tgtEl>
-                                          <p:spTgt spid="13"/>
-                                        </p:tgtEl>
-                                      </p:cBhvr>
-                                    </p:animEffect>
-                                  </p:childTnLst>
-                                </p:cTn>
-                              </p:par>
-                              <p:par>
-                                <p:cTn id="25" presetID="10" presetClass="entr" presetSubtype="0" fill="hold" grpId="0" nodeType="withEffect">
-                                  <p:stCondLst>
-                                    <p:cond delay="0"/>
-                                  </p:stCondLst>
-                                  <p:childTnLst>
-                                    <p:set>
-                                      <p:cBhvr>
-                                        <p:cTn id="26" dur="1" fill="hold">
-                                          <p:stCondLst>
-                                            <p:cond delay="0"/>
-                                          </p:stCondLst>
-                                        </p:cTn>
-                                        <p:tgtEl>
-                                          <p:spTgt spid="10"/>
-                                        </p:tgtEl>
-                                        <p:attrNameLst>
-                                          <p:attrName>style.visibility</p:attrName>
-                                        </p:attrNameLst>
-                                      </p:cBhvr>
-                                      <p:to>
-                                        <p:strVal val="visible"/>
-                                      </p:to>
-                                    </p:set>
-                                    <p:animEffect transition="in" filter="fade">
-                                      <p:cBhvr>
-                                        <p:cTn id="27" dur="500"/>
-                                        <p:tgtEl>
-                                          <p:spTgt spid="10"/>
-                                        </p:tgtEl>
-                                      </p:cBhvr>
-                                    </p:animEffect>
-                                  </p:childTnLst>
-                                </p:cTn>
-                              </p:par>
-                              <p:par>
-                                <p:cTn id="28" presetID="10" presetClass="entr" presetSubtype="0" fill="hold" grpId="0" nodeType="withEffect">
-                                  <p:stCondLst>
-                                    <p:cond delay="0"/>
-                                  </p:stCondLst>
-                                  <p:childTnLst>
-                                    <p:set>
-                                      <p:cBhvr>
-                                        <p:cTn id="29" dur="1" fill="hold">
-                                          <p:stCondLst>
-                                            <p:cond delay="0"/>
-                                          </p:stCondLst>
-                                        </p:cTn>
-                                        <p:tgtEl>
-                                          <p:spTgt spid="12"/>
-                                        </p:tgtEl>
-                                        <p:attrNameLst>
-                                          <p:attrName>style.visibility</p:attrName>
-                                        </p:attrNameLst>
-                                      </p:cBhvr>
-                                      <p:to>
-                                        <p:strVal val="visible"/>
-                                      </p:to>
-                                    </p:set>
-                                    <p:animEffect transition="in" filter="fade">
-                                      <p:cBhvr>
-                                        <p:cTn id="30" dur="500"/>
+                                        <p:cTn id="22" dur="500"/>
                                         <p:tgtEl>
                                           <p:spTgt spid="12"/>
                                         </p:tgtEl>
@@ -15994,11 +15273,9 @@
     </p:tnLst>
     <p:bldLst>
       <p:bldP spid="6" grpId="0" animBg="1"/>
-      <p:bldP spid="7" grpId="0" animBg="1"/>
       <p:bldP spid="8" grpId="0"/>
       <p:bldP spid="9" grpId="0"/>
       <p:bldP spid="10" grpId="0" animBg="1"/>
-      <p:bldP spid="11" grpId="0" animBg="1"/>
       <p:bldP spid="12" grpId="0"/>
       <p:bldP spid="13" grpId="0"/>
     </p:bldLst>
@@ -16247,50 +15524,6 @@
       </p:sp>
       <p:sp>
         <p:nvSpPr>
-          <p:cNvPr id="7" name="Rounded Rectangle 6"/>
-          <p:cNvSpPr/>
-          <p:nvPr/>
-        </p:nvSpPr>
-        <p:spPr>
-          <a:xfrm>
-            <a:off x="1005839" y="1572768"/>
-            <a:ext cx="73152" cy="2798064"/>
-          </a:xfrm>
-          <a:prstGeom prst="roundRect">
-            <a:avLst/>
-          </a:prstGeom>
-          <a:solidFill>
-            <a:srgbClr val="6C43B4"/>
-          </a:solidFill>
-          <a:ln>
-            <a:noFill/>
-          </a:ln>
-        </p:spPr>
-        <p:style>
-          <a:lnRef idx="1">
-            <a:schemeClr val="accent1"/>
-          </a:lnRef>
-          <a:fillRef idx="3">
-            <a:schemeClr val="accent1"/>
-          </a:fillRef>
-          <a:effectRef idx="2">
-            <a:schemeClr val="accent1"/>
-          </a:effectRef>
-          <a:fontRef idx="minor">
-            <a:schemeClr val="lt1"/>
-          </a:fontRef>
-        </p:style>
-        <p:txBody>
-          <a:bodyPr rtlCol="0" anchor="ctr"/>
-          <a:lstStyle/>
-          <a:p>
-            <a:pPr algn="ctr"/>
-            <a:endParaRPr/>
-          </a:p>
-        </p:txBody>
-      </p:sp>
-      <p:sp>
-        <p:nvSpPr>
           <p:cNvPr id="8" name="TextBox 7"/>
           <p:cNvSpPr txBox="1"/>
           <p:nvPr/>
@@ -16386,50 +15619,6 @@
             <a:solidFill>
               <a:srgbClr val="E8DFF0"/>
             </a:solidFill>
-          </a:ln>
-        </p:spPr>
-        <p:style>
-          <a:lnRef idx="1">
-            <a:schemeClr val="accent1"/>
-          </a:lnRef>
-          <a:fillRef idx="3">
-            <a:schemeClr val="accent1"/>
-          </a:fillRef>
-          <a:effectRef idx="2">
-            <a:schemeClr val="accent1"/>
-          </a:effectRef>
-          <a:fontRef idx="minor">
-            <a:schemeClr val="lt1"/>
-          </a:fontRef>
-        </p:style>
-        <p:txBody>
-          <a:bodyPr rtlCol="0" anchor="ctr"/>
-          <a:lstStyle/>
-          <a:p>
-            <a:pPr algn="ctr"/>
-            <a:endParaRPr/>
-          </a:p>
-        </p:txBody>
-      </p:sp>
-      <p:sp>
-        <p:nvSpPr>
-          <p:cNvPr id="11" name="Rounded Rectangle 10"/>
-          <p:cNvSpPr/>
-          <p:nvPr/>
-        </p:nvSpPr>
-        <p:spPr>
-          <a:xfrm>
-            <a:off x="1005839" y="4956048"/>
-            <a:ext cx="73152" cy="740663"/>
-          </a:xfrm>
-          <a:prstGeom prst="roundRect">
-            <a:avLst/>
-          </a:prstGeom>
-          <a:solidFill>
-            <a:srgbClr val="E65CA4"/>
-          </a:solidFill>
-          <a:ln>
-            <a:noFill/>
           </a:ln>
         </p:spPr>
         <p:style>
@@ -16636,7 +15825,7 @@
                                           </p:stCondLst>
                                         </p:cTn>
                                         <p:tgtEl>
-                                          <p:spTgt spid="7"/>
+                                          <p:spTgt spid="8"/>
                                         </p:tgtEl>
                                         <p:attrNameLst>
                                           <p:attrName>style.visibility</p:attrName>
@@ -16650,7 +15839,7 @@
                                       <p:cBhvr>
                                         <p:cTn id="10" dur="500"/>
                                         <p:tgtEl>
-                                          <p:spTgt spid="7"/>
+                                          <p:spTgt spid="8"/>
                                         </p:tgtEl>
                                       </p:cBhvr>
                                     </p:animEffect>
@@ -16671,7 +15860,7 @@
                                           </p:stCondLst>
                                         </p:cTn>
                                         <p:tgtEl>
-                                          <p:spTgt spid="8"/>
+                                          <p:spTgt spid="9"/>
                                         </p:tgtEl>
                                         <p:attrNameLst>
                                           <p:attrName>style.visibility</p:attrName>
@@ -16685,7 +15874,7 @@
                                       <p:cBhvr>
                                         <p:cTn id="13" dur="500"/>
                                         <p:tgtEl>
-                                          <p:spTgt spid="8"/>
+                                          <p:spTgt spid="9"/>
                                         </p:tgtEl>
                                       </p:cBhvr>
                                     </p:animEffect>
@@ -16706,7 +15895,7 @@
                                           </p:stCondLst>
                                         </p:cTn>
                                         <p:tgtEl>
-                                          <p:spTgt spid="9"/>
+                                          <p:spTgt spid="10"/>
                                         </p:tgtEl>
                                         <p:attrNameLst>
                                           <p:attrName>style.visibility</p:attrName>
@@ -16720,7 +15909,7 @@
                                       <p:cBhvr>
                                         <p:cTn id="16" dur="500"/>
                                         <p:tgtEl>
-                                          <p:spTgt spid="9"/>
+                                          <p:spTgt spid="10"/>
                                         </p:tgtEl>
                                       </p:cBhvr>
                                     </p:animEffect>
@@ -16741,7 +15930,7 @@
                                           </p:stCondLst>
                                         </p:cTn>
                                         <p:tgtEl>
-                                          <p:spTgt spid="10"/>
+                                          <p:spTgt spid="12"/>
                                         </p:tgtEl>
                                         <p:attrNameLst>
                                           <p:attrName>style.visibility</p:attrName>
@@ -16755,7 +15944,7 @@
                                       <p:cBhvr>
                                         <p:cTn id="19" dur="500"/>
                                         <p:tgtEl>
-                                          <p:spTgt spid="10"/>
+                                          <p:spTgt spid="12"/>
                                         </p:tgtEl>
                                       </p:cBhvr>
                                     </p:animEffect>
@@ -16776,7 +15965,7 @@
                                           </p:stCondLst>
                                         </p:cTn>
                                         <p:tgtEl>
-                                          <p:spTgt spid="11"/>
+                                          <p:spTgt spid="13"/>
                                         </p:tgtEl>
                                         <p:attrNameLst>
                                           <p:attrName>style.visibility</p:attrName>
@@ -16790,7 +15979,7 @@
                                       <p:cBhvr>
                                         <p:cTn id="22" dur="500"/>
                                         <p:tgtEl>
-                                          <p:spTgt spid="11"/>
+                                          <p:spTgt spid="13"/>
                                         </p:tgtEl>
                                       </p:cBhvr>
                                     </p:animEffect>
@@ -16811,7 +16000,7 @@
                                           </p:stCondLst>
                                         </p:cTn>
                                         <p:tgtEl>
-                                          <p:spTgt spid="12"/>
+                                          <p:spTgt spid="14"/>
                                         </p:tgtEl>
                                         <p:attrNameLst>
                                           <p:attrName>style.visibility</p:attrName>
@@ -16824,76 +16013,6 @@
                                     <p:animEffect transition="in" filter="fade">
                                       <p:cBhvr>
                                         <p:cTn id="25" dur="500"/>
-                                        <p:tgtEl>
-                                          <p:spTgt spid="12"/>
-                                        </p:tgtEl>
-                                      </p:cBhvr>
-                                    </p:animEffect>
-                                  </p:childTnLst>
-                                </p:cTn>
-                              </p:par>
-                              <p:par>
-                                <p:cTn id="26" presetID="10" presetClass="entr" presetSubtype="0" fill="hold" grpId="0" nodeType="withEffect">
-                                  <p:stCondLst>
-                                    <p:cond delay="0"/>
-                                  </p:stCondLst>
-                                  <p:childTnLst>
-                                    <p:set>
-                                      <p:cBhvr>
-                                        <p:cTn id="27" dur="1" fill="hold">
-                                          <p:stCondLst>
-                                            <p:cond delay="0"/>
-                                          </p:stCondLst>
-                                        </p:cTn>
-                                        <p:tgtEl>
-                                          <p:spTgt spid="13"/>
-                                        </p:tgtEl>
-                                        <p:attrNameLst>
-                                          <p:attrName>style.visibility</p:attrName>
-                                        </p:attrNameLst>
-                                      </p:cBhvr>
-                                      <p:to>
-                                        <p:strVal val="visible"/>
-                                      </p:to>
-                                    </p:set>
-                                    <p:animEffect transition="in" filter="fade">
-                                      <p:cBhvr>
-                                        <p:cTn id="28" dur="500"/>
-                                        <p:tgtEl>
-                                          <p:spTgt spid="13"/>
-                                        </p:tgtEl>
-                                      </p:cBhvr>
-                                    </p:animEffect>
-                                  </p:childTnLst>
-                                </p:cTn>
-                              </p:par>
-                              <p:par>
-                                <p:cTn id="29" presetID="10" presetClass="entr" presetSubtype="0" fill="hold" grpId="0" nodeType="withEffect">
-                                  <p:stCondLst>
-                                    <p:cond delay="0"/>
-                                  </p:stCondLst>
-                                  <p:childTnLst>
-                                    <p:set>
-                                      <p:cBhvr>
-                                        <p:cTn id="30" dur="1" fill="hold">
-                                          <p:stCondLst>
-                                            <p:cond delay="0"/>
-                                          </p:stCondLst>
-                                        </p:cTn>
-                                        <p:tgtEl>
-                                          <p:spTgt spid="14"/>
-                                        </p:tgtEl>
-                                        <p:attrNameLst>
-                                          <p:attrName>style.visibility</p:attrName>
-                                        </p:attrNameLst>
-                                      </p:cBhvr>
-                                      <p:to>
-                                        <p:strVal val="visible"/>
-                                      </p:to>
-                                    </p:set>
-                                    <p:animEffect transition="in" filter="fade">
-                                      <p:cBhvr>
-                                        <p:cTn id="31" dur="500"/>
                                         <p:tgtEl>
                                           <p:spTgt spid="14"/>
                                         </p:tgtEl>
@@ -16931,11 +16050,9 @@
     </p:tnLst>
     <p:bldLst>
       <p:bldP spid="6" grpId="0" animBg="1"/>
-      <p:bldP spid="7" grpId="0" animBg="1"/>
       <p:bldP spid="8" grpId="0"/>
       <p:bldP spid="9" grpId="0"/>
       <p:bldP spid="10" grpId="0" animBg="1"/>
-      <p:bldP spid="11" grpId="0" animBg="1"/>
       <p:bldP spid="12" grpId="0"/>
       <p:bldP spid="13" grpId="0"/>
       <p:bldP spid="14" grpId="0"/>
@@ -17186,50 +16303,6 @@
       </p:sp>
       <p:sp>
         <p:nvSpPr>
-          <p:cNvPr id="7" name="Rounded Rectangle 6"/>
-          <p:cNvSpPr/>
-          <p:nvPr/>
-        </p:nvSpPr>
-        <p:spPr>
-          <a:xfrm>
-            <a:off x="731520" y="1298448"/>
-            <a:ext cx="73152" cy="1746504"/>
-          </a:xfrm>
-          <a:prstGeom prst="roundRect">
-            <a:avLst/>
-          </a:prstGeom>
-          <a:solidFill>
-            <a:srgbClr val="6C43B4"/>
-          </a:solidFill>
-          <a:ln>
-            <a:noFill/>
-          </a:ln>
-        </p:spPr>
-        <p:style>
-          <a:lnRef idx="1">
-            <a:schemeClr val="accent1"/>
-          </a:lnRef>
-          <a:fillRef idx="3">
-            <a:schemeClr val="accent1"/>
-          </a:fillRef>
-          <a:effectRef idx="2">
-            <a:schemeClr val="accent1"/>
-          </a:effectRef>
-          <a:fontRef idx="minor">
-            <a:schemeClr val="lt1"/>
-          </a:fontRef>
-        </p:style>
-        <p:txBody>
-          <a:bodyPr rtlCol="0" anchor="ctr"/>
-          <a:lstStyle/>
-          <a:p>
-            <a:pPr algn="ctr"/>
-            <a:endParaRPr/>
-          </a:p>
-        </p:txBody>
-      </p:sp>
-      <p:sp>
-        <p:nvSpPr>
           <p:cNvPr id="8" name="TextBox 7"/>
           <p:cNvSpPr txBox="1"/>
           <p:nvPr/>
@@ -17348,50 +16421,6 @@
       </p:sp>
       <p:sp>
         <p:nvSpPr>
-          <p:cNvPr id="11" name="Rounded Rectangle 10"/>
-          <p:cNvSpPr/>
-          <p:nvPr/>
-        </p:nvSpPr>
-        <p:spPr>
-          <a:xfrm>
-            <a:off x="4572000" y="1298448"/>
-            <a:ext cx="73152" cy="1746504"/>
-          </a:xfrm>
-          <a:prstGeom prst="roundRect">
-            <a:avLst/>
-          </a:prstGeom>
-          <a:solidFill>
-            <a:srgbClr val="E65CA4"/>
-          </a:solidFill>
-          <a:ln>
-            <a:noFill/>
-          </a:ln>
-        </p:spPr>
-        <p:style>
-          <a:lnRef idx="1">
-            <a:schemeClr val="accent1"/>
-          </a:lnRef>
-          <a:fillRef idx="3">
-            <a:schemeClr val="accent1"/>
-          </a:fillRef>
-          <a:effectRef idx="2">
-            <a:schemeClr val="accent1"/>
-          </a:effectRef>
-          <a:fontRef idx="minor">
-            <a:schemeClr val="lt1"/>
-          </a:fontRef>
-        </p:style>
-        <p:txBody>
-          <a:bodyPr rtlCol="0" anchor="ctr"/>
-          <a:lstStyle/>
-          <a:p>
-            <a:pPr algn="ctr"/>
-            <a:endParaRPr/>
-          </a:p>
-        </p:txBody>
-      </p:sp>
-      <p:sp>
-        <p:nvSpPr>
           <p:cNvPr id="12" name="TextBox 11"/>
           <p:cNvSpPr txBox="1"/>
           <p:nvPr/>
@@ -17510,50 +16539,6 @@
       </p:sp>
       <p:sp>
         <p:nvSpPr>
-          <p:cNvPr id="15" name="Rounded Rectangle 14"/>
-          <p:cNvSpPr/>
-          <p:nvPr/>
-        </p:nvSpPr>
-        <p:spPr>
-          <a:xfrm>
-            <a:off x="8229600" y="1298448"/>
-            <a:ext cx="73152" cy="1746504"/>
-          </a:xfrm>
-          <a:prstGeom prst="roundRect">
-            <a:avLst/>
-          </a:prstGeom>
-          <a:solidFill>
-            <a:srgbClr val="6C43B4"/>
-          </a:solidFill>
-          <a:ln>
-            <a:noFill/>
-          </a:ln>
-        </p:spPr>
-        <p:style>
-          <a:lnRef idx="1">
-            <a:schemeClr val="accent1"/>
-          </a:lnRef>
-          <a:fillRef idx="3">
-            <a:schemeClr val="accent1"/>
-          </a:fillRef>
-          <a:effectRef idx="2">
-            <a:schemeClr val="accent1"/>
-          </a:effectRef>
-          <a:fontRef idx="minor">
-            <a:schemeClr val="lt1"/>
-          </a:fontRef>
-        </p:style>
-        <p:txBody>
-          <a:bodyPr rtlCol="0" anchor="ctr"/>
-          <a:lstStyle/>
-          <a:p>
-            <a:pPr algn="ctr"/>
-            <a:endParaRPr/>
-          </a:p>
-        </p:txBody>
-      </p:sp>
-      <p:sp>
-        <p:nvSpPr>
           <p:cNvPr id="16" name="TextBox 15"/>
           <p:cNvSpPr txBox="1"/>
           <p:nvPr/>
@@ -17676,50 +16661,6 @@
       </p:sp>
       <p:sp>
         <p:nvSpPr>
-          <p:cNvPr id="19" name="Rounded Rectangle 18"/>
-          <p:cNvSpPr/>
-          <p:nvPr/>
-        </p:nvSpPr>
-        <p:spPr>
-          <a:xfrm>
-            <a:off x="731520" y="3630168"/>
-            <a:ext cx="73152" cy="1929384"/>
-          </a:xfrm>
-          <a:prstGeom prst="roundRect">
-            <a:avLst/>
-          </a:prstGeom>
-          <a:solidFill>
-            <a:srgbClr val="CD475D"/>
-          </a:solidFill>
-          <a:ln>
-            <a:noFill/>
-          </a:ln>
-        </p:spPr>
-        <p:style>
-          <a:lnRef idx="1">
-            <a:schemeClr val="accent1"/>
-          </a:lnRef>
-          <a:fillRef idx="3">
-            <a:schemeClr val="accent1"/>
-          </a:fillRef>
-          <a:effectRef idx="2">
-            <a:schemeClr val="accent1"/>
-          </a:effectRef>
-          <a:fontRef idx="minor">
-            <a:schemeClr val="lt1"/>
-          </a:fontRef>
-        </p:style>
-        <p:txBody>
-          <a:bodyPr rtlCol="0" anchor="ctr"/>
-          <a:lstStyle/>
-          <a:p>
-            <a:pPr algn="ctr"/>
-            <a:endParaRPr/>
-          </a:p>
-        </p:txBody>
-      </p:sp>
-      <p:sp>
-        <p:nvSpPr>
           <p:cNvPr id="20" name="TextBox 19"/>
           <p:cNvSpPr txBox="1"/>
           <p:nvPr/>
@@ -17823,50 +16764,6 @@
             <a:solidFill>
               <a:srgbClr val="E8DFF0"/>
             </a:solidFill>
-          </a:ln>
-        </p:spPr>
-        <p:style>
-          <a:lnRef idx="1">
-            <a:schemeClr val="accent1"/>
-          </a:lnRef>
-          <a:fillRef idx="3">
-            <a:schemeClr val="accent1"/>
-          </a:fillRef>
-          <a:effectRef idx="2">
-            <a:schemeClr val="accent1"/>
-          </a:effectRef>
-          <a:fontRef idx="minor">
-            <a:schemeClr val="lt1"/>
-          </a:fontRef>
-        </p:style>
-        <p:txBody>
-          <a:bodyPr rtlCol="0" anchor="ctr"/>
-          <a:lstStyle/>
-          <a:p>
-            <a:pPr algn="ctr"/>
-            <a:endParaRPr/>
-          </a:p>
-        </p:txBody>
-      </p:sp>
-      <p:sp>
-        <p:nvSpPr>
-          <p:cNvPr id="23" name="Rounded Rectangle 22"/>
-          <p:cNvSpPr/>
-          <p:nvPr/>
-        </p:nvSpPr>
-        <p:spPr>
-          <a:xfrm>
-            <a:off x="6309360" y="3630168"/>
-            <a:ext cx="73152" cy="1929384"/>
-          </a:xfrm>
-          <a:prstGeom prst="roundRect">
-            <a:avLst/>
-          </a:prstGeom>
-          <a:solidFill>
-            <a:srgbClr val="E65CA4"/>
-          </a:solidFill>
-          <a:ln>
-            <a:noFill/>
           </a:ln>
         </p:spPr>
         <p:style>
@@ -18073,7 +16970,7 @@
                                           </p:stCondLst>
                                         </p:cTn>
                                         <p:tgtEl>
-                                          <p:spTgt spid="7"/>
+                                          <p:spTgt spid="8"/>
                                         </p:tgtEl>
                                         <p:attrNameLst>
                                           <p:attrName>style.visibility</p:attrName>
@@ -18087,7 +16984,7 @@
                                       <p:cBhvr>
                                         <p:cTn id="10" dur="500"/>
                                         <p:tgtEl>
-                                          <p:spTgt spid="7"/>
+                                          <p:spTgt spid="8"/>
                                         </p:tgtEl>
                                       </p:cBhvr>
                                     </p:animEffect>
@@ -18108,7 +17005,7 @@
                                           </p:stCondLst>
                                         </p:cTn>
                                         <p:tgtEl>
-                                          <p:spTgt spid="8"/>
+                                          <p:spTgt spid="9"/>
                                         </p:tgtEl>
                                         <p:attrNameLst>
                                           <p:attrName>style.visibility</p:attrName>
@@ -18122,7 +17019,7 @@
                                       <p:cBhvr>
                                         <p:cTn id="13" dur="500"/>
                                         <p:tgtEl>
-                                          <p:spTgt spid="8"/>
+                                          <p:spTgt spid="9"/>
                                         </p:tgtEl>
                                       </p:cBhvr>
                                     </p:animEffect>
@@ -18143,7 +17040,7 @@
                                           </p:stCondLst>
                                         </p:cTn>
                                         <p:tgtEl>
-                                          <p:spTgt spid="9"/>
+                                          <p:spTgt spid="10"/>
                                         </p:tgtEl>
                                         <p:attrNameLst>
                                           <p:attrName>style.visibility</p:attrName>
@@ -18157,7 +17054,7 @@
                                       <p:cBhvr>
                                         <p:cTn id="16" dur="500"/>
                                         <p:tgtEl>
-                                          <p:spTgt spid="9"/>
+                                          <p:spTgt spid="10"/>
                                         </p:tgtEl>
                                       </p:cBhvr>
                                     </p:animEffect>
@@ -18178,7 +17075,7 @@
                                           </p:stCondLst>
                                         </p:cTn>
                                         <p:tgtEl>
-                                          <p:spTgt spid="10"/>
+                                          <p:spTgt spid="12"/>
                                         </p:tgtEl>
                                         <p:attrNameLst>
                                           <p:attrName>style.visibility</p:attrName>
@@ -18192,7 +17089,7 @@
                                       <p:cBhvr>
                                         <p:cTn id="19" dur="500"/>
                                         <p:tgtEl>
-                                          <p:spTgt spid="10"/>
+                                          <p:spTgt spid="12"/>
                                         </p:tgtEl>
                                       </p:cBhvr>
                                     </p:animEffect>
@@ -18213,7 +17110,7 @@
                                           </p:stCondLst>
                                         </p:cTn>
                                         <p:tgtEl>
-                                          <p:spTgt spid="11"/>
+                                          <p:spTgt spid="13"/>
                                         </p:tgtEl>
                                         <p:attrNameLst>
                                           <p:attrName>style.visibility</p:attrName>
@@ -18227,7 +17124,7 @@
                                       <p:cBhvr>
                                         <p:cTn id="22" dur="500"/>
                                         <p:tgtEl>
-                                          <p:spTgt spid="11"/>
+                                          <p:spTgt spid="13"/>
                                         </p:tgtEl>
                                       </p:cBhvr>
                                     </p:animEffect>
@@ -18248,7 +17145,7 @@
                                           </p:stCondLst>
                                         </p:cTn>
                                         <p:tgtEl>
-                                          <p:spTgt spid="12"/>
+                                          <p:spTgt spid="14"/>
                                         </p:tgtEl>
                                         <p:attrNameLst>
                                           <p:attrName>style.visibility</p:attrName>
@@ -18262,7 +17159,7 @@
                                       <p:cBhvr>
                                         <p:cTn id="25" dur="500"/>
                                         <p:tgtEl>
-                                          <p:spTgt spid="12"/>
+                                          <p:spTgt spid="14"/>
                                         </p:tgtEl>
                                       </p:cBhvr>
                                     </p:animEffect>
@@ -18283,7 +17180,7 @@
                                           </p:stCondLst>
                                         </p:cTn>
                                         <p:tgtEl>
-                                          <p:spTgt spid="13"/>
+                                          <p:spTgt spid="16"/>
                                         </p:tgtEl>
                                         <p:attrNameLst>
                                           <p:attrName>style.visibility</p:attrName>
@@ -18297,7 +17194,7 @@
                                       <p:cBhvr>
                                         <p:cTn id="28" dur="500"/>
                                         <p:tgtEl>
-                                          <p:spTgt spid="13"/>
+                                          <p:spTgt spid="16"/>
                                         </p:tgtEl>
                                       </p:cBhvr>
                                     </p:animEffect>
@@ -18318,7 +17215,7 @@
                                           </p:stCondLst>
                                         </p:cTn>
                                         <p:tgtEl>
-                                          <p:spTgt spid="14"/>
+                                          <p:spTgt spid="17"/>
                                         </p:tgtEl>
                                         <p:attrNameLst>
                                           <p:attrName>style.visibility</p:attrName>
@@ -18332,7 +17229,7 @@
                                       <p:cBhvr>
                                         <p:cTn id="31" dur="500"/>
                                         <p:tgtEl>
-                                          <p:spTgt spid="14"/>
+                                          <p:spTgt spid="17"/>
                                         </p:tgtEl>
                                       </p:cBhvr>
                                     </p:animEffect>
@@ -18353,7 +17250,7 @@
                                           </p:stCondLst>
                                         </p:cTn>
                                         <p:tgtEl>
-                                          <p:spTgt spid="15"/>
+                                          <p:spTgt spid="18"/>
                                         </p:tgtEl>
                                         <p:attrNameLst>
                                           <p:attrName>style.visibility</p:attrName>
@@ -18367,7 +17264,7 @@
                                       <p:cBhvr>
                                         <p:cTn id="34" dur="500"/>
                                         <p:tgtEl>
-                                          <p:spTgt spid="15"/>
+                                          <p:spTgt spid="18"/>
                                         </p:tgtEl>
                                       </p:cBhvr>
                                     </p:animEffect>
@@ -18388,7 +17285,7 @@
                                           </p:stCondLst>
                                         </p:cTn>
                                         <p:tgtEl>
-                                          <p:spTgt spid="16"/>
+                                          <p:spTgt spid="20"/>
                                         </p:tgtEl>
                                         <p:attrNameLst>
                                           <p:attrName>style.visibility</p:attrName>
@@ -18402,7 +17299,7 @@
                                       <p:cBhvr>
                                         <p:cTn id="37" dur="500"/>
                                         <p:tgtEl>
-                                          <p:spTgt spid="16"/>
+                                          <p:spTgt spid="20"/>
                                         </p:tgtEl>
                                       </p:cBhvr>
                                     </p:animEffect>
@@ -18423,7 +17320,7 @@
                                           </p:stCondLst>
                                         </p:cTn>
                                         <p:tgtEl>
-                                          <p:spTgt spid="17"/>
+                                          <p:spTgt spid="21"/>
                                         </p:tgtEl>
                                         <p:attrNameLst>
                                           <p:attrName>style.visibility</p:attrName>
@@ -18437,7 +17334,7 @@
                                       <p:cBhvr>
                                         <p:cTn id="40" dur="500"/>
                                         <p:tgtEl>
-                                          <p:spTgt spid="17"/>
+                                          <p:spTgt spid="21"/>
                                         </p:tgtEl>
                                       </p:cBhvr>
                                     </p:animEffect>
@@ -18458,7 +17355,7 @@
                                           </p:stCondLst>
                                         </p:cTn>
                                         <p:tgtEl>
-                                          <p:spTgt spid="18"/>
+                                          <p:spTgt spid="22"/>
                                         </p:tgtEl>
                                         <p:attrNameLst>
                                           <p:attrName>style.visibility</p:attrName>
@@ -18472,7 +17369,7 @@
                                       <p:cBhvr>
                                         <p:cTn id="43" dur="500"/>
                                         <p:tgtEl>
-                                          <p:spTgt spid="18"/>
+                                          <p:spTgt spid="22"/>
                                         </p:tgtEl>
                                       </p:cBhvr>
                                     </p:animEffect>
@@ -18493,7 +17390,7 @@
                                           </p:stCondLst>
                                         </p:cTn>
                                         <p:tgtEl>
-                                          <p:spTgt spid="19"/>
+                                          <p:spTgt spid="24"/>
                                         </p:tgtEl>
                                         <p:attrNameLst>
                                           <p:attrName>style.visibility</p:attrName>
@@ -18507,7 +17404,7 @@
                                       <p:cBhvr>
                                         <p:cTn id="46" dur="500"/>
                                         <p:tgtEl>
-                                          <p:spTgt spid="19"/>
+                                          <p:spTgt spid="24"/>
                                         </p:tgtEl>
                                       </p:cBhvr>
                                     </p:animEffect>
@@ -18528,7 +17425,7 @@
                                           </p:stCondLst>
                                         </p:cTn>
                                         <p:tgtEl>
-                                          <p:spTgt spid="20"/>
+                                          <p:spTgt spid="25"/>
                                         </p:tgtEl>
                                         <p:attrNameLst>
                                           <p:attrName>style.visibility</p:attrName>
@@ -18542,7 +17439,7 @@
                                       <p:cBhvr>
                                         <p:cTn id="49" dur="500"/>
                                         <p:tgtEl>
-                                          <p:spTgt spid="20"/>
+                                          <p:spTgt spid="25"/>
                                         </p:tgtEl>
                                       </p:cBhvr>
                                     </p:animEffect>
@@ -18563,7 +17460,7 @@
                                           </p:stCondLst>
                                         </p:cTn>
                                         <p:tgtEl>
-                                          <p:spTgt spid="21"/>
+                                          <p:spTgt spid="26"/>
                                         </p:tgtEl>
                                         <p:attrNameLst>
                                           <p:attrName>style.visibility</p:attrName>
@@ -18576,181 +17473,6 @@
                                     <p:animEffect transition="in" filter="fade">
                                       <p:cBhvr>
                                         <p:cTn id="52" dur="500"/>
-                                        <p:tgtEl>
-                                          <p:spTgt spid="21"/>
-                                        </p:tgtEl>
-                                      </p:cBhvr>
-                                    </p:animEffect>
-                                  </p:childTnLst>
-                                </p:cTn>
-                              </p:par>
-                              <p:par>
-                                <p:cTn id="53" presetID="10" presetClass="entr" presetSubtype="0" fill="hold" grpId="0" nodeType="withEffect">
-                                  <p:stCondLst>
-                                    <p:cond delay="0"/>
-                                  </p:stCondLst>
-                                  <p:childTnLst>
-                                    <p:set>
-                                      <p:cBhvr>
-                                        <p:cTn id="54" dur="1" fill="hold">
-                                          <p:stCondLst>
-                                            <p:cond delay="0"/>
-                                          </p:stCondLst>
-                                        </p:cTn>
-                                        <p:tgtEl>
-                                          <p:spTgt spid="22"/>
-                                        </p:tgtEl>
-                                        <p:attrNameLst>
-                                          <p:attrName>style.visibility</p:attrName>
-                                        </p:attrNameLst>
-                                      </p:cBhvr>
-                                      <p:to>
-                                        <p:strVal val="visible"/>
-                                      </p:to>
-                                    </p:set>
-                                    <p:animEffect transition="in" filter="fade">
-                                      <p:cBhvr>
-                                        <p:cTn id="55" dur="500"/>
-                                        <p:tgtEl>
-                                          <p:spTgt spid="22"/>
-                                        </p:tgtEl>
-                                      </p:cBhvr>
-                                    </p:animEffect>
-                                  </p:childTnLst>
-                                </p:cTn>
-                              </p:par>
-                              <p:par>
-                                <p:cTn id="56" presetID="10" presetClass="entr" presetSubtype="0" fill="hold" grpId="0" nodeType="withEffect">
-                                  <p:stCondLst>
-                                    <p:cond delay="0"/>
-                                  </p:stCondLst>
-                                  <p:childTnLst>
-                                    <p:set>
-                                      <p:cBhvr>
-                                        <p:cTn id="57" dur="1" fill="hold">
-                                          <p:stCondLst>
-                                            <p:cond delay="0"/>
-                                          </p:stCondLst>
-                                        </p:cTn>
-                                        <p:tgtEl>
-                                          <p:spTgt spid="23"/>
-                                        </p:tgtEl>
-                                        <p:attrNameLst>
-                                          <p:attrName>style.visibility</p:attrName>
-                                        </p:attrNameLst>
-                                      </p:cBhvr>
-                                      <p:to>
-                                        <p:strVal val="visible"/>
-                                      </p:to>
-                                    </p:set>
-                                    <p:animEffect transition="in" filter="fade">
-                                      <p:cBhvr>
-                                        <p:cTn id="58" dur="500"/>
-                                        <p:tgtEl>
-                                          <p:spTgt spid="23"/>
-                                        </p:tgtEl>
-                                      </p:cBhvr>
-                                    </p:animEffect>
-                                  </p:childTnLst>
-                                </p:cTn>
-                              </p:par>
-                              <p:par>
-                                <p:cTn id="59" presetID="10" presetClass="entr" presetSubtype="0" fill="hold" grpId="0" nodeType="withEffect">
-                                  <p:stCondLst>
-                                    <p:cond delay="0"/>
-                                  </p:stCondLst>
-                                  <p:childTnLst>
-                                    <p:set>
-                                      <p:cBhvr>
-                                        <p:cTn id="60" dur="1" fill="hold">
-                                          <p:stCondLst>
-                                            <p:cond delay="0"/>
-                                          </p:stCondLst>
-                                        </p:cTn>
-                                        <p:tgtEl>
-                                          <p:spTgt spid="24"/>
-                                        </p:tgtEl>
-                                        <p:attrNameLst>
-                                          <p:attrName>style.visibility</p:attrName>
-                                        </p:attrNameLst>
-                                      </p:cBhvr>
-                                      <p:to>
-                                        <p:strVal val="visible"/>
-                                      </p:to>
-                                    </p:set>
-                                    <p:animEffect transition="in" filter="fade">
-                                      <p:cBhvr>
-                                        <p:cTn id="61" dur="500"/>
-                                        <p:tgtEl>
-                                          <p:spTgt spid="24"/>
-                                        </p:tgtEl>
-                                      </p:cBhvr>
-                                    </p:animEffect>
-                                  </p:childTnLst>
-                                </p:cTn>
-                              </p:par>
-                              <p:par>
-                                <p:cTn id="62" presetID="10" presetClass="entr" presetSubtype="0" fill="hold" grpId="0" nodeType="withEffect">
-                                  <p:stCondLst>
-                                    <p:cond delay="0"/>
-                                  </p:stCondLst>
-                                  <p:childTnLst>
-                                    <p:set>
-                                      <p:cBhvr>
-                                        <p:cTn id="63" dur="1" fill="hold">
-                                          <p:stCondLst>
-                                            <p:cond delay="0"/>
-                                          </p:stCondLst>
-                                        </p:cTn>
-                                        <p:tgtEl>
-                                          <p:spTgt spid="25"/>
-                                        </p:tgtEl>
-                                        <p:attrNameLst>
-                                          <p:attrName>style.visibility</p:attrName>
-                                        </p:attrNameLst>
-                                      </p:cBhvr>
-                                      <p:to>
-                                        <p:strVal val="visible"/>
-                                      </p:to>
-                                    </p:set>
-                                    <p:animEffect transition="in" filter="fade">
-                                      <p:cBhvr>
-                                        <p:cTn id="64" dur="500"/>
-                                        <p:tgtEl>
-                                          <p:spTgt spid="25"/>
-                                        </p:tgtEl>
-                                      </p:cBhvr>
-                                    </p:animEffect>
-                                  </p:childTnLst>
-                                </p:cTn>
-                              </p:par>
-                              <p:par>
-                                <p:cTn id="65" presetID="10" presetClass="entr" presetSubtype="0" fill="hold" grpId="0" nodeType="withEffect">
-                                  <p:stCondLst>
-                                    <p:cond delay="0"/>
-                                  </p:stCondLst>
-                                  <p:childTnLst>
-                                    <p:set>
-                                      <p:cBhvr>
-                                        <p:cTn id="66" dur="1" fill="hold">
-                                          <p:stCondLst>
-                                            <p:cond delay="0"/>
-                                          </p:stCondLst>
-                                        </p:cTn>
-                                        <p:tgtEl>
-                                          <p:spTgt spid="26"/>
-                                        </p:tgtEl>
-                                        <p:attrNameLst>
-                                          <p:attrName>style.visibility</p:attrName>
-                                        </p:attrNameLst>
-                                      </p:cBhvr>
-                                      <p:to>
-                                        <p:strVal val="visible"/>
-                                      </p:to>
-                                    </p:set>
-                                    <p:animEffect transition="in" filter="fade">
-                                      <p:cBhvr>
-                                        <p:cTn id="67" dur="500"/>
                                         <p:tgtEl>
                                           <p:spTgt spid="26"/>
                                         </p:tgtEl>
@@ -18788,23 +17510,18 @@
     </p:tnLst>
     <p:bldLst>
       <p:bldP spid="6" grpId="0" animBg="1"/>
-      <p:bldP spid="7" grpId="0" animBg="1"/>
       <p:bldP spid="8" grpId="0"/>
       <p:bldP spid="9" grpId="0"/>
       <p:bldP spid="10" grpId="0" animBg="1"/>
-      <p:bldP spid="11" grpId="0" animBg="1"/>
       <p:bldP spid="12" grpId="0"/>
       <p:bldP spid="13" grpId="0"/>
       <p:bldP spid="14" grpId="0" animBg="1"/>
-      <p:bldP spid="15" grpId="0" animBg="1"/>
       <p:bldP spid="16" grpId="0"/>
       <p:bldP spid="17" grpId="0"/>
       <p:bldP spid="18" grpId="0" animBg="1"/>
-      <p:bldP spid="19" grpId="0" animBg="1"/>
       <p:bldP spid="20" grpId="0"/>
       <p:bldP spid="21" grpId="0"/>
       <p:bldP spid="22" grpId="0" animBg="1"/>
-      <p:bldP spid="23" grpId="0" animBg="1"/>
       <p:bldP spid="24" grpId="0"/>
       <p:bldP spid="25" grpId="0"/>
       <p:bldP spid="26" grpId="0"/>
@@ -19090,56 +17807,6 @@
       </p:sp>
       <p:sp>
         <p:nvSpPr>
-          <p:cNvPr id="7" name="Rounded Rectangle 6">
-            <a:extLst>
-              <a:ext uri="{FF2B5EF4-FFF2-40B4-BE49-F238E27FC236}">
-                <a16:creationId xmlns:a16="http://schemas.microsoft.com/office/drawing/2014/main" id="{55613401-730F-153B-F614-8D6E98E08E06}"/>
-              </a:ext>
-            </a:extLst>
-          </p:cNvPr>
-          <p:cNvSpPr/>
-          <p:nvPr/>
-        </p:nvSpPr>
-        <p:spPr>
-          <a:xfrm>
-            <a:off x="333801" y="3126396"/>
-            <a:ext cx="73152" cy="671754"/>
-          </a:xfrm>
-          <a:prstGeom prst="roundRect">
-            <a:avLst/>
-          </a:prstGeom>
-          <a:solidFill>
-            <a:srgbClr val="6C43B4"/>
-          </a:solidFill>
-          <a:ln>
-            <a:noFill/>
-          </a:ln>
-        </p:spPr>
-        <p:style>
-          <a:lnRef idx="1">
-            <a:schemeClr val="accent1"/>
-          </a:lnRef>
-          <a:fillRef idx="3">
-            <a:schemeClr val="accent1"/>
-          </a:fillRef>
-          <a:effectRef idx="2">
-            <a:schemeClr val="accent1"/>
-          </a:effectRef>
-          <a:fontRef idx="minor">
-            <a:schemeClr val="lt1"/>
-          </a:fontRef>
-        </p:style>
-        <p:txBody>
-          <a:bodyPr rtlCol="0" anchor="ctr"/>
-          <a:lstStyle/>
-          <a:p>
-            <a:pPr algn="ctr"/>
-            <a:endParaRPr/>
-          </a:p>
-        </p:txBody>
-      </p:sp>
-      <p:sp>
-        <p:nvSpPr>
           <p:cNvPr id="8" name="TextBox 7">
             <a:extLst>
               <a:ext uri="{FF2B5EF4-FFF2-40B4-BE49-F238E27FC236}">
@@ -19497,7 +18164,7 @@
                                           </p:stCondLst>
                                         </p:cTn>
                                         <p:tgtEl>
-                                          <p:spTgt spid="7"/>
+                                          <p:spTgt spid="9"/>
                                         </p:tgtEl>
                                         <p:attrNameLst>
                                           <p:attrName>style.visibility</p:attrName>
@@ -19511,7 +18178,7 @@
                                       <p:cBhvr>
                                         <p:cTn id="15" dur="500"/>
                                         <p:tgtEl>
-                                          <p:spTgt spid="7"/>
+                                          <p:spTgt spid="9"/>
                                         </p:tgtEl>
                                       </p:cBhvr>
                                     </p:animEffect>
@@ -19532,7 +18199,7 @@
                                           </p:stCondLst>
                                         </p:cTn>
                                         <p:tgtEl>
-                                          <p:spTgt spid="9"/>
+                                          <p:spTgt spid="31"/>
                                         </p:tgtEl>
                                         <p:attrNameLst>
                                           <p:attrName>style.visibility</p:attrName>
@@ -19546,7 +18213,7 @@
                                       <p:cBhvr>
                                         <p:cTn id="18" dur="500"/>
                                         <p:tgtEl>
-                                          <p:spTgt spid="9"/>
+                                          <p:spTgt spid="31"/>
                                         </p:tgtEl>
                                       </p:cBhvr>
                                     </p:animEffect>
@@ -19567,7 +18234,7 @@
                                           </p:stCondLst>
                                         </p:cTn>
                                         <p:tgtEl>
-                                          <p:spTgt spid="31"/>
+                                          <p:spTgt spid="6"/>
                                         </p:tgtEl>
                                         <p:attrNameLst>
                                           <p:attrName>style.visibility</p:attrName>
@@ -19580,41 +18247,6 @@
                                     <p:animEffect transition="in" filter="fade">
                                       <p:cBhvr>
                                         <p:cTn id="21" dur="500"/>
-                                        <p:tgtEl>
-                                          <p:spTgt spid="31"/>
-                                        </p:tgtEl>
-                                      </p:cBhvr>
-                                    </p:animEffect>
-                                  </p:childTnLst>
-                                </p:cTn>
-                              </p:par>
-                              <p:par>
-                                <p:cTn id="22" presetID="10" presetClass="entr" presetSubtype="0" fill="hold" grpId="0" nodeType="withEffect">
-                                  <p:stCondLst>
-                                    <p:cond delay="0"/>
-                                  </p:stCondLst>
-                                  <p:childTnLst>
-                                    <p:set>
-                                      <p:cBhvr>
-                                        <p:cTn id="23" dur="1" fill="hold">
-                                          <p:stCondLst>
-                                            <p:cond delay="0"/>
-                                          </p:stCondLst>
-                                        </p:cTn>
-                                        <p:tgtEl>
-                                          <p:spTgt spid="6"/>
-                                        </p:tgtEl>
-                                        <p:attrNameLst>
-                                          <p:attrName>style.visibility</p:attrName>
-                                        </p:attrNameLst>
-                                      </p:cBhvr>
-                                      <p:to>
-                                        <p:strVal val="visible"/>
-                                      </p:to>
-                                    </p:set>
-                                    <p:animEffect transition="in" filter="fade">
-                                      <p:cBhvr>
-                                        <p:cTn id="24" dur="500"/>
                                         <p:tgtEl>
                                           <p:spTgt spid="6"/>
                                         </p:tgtEl>
@@ -19652,7 +18284,6 @@
     </p:tnLst>
     <p:bldLst>
       <p:bldP spid="6" grpId="0" animBg="1"/>
-      <p:bldP spid="7" grpId="0" animBg="1"/>
       <p:bldP spid="8" grpId="0"/>
       <p:bldP spid="9" grpId="0"/>
       <p:bldP spid="31" grpId="0"/>
@@ -20103,56 +18734,6 @@
           </a:p>
         </p:txBody>
       </p:sp>
-      <p:sp>
-        <p:nvSpPr>
-          <p:cNvPr id="32" name="Rounded Rectangle 10">
-            <a:extLst>
-              <a:ext uri="{FF2B5EF4-FFF2-40B4-BE49-F238E27FC236}">
-                <a16:creationId xmlns:a16="http://schemas.microsoft.com/office/drawing/2014/main" id="{8DE1ECBC-3EEF-36D9-4AE0-1C3F546E90EF}"/>
-              </a:ext>
-            </a:extLst>
-          </p:cNvPr>
-          <p:cNvSpPr/>
-          <p:nvPr/>
-        </p:nvSpPr>
-        <p:spPr>
-          <a:xfrm>
-            <a:off x="383482" y="2715457"/>
-            <a:ext cx="72830" cy="829021"/>
-          </a:xfrm>
-          <a:prstGeom prst="roundRect">
-            <a:avLst/>
-          </a:prstGeom>
-          <a:solidFill>
-            <a:srgbClr val="E65CA4"/>
-          </a:solidFill>
-          <a:ln>
-            <a:noFill/>
-          </a:ln>
-        </p:spPr>
-        <p:style>
-          <a:lnRef idx="1">
-            <a:schemeClr val="accent1"/>
-          </a:lnRef>
-          <a:fillRef idx="3">
-            <a:schemeClr val="accent1"/>
-          </a:fillRef>
-          <a:effectRef idx="2">
-            <a:schemeClr val="accent1"/>
-          </a:effectRef>
-          <a:fontRef idx="minor">
-            <a:schemeClr val="lt1"/>
-          </a:fontRef>
-        </p:style>
-        <p:txBody>
-          <a:bodyPr rtlCol="0" anchor="ctr"/>
-          <a:lstStyle/>
-          <a:p>
-            <a:pPr algn="ctr"/>
-            <a:endParaRPr/>
-          </a:p>
-        </p:txBody>
-      </p:sp>
       <p:pic>
         <p:nvPicPr>
           <p:cNvPr id="34" name="Picture 33">
@@ -20315,7 +18896,7 @@
                                           </p:stCondLst>
                                         </p:cTn>
                                         <p:tgtEl>
-                                          <p:spTgt spid="32"/>
+                                          <p:spTgt spid="31"/>
                                         </p:tgtEl>
                                         <p:attrNameLst>
                                           <p:attrName>style.visibility</p:attrName>
@@ -20329,7 +18910,7 @@
                                       <p:cBhvr>
                                         <p:cTn id="15" dur="500"/>
                                         <p:tgtEl>
-                                          <p:spTgt spid="32"/>
+                                          <p:spTgt spid="31"/>
                                         </p:tgtEl>
                                       </p:cBhvr>
                                     </p:animEffect>
@@ -20350,7 +18931,7 @@
                                           </p:stCondLst>
                                         </p:cTn>
                                         <p:tgtEl>
-                                          <p:spTgt spid="31"/>
+                                          <p:spTgt spid="29"/>
                                         </p:tgtEl>
                                         <p:attrNameLst>
                                           <p:attrName>style.visibility</p:attrName>
@@ -20364,7 +18945,7 @@
                                       <p:cBhvr>
                                         <p:cTn id="18" dur="500"/>
                                         <p:tgtEl>
-                                          <p:spTgt spid="31"/>
+                                          <p:spTgt spid="29"/>
                                         </p:tgtEl>
                                       </p:cBhvr>
                                     </p:animEffect>
@@ -20385,7 +18966,7 @@
                                           </p:stCondLst>
                                         </p:cTn>
                                         <p:tgtEl>
-                                          <p:spTgt spid="29"/>
+                                          <p:spTgt spid="28"/>
                                         </p:tgtEl>
                                         <p:attrNameLst>
                                           <p:attrName>style.visibility</p:attrName>
@@ -20398,41 +18979,6 @@
                                     <p:animEffect transition="in" filter="fade">
                                       <p:cBhvr>
                                         <p:cTn id="21" dur="500"/>
-                                        <p:tgtEl>
-                                          <p:spTgt spid="29"/>
-                                        </p:tgtEl>
-                                      </p:cBhvr>
-                                    </p:animEffect>
-                                  </p:childTnLst>
-                                </p:cTn>
-                              </p:par>
-                              <p:par>
-                                <p:cTn id="22" presetID="10" presetClass="entr" presetSubtype="0" fill="hold" grpId="0" nodeType="withEffect">
-                                  <p:stCondLst>
-                                    <p:cond delay="0"/>
-                                  </p:stCondLst>
-                                  <p:childTnLst>
-                                    <p:set>
-                                      <p:cBhvr>
-                                        <p:cTn id="23" dur="1" fill="hold">
-                                          <p:stCondLst>
-                                            <p:cond delay="0"/>
-                                          </p:stCondLst>
-                                        </p:cTn>
-                                        <p:tgtEl>
-                                          <p:spTgt spid="28"/>
-                                        </p:tgtEl>
-                                        <p:attrNameLst>
-                                          <p:attrName>style.visibility</p:attrName>
-                                        </p:attrNameLst>
-                                      </p:cBhvr>
-                                      <p:to>
-                                        <p:strVal val="visible"/>
-                                      </p:to>
-                                    </p:set>
-                                    <p:animEffect transition="in" filter="fade">
-                                      <p:cBhvr>
-                                        <p:cTn id="24" dur="500"/>
                                         <p:tgtEl>
                                           <p:spTgt spid="28"/>
                                         </p:tgtEl>
@@ -20473,7 +19019,6 @@
       <p:bldP spid="28" grpId="0"/>
       <p:bldP spid="30" grpId="0"/>
       <p:bldP spid="31" grpId="0"/>
-      <p:bldP spid="32" grpId="0" animBg="1"/>
     </p:bldLst>
   </p:timing>
 </p:sld>
@@ -20717,7 +19262,7 @@
         <p:spPr>
           <a:xfrm>
             <a:off x="768096" y="978407"/>
-            <a:ext cx="2944368" cy="1033273"/>
+            <a:ext cx="3319272" cy="1170904"/>
           </a:xfrm>
           <a:prstGeom prst="roundRect">
             <a:avLst/>
@@ -20756,56 +19301,6 @@
       </p:sp>
       <p:sp>
         <p:nvSpPr>
-          <p:cNvPr id="15" name="Rounded Rectangle 14">
-            <a:extLst>
-              <a:ext uri="{FF2B5EF4-FFF2-40B4-BE49-F238E27FC236}">
-                <a16:creationId xmlns:a16="http://schemas.microsoft.com/office/drawing/2014/main" id="{6C47C347-CB8A-9F29-0380-1CE219F9EB1C}"/>
-              </a:ext>
-            </a:extLst>
-          </p:cNvPr>
-          <p:cNvSpPr/>
-          <p:nvPr/>
-        </p:nvSpPr>
-        <p:spPr>
-          <a:xfrm flipH="1">
-            <a:off x="902503" y="1081696"/>
-            <a:ext cx="78658" cy="844984"/>
-          </a:xfrm>
-          <a:prstGeom prst="roundRect">
-            <a:avLst/>
-          </a:prstGeom>
-          <a:solidFill>
-            <a:srgbClr val="6C43B4"/>
-          </a:solidFill>
-          <a:ln>
-            <a:noFill/>
-          </a:ln>
-        </p:spPr>
-        <p:style>
-          <a:lnRef idx="1">
-            <a:schemeClr val="accent1"/>
-          </a:lnRef>
-          <a:fillRef idx="3">
-            <a:schemeClr val="accent1"/>
-          </a:fillRef>
-          <a:effectRef idx="2">
-            <a:schemeClr val="accent1"/>
-          </a:effectRef>
-          <a:fontRef idx="minor">
-            <a:schemeClr val="lt1"/>
-          </a:fontRef>
-        </p:style>
-        <p:txBody>
-          <a:bodyPr rtlCol="0" anchor="ctr"/>
-          <a:lstStyle/>
-          <a:p>
-            <a:pPr algn="ctr"/>
-            <a:endParaRPr/>
-          </a:p>
-        </p:txBody>
-      </p:sp>
-      <p:sp>
-        <p:nvSpPr>
           <p:cNvPr id="16" name="TextBox 15">
             <a:extLst>
               <a:ext uri="{FF2B5EF4-FFF2-40B4-BE49-F238E27FC236}">
@@ -20912,8 +19407,8 @@
         </p:nvSpPr>
         <p:spPr>
           <a:xfrm>
-            <a:off x="6503560" y="1006814"/>
-            <a:ext cx="5394960" cy="2240280"/>
+            <a:off x="6873872" y="1006814"/>
+            <a:ext cx="5024648" cy="2240280"/>
           </a:xfrm>
           <a:prstGeom prst="roundRect">
             <a:avLst/>
@@ -20952,56 +19447,6 @@
       </p:sp>
       <p:sp>
         <p:nvSpPr>
-          <p:cNvPr id="19" name="Rounded Rectangle 18">
-            <a:extLst>
-              <a:ext uri="{FF2B5EF4-FFF2-40B4-BE49-F238E27FC236}">
-                <a16:creationId xmlns:a16="http://schemas.microsoft.com/office/drawing/2014/main" id="{B811DDA4-E835-FA6C-32C5-A14CF53B0E68}"/>
-              </a:ext>
-            </a:extLst>
-          </p:cNvPr>
-          <p:cNvSpPr/>
-          <p:nvPr/>
-        </p:nvSpPr>
-        <p:spPr>
-          <a:xfrm>
-            <a:off x="6709545" y="1162262"/>
-            <a:ext cx="73152" cy="1929384"/>
-          </a:xfrm>
-          <a:prstGeom prst="roundRect">
-            <a:avLst/>
-          </a:prstGeom>
-          <a:solidFill>
-            <a:srgbClr val="CD475D"/>
-          </a:solidFill>
-          <a:ln>
-            <a:noFill/>
-          </a:ln>
-        </p:spPr>
-        <p:style>
-          <a:lnRef idx="1">
-            <a:schemeClr val="accent1"/>
-          </a:lnRef>
-          <a:fillRef idx="3">
-            <a:schemeClr val="accent1"/>
-          </a:fillRef>
-          <a:effectRef idx="2">
-            <a:schemeClr val="accent1"/>
-          </a:effectRef>
-          <a:fontRef idx="minor">
-            <a:schemeClr val="lt1"/>
-          </a:fontRef>
-        </p:style>
-        <p:txBody>
-          <a:bodyPr rtlCol="0" anchor="ctr"/>
-          <a:lstStyle/>
-          <a:p>
-            <a:pPr algn="ctr"/>
-            <a:endParaRPr/>
-          </a:p>
-        </p:txBody>
-      </p:sp>
-      <p:sp>
-        <p:nvSpPr>
           <p:cNvPr id="20" name="TextBox 19">
             <a:extLst>
               <a:ext uri="{FF2B5EF4-FFF2-40B4-BE49-F238E27FC236}">
@@ -21059,7 +19504,7 @@
         <p:spPr>
           <a:xfrm>
             <a:off x="7148950" y="1626652"/>
-            <a:ext cx="4864608" cy="1463040"/>
+            <a:ext cx="4864608" cy="1015663"/>
           </a:xfrm>
           <a:prstGeom prst="rect">
             <a:avLst/>
@@ -21081,19 +19526,33 @@
               </a:defRPr>
             </a:pPr>
             <a:r>
+              <a:rPr dirty="0"/>
               <a:t>Electronics is the alert category.</a:t>
             </a:r>
-            <a:br/>
-            <a:r>
+            <a:br>
+              <a:rPr dirty="0"/>
+            </a:br>
+            <a:r>
+              <a:rPr dirty="0"/>
               <a:t>Weekly revenue: ₹5,764,693.85</a:t>
             </a:r>
-            <a:br/>
-            <a:r>
+            <a:br>
+              <a:rPr dirty="0"/>
+            </a:br>
+            <a:r>
+              <a:rPr dirty="0"/>
               <a:t>6-month weekly baseline: ₹8,760,740.74</a:t>
             </a:r>
-            <a:br/>
-            <a:r>
-              <a:t>Down by approximately 34.2% versus baseline.</a:t>
+            <a:br>
+              <a:rPr dirty="0"/>
+            </a:br>
+            <a:r>
+              <a:rPr dirty="0"/>
+              <a:t>Down by </a:t>
+            </a:r>
+            <a:r>
+              <a:rPr b="1" dirty="0"/>
+              <a:t>approximately 34.2% versus baseline.</a:t>
             </a:r>
           </a:p>
         </p:txBody>
@@ -21112,8 +19571,8 @@
         </p:nvSpPr>
         <p:spPr>
           <a:xfrm>
-            <a:off x="6591982" y="3471123"/>
-            <a:ext cx="5394960" cy="2240280"/>
+            <a:off x="6755000" y="3495592"/>
+            <a:ext cx="5143520" cy="2240280"/>
           </a:xfrm>
           <a:prstGeom prst="roundRect">
             <a:avLst/>
@@ -21152,56 +19611,6 @@
       </p:sp>
       <p:sp>
         <p:nvSpPr>
-          <p:cNvPr id="23" name="Rounded Rectangle 22">
-            <a:extLst>
-              <a:ext uri="{FF2B5EF4-FFF2-40B4-BE49-F238E27FC236}">
-                <a16:creationId xmlns:a16="http://schemas.microsoft.com/office/drawing/2014/main" id="{DA59A221-A02A-5F41-530B-962563B302A2}"/>
-              </a:ext>
-            </a:extLst>
-          </p:cNvPr>
-          <p:cNvSpPr/>
-          <p:nvPr/>
-        </p:nvSpPr>
-        <p:spPr>
-          <a:xfrm>
-            <a:off x="6738686" y="3630168"/>
-            <a:ext cx="73152" cy="1929384"/>
-          </a:xfrm>
-          <a:prstGeom prst="roundRect">
-            <a:avLst/>
-          </a:prstGeom>
-          <a:solidFill>
-            <a:srgbClr val="E65CA4"/>
-          </a:solidFill>
-          <a:ln>
-            <a:noFill/>
-          </a:ln>
-        </p:spPr>
-        <p:style>
-          <a:lnRef idx="1">
-            <a:schemeClr val="accent1"/>
-          </a:lnRef>
-          <a:fillRef idx="3">
-            <a:schemeClr val="accent1"/>
-          </a:fillRef>
-          <a:effectRef idx="2">
-            <a:schemeClr val="accent1"/>
-          </a:effectRef>
-          <a:fontRef idx="minor">
-            <a:schemeClr val="lt1"/>
-          </a:fontRef>
-        </p:style>
-        <p:txBody>
-          <a:bodyPr rtlCol="0" anchor="ctr"/>
-          <a:lstStyle/>
-          <a:p>
-            <a:pPr algn="ctr"/>
-            <a:endParaRPr/>
-          </a:p>
-        </p:txBody>
-      </p:sp>
-      <p:sp>
-        <p:nvSpPr>
           <p:cNvPr id="24" name="TextBox 23">
             <a:extLst>
               <a:ext uri="{FF2B5EF4-FFF2-40B4-BE49-F238E27FC236}">
@@ -21341,8 +19750,8 @@
         </p:nvSpPr>
         <p:spPr>
           <a:xfrm>
-            <a:off x="264339" y="2422177"/>
-            <a:ext cx="6147339" cy="3978623"/>
+            <a:off x="226631" y="2233640"/>
+            <a:ext cx="6425609" cy="4138880"/>
           </a:xfrm>
           <a:prstGeom prst="roundRect">
             <a:avLst/>
@@ -21393,8 +19802,8 @@
         </p:nvSpPr>
         <p:spPr>
           <a:xfrm>
-            <a:off x="395968" y="2806226"/>
-            <a:ext cx="6076700" cy="3570208"/>
+            <a:off x="358260" y="2617689"/>
+            <a:ext cx="6281702" cy="3570208"/>
           </a:xfrm>
           <a:prstGeom prst="rect">
             <a:avLst/>
@@ -21642,7 +20051,7 @@
                                           </p:stCondLst>
                                         </p:cTn>
                                         <p:tgtEl>
-                                          <p:spTgt spid="15"/>
+                                          <p:spTgt spid="16"/>
                                         </p:tgtEl>
                                         <p:attrNameLst>
                                           <p:attrName>style.visibility</p:attrName>
@@ -21656,7 +20065,7 @@
                                       <p:cBhvr>
                                         <p:cTn id="10" dur="500"/>
                                         <p:tgtEl>
-                                          <p:spTgt spid="15"/>
+                                          <p:spTgt spid="16"/>
                                         </p:tgtEl>
                                       </p:cBhvr>
                                     </p:animEffect>
@@ -21677,7 +20086,7 @@
                                           </p:stCondLst>
                                         </p:cTn>
                                         <p:tgtEl>
-                                          <p:spTgt spid="16"/>
+                                          <p:spTgt spid="17"/>
                                         </p:tgtEl>
                                         <p:attrNameLst>
                                           <p:attrName>style.visibility</p:attrName>
@@ -21691,7 +20100,7 @@
                                       <p:cBhvr>
                                         <p:cTn id="13" dur="500"/>
                                         <p:tgtEl>
-                                          <p:spTgt spid="16"/>
+                                          <p:spTgt spid="17"/>
                                         </p:tgtEl>
                                       </p:cBhvr>
                                     </p:animEffect>
@@ -21712,7 +20121,7 @@
                                           </p:stCondLst>
                                         </p:cTn>
                                         <p:tgtEl>
-                                          <p:spTgt spid="17"/>
+                                          <p:spTgt spid="18"/>
                                         </p:tgtEl>
                                         <p:attrNameLst>
                                           <p:attrName>style.visibility</p:attrName>
@@ -21726,7 +20135,7 @@
                                       <p:cBhvr>
                                         <p:cTn id="16" dur="500"/>
                                         <p:tgtEl>
-                                          <p:spTgt spid="17"/>
+                                          <p:spTgt spid="18"/>
                                         </p:tgtEl>
                                       </p:cBhvr>
                                     </p:animEffect>
@@ -21747,7 +20156,7 @@
                                           </p:stCondLst>
                                         </p:cTn>
                                         <p:tgtEl>
-                                          <p:spTgt spid="18"/>
+                                          <p:spTgt spid="20"/>
                                         </p:tgtEl>
                                         <p:attrNameLst>
                                           <p:attrName>style.visibility</p:attrName>
@@ -21761,7 +20170,7 @@
                                       <p:cBhvr>
                                         <p:cTn id="19" dur="500"/>
                                         <p:tgtEl>
-                                          <p:spTgt spid="18"/>
+                                          <p:spTgt spid="20"/>
                                         </p:tgtEl>
                                       </p:cBhvr>
                                     </p:animEffect>
@@ -21782,7 +20191,7 @@
                                           </p:stCondLst>
                                         </p:cTn>
                                         <p:tgtEl>
-                                          <p:spTgt spid="19"/>
+                                          <p:spTgt spid="21"/>
                                         </p:tgtEl>
                                         <p:attrNameLst>
                                           <p:attrName>style.visibility</p:attrName>
@@ -21796,7 +20205,7 @@
                                       <p:cBhvr>
                                         <p:cTn id="22" dur="500"/>
                                         <p:tgtEl>
-                                          <p:spTgt spid="19"/>
+                                          <p:spTgt spid="21"/>
                                         </p:tgtEl>
                                       </p:cBhvr>
                                     </p:animEffect>
@@ -21817,7 +20226,7 @@
                                           </p:stCondLst>
                                         </p:cTn>
                                         <p:tgtEl>
-                                          <p:spTgt spid="20"/>
+                                          <p:spTgt spid="22"/>
                                         </p:tgtEl>
                                         <p:attrNameLst>
                                           <p:attrName>style.visibility</p:attrName>
@@ -21831,7 +20240,7 @@
                                       <p:cBhvr>
                                         <p:cTn id="25" dur="500"/>
                                         <p:tgtEl>
-                                          <p:spTgt spid="20"/>
+                                          <p:spTgt spid="22"/>
                                         </p:tgtEl>
                                       </p:cBhvr>
                                     </p:animEffect>
@@ -21852,7 +20261,7 @@
                                           </p:stCondLst>
                                         </p:cTn>
                                         <p:tgtEl>
-                                          <p:spTgt spid="21"/>
+                                          <p:spTgt spid="24"/>
                                         </p:tgtEl>
                                         <p:attrNameLst>
                                           <p:attrName>style.visibility</p:attrName>
@@ -21866,7 +20275,7 @@
                                       <p:cBhvr>
                                         <p:cTn id="28" dur="500"/>
                                         <p:tgtEl>
-                                          <p:spTgt spid="21"/>
+                                          <p:spTgt spid="24"/>
                                         </p:tgtEl>
                                       </p:cBhvr>
                                     </p:animEffect>
@@ -21887,7 +20296,7 @@
                                           </p:stCondLst>
                                         </p:cTn>
                                         <p:tgtEl>
-                                          <p:spTgt spid="22"/>
+                                          <p:spTgt spid="25"/>
                                         </p:tgtEl>
                                         <p:attrNameLst>
                                           <p:attrName>style.visibility</p:attrName>
@@ -21901,7 +20310,7 @@
                                       <p:cBhvr>
                                         <p:cTn id="31" dur="500"/>
                                         <p:tgtEl>
-                                          <p:spTgt spid="22"/>
+                                          <p:spTgt spid="25"/>
                                         </p:tgtEl>
                                       </p:cBhvr>
                                     </p:animEffect>
@@ -21922,7 +20331,7 @@
                                           </p:stCondLst>
                                         </p:cTn>
                                         <p:tgtEl>
-                                          <p:spTgt spid="23"/>
+                                          <p:spTgt spid="26"/>
                                         </p:tgtEl>
                                         <p:attrNameLst>
                                           <p:attrName>style.visibility</p:attrName>
@@ -21936,7 +20345,7 @@
                                       <p:cBhvr>
                                         <p:cTn id="34" dur="500"/>
                                         <p:tgtEl>
-                                          <p:spTgt spid="23"/>
+                                          <p:spTgt spid="26"/>
                                         </p:tgtEl>
                                       </p:cBhvr>
                                     </p:animEffect>
@@ -21957,7 +20366,7 @@
                                           </p:stCondLst>
                                         </p:cTn>
                                         <p:tgtEl>
-                                          <p:spTgt spid="24"/>
+                                          <p:spTgt spid="27"/>
                                         </p:tgtEl>
                                         <p:attrNameLst>
                                           <p:attrName>style.visibility</p:attrName>
@@ -21971,7 +20380,7 @@
                                       <p:cBhvr>
                                         <p:cTn id="37" dur="500"/>
                                         <p:tgtEl>
-                                          <p:spTgt spid="24"/>
+                                          <p:spTgt spid="27"/>
                                         </p:tgtEl>
                                       </p:cBhvr>
                                     </p:animEffect>
@@ -21992,7 +20401,7 @@
                                           </p:stCondLst>
                                         </p:cTn>
                                         <p:tgtEl>
-                                          <p:spTgt spid="25"/>
+                                          <p:spTgt spid="29"/>
                                         </p:tgtEl>
                                         <p:attrNameLst>
                                           <p:attrName>style.visibility</p:attrName>
@@ -22005,111 +20414,6 @@
                                     <p:animEffect transition="in" filter="fade">
                                       <p:cBhvr>
                                         <p:cTn id="40" dur="500"/>
-                                        <p:tgtEl>
-                                          <p:spTgt spid="25"/>
-                                        </p:tgtEl>
-                                      </p:cBhvr>
-                                    </p:animEffect>
-                                  </p:childTnLst>
-                                </p:cTn>
-                              </p:par>
-                              <p:par>
-                                <p:cTn id="41" presetID="10" presetClass="entr" presetSubtype="0" fill="hold" grpId="0" nodeType="withEffect">
-                                  <p:stCondLst>
-                                    <p:cond delay="0"/>
-                                  </p:stCondLst>
-                                  <p:childTnLst>
-                                    <p:set>
-                                      <p:cBhvr>
-                                        <p:cTn id="42" dur="1" fill="hold">
-                                          <p:stCondLst>
-                                            <p:cond delay="0"/>
-                                          </p:stCondLst>
-                                        </p:cTn>
-                                        <p:tgtEl>
-                                          <p:spTgt spid="26"/>
-                                        </p:tgtEl>
-                                        <p:attrNameLst>
-                                          <p:attrName>style.visibility</p:attrName>
-                                        </p:attrNameLst>
-                                      </p:cBhvr>
-                                      <p:to>
-                                        <p:strVal val="visible"/>
-                                      </p:to>
-                                    </p:set>
-                                    <p:animEffect transition="in" filter="fade">
-                                      <p:cBhvr>
-                                        <p:cTn id="43" dur="500"/>
-                                        <p:tgtEl>
-                                          <p:spTgt spid="26"/>
-                                        </p:tgtEl>
-                                      </p:cBhvr>
-                                    </p:animEffect>
-                                  </p:childTnLst>
-                                </p:cTn>
-                              </p:par>
-                              <p:par>
-                                <p:cTn id="44" presetID="10" presetClass="entr" presetSubtype="0" fill="hold" grpId="0" nodeType="withEffect">
-                                  <p:stCondLst>
-                                    <p:cond delay="0"/>
-                                  </p:stCondLst>
-                                  <p:childTnLst>
-                                    <p:set>
-                                      <p:cBhvr>
-                                        <p:cTn id="45" dur="1" fill="hold">
-                                          <p:stCondLst>
-                                            <p:cond delay="0"/>
-                                          </p:stCondLst>
-                                        </p:cTn>
-                                        <p:tgtEl>
-                                          <p:spTgt spid="27"/>
-                                        </p:tgtEl>
-                                        <p:attrNameLst>
-                                          <p:attrName>style.visibility</p:attrName>
-                                        </p:attrNameLst>
-                                      </p:cBhvr>
-                                      <p:to>
-                                        <p:strVal val="visible"/>
-                                      </p:to>
-                                    </p:set>
-                                    <p:animEffect transition="in" filter="fade">
-                                      <p:cBhvr>
-                                        <p:cTn id="46" dur="500"/>
-                                        <p:tgtEl>
-                                          <p:spTgt spid="27"/>
-                                        </p:tgtEl>
-                                      </p:cBhvr>
-                                    </p:animEffect>
-                                  </p:childTnLst>
-                                </p:cTn>
-                              </p:par>
-                              <p:par>
-                                <p:cTn id="47" presetID="10" presetClass="entr" presetSubtype="0" fill="hold" grpId="0" nodeType="withEffect">
-                                  <p:stCondLst>
-                                    <p:cond delay="0"/>
-                                  </p:stCondLst>
-                                  <p:childTnLst>
-                                    <p:set>
-                                      <p:cBhvr>
-                                        <p:cTn id="48" dur="1" fill="hold">
-                                          <p:stCondLst>
-                                            <p:cond delay="0"/>
-                                          </p:stCondLst>
-                                        </p:cTn>
-                                        <p:tgtEl>
-                                          <p:spTgt spid="29"/>
-                                        </p:tgtEl>
-                                        <p:attrNameLst>
-                                          <p:attrName>style.visibility</p:attrName>
-                                        </p:attrNameLst>
-                                      </p:cBhvr>
-                                      <p:to>
-                                        <p:strVal val="visible"/>
-                                      </p:to>
-                                    </p:set>
-                                    <p:animEffect transition="in" filter="fade">
-                                      <p:cBhvr>
-                                        <p:cTn id="49" dur="500"/>
                                         <p:tgtEl>
                                           <p:spTgt spid="29"/>
                                         </p:tgtEl>
@@ -22147,15 +20451,12 @@
     </p:tnLst>
     <p:bldLst>
       <p:bldP spid="14" grpId="0" animBg="1"/>
-      <p:bldP spid="15" grpId="0" animBg="1"/>
       <p:bldP spid="16" grpId="0"/>
       <p:bldP spid="17" grpId="0"/>
       <p:bldP spid="18" grpId="0" animBg="1"/>
-      <p:bldP spid="19" grpId="0" animBg="1"/>
       <p:bldP spid="20" grpId="0"/>
       <p:bldP spid="21" grpId="0"/>
       <p:bldP spid="22" grpId="0" animBg="1"/>
-      <p:bldP spid="23" grpId="0" animBg="1"/>
       <p:bldP spid="24" grpId="0"/>
       <p:bldP spid="25" grpId="0"/>
       <p:bldP spid="26" grpId="0"/>
@@ -22407,50 +20708,6 @@
       </p:sp>
       <p:sp>
         <p:nvSpPr>
-          <p:cNvPr id="7" name="Rounded Rectangle 6"/>
-          <p:cNvSpPr/>
-          <p:nvPr/>
-        </p:nvSpPr>
-        <p:spPr>
-          <a:xfrm>
-            <a:off x="804672" y="1609344"/>
-            <a:ext cx="45720" cy="3291840"/>
-          </a:xfrm>
-          <a:prstGeom prst="roundRect">
-            <a:avLst/>
-          </a:prstGeom>
-          <a:solidFill>
-            <a:srgbClr val="6C43B4"/>
-          </a:solidFill>
-          <a:ln>
-            <a:noFill/>
-          </a:ln>
-        </p:spPr>
-        <p:style>
-          <a:lnRef idx="1">
-            <a:schemeClr val="accent1"/>
-          </a:lnRef>
-          <a:fillRef idx="3">
-            <a:schemeClr val="accent1"/>
-          </a:fillRef>
-          <a:effectRef idx="2">
-            <a:schemeClr val="accent1"/>
-          </a:effectRef>
-          <a:fontRef idx="minor">
-            <a:schemeClr val="lt1"/>
-          </a:fontRef>
-        </p:style>
-        <p:txBody>
-          <a:bodyPr rtlCol="0" anchor="ctr"/>
-          <a:lstStyle/>
-          <a:p>
-            <a:pPr algn="ctr"/>
-            <a:endParaRPr/>
-          </a:p>
-        </p:txBody>
-      </p:sp>
-      <p:sp>
-        <p:nvSpPr>
           <p:cNvPr id="8" name="TextBox 7"/>
           <p:cNvSpPr txBox="1"/>
           <p:nvPr/>
@@ -22493,8 +20750,8 @@
         </p:nvSpPr>
         <p:spPr>
           <a:xfrm>
-            <a:off x="987552" y="1764792"/>
-            <a:ext cx="10442448" cy="3749040"/>
+            <a:off x="1124712" y="1709928"/>
+            <a:ext cx="10442448" cy="2893100"/>
           </a:xfrm>
           <a:prstGeom prst="rect">
             <a:avLst/>
@@ -22516,36 +20773,71 @@
               </a:defRPr>
             </a:pPr>
             <a:r>
+              <a:rPr dirty="0"/>
               <a:t>Period: 2026-06-24 to 2026-06-30</a:t>
             </a:r>
-            <a:br/>
-            <a:br/>
-            <a:r>
+            <a:br>
+              <a:rPr dirty="0"/>
+            </a:br>
+            <a:br>
+              <a:rPr dirty="0"/>
+            </a:br>
+            <a:r>
+              <a:rPr dirty="0"/>
               <a:t>Records processed: 4,291</a:t>
             </a:r>
-            <a:br/>
-            <a:br/>
-            <a:r>
+            <a:br>
+              <a:rPr dirty="0"/>
+            </a:br>
+            <a:br>
+              <a:rPr dirty="0"/>
+            </a:br>
+            <a:r>
+              <a:rPr dirty="0"/>
               <a:t>Top store this week: S03 — Guntur (₹2,037,560.19)</a:t>
             </a:r>
-            <a:br/>
-            <a:br/>
-            <a:r>
+            <a:br>
+              <a:rPr dirty="0"/>
+            </a:br>
+            <a:br>
+              <a:rPr dirty="0"/>
+            </a:br>
+            <a:r>
+              <a:rPr dirty="0"/>
               <a:t>Bottom store this week: S10 — Nellore (₹627,119.87)</a:t>
             </a:r>
-            <a:br/>
-            <a:br/>
-            <a:r>
-              <a:t>Category alert: Electronics revenue down approximately 34.2% vs 6-month baseline</a:t>
-            </a:r>
-            <a:br/>
-            <a:br/>
-            <a:r>
+            <a:br>
+              <a:rPr dirty="0"/>
+            </a:br>
+            <a:br>
+              <a:rPr dirty="0"/>
+            </a:br>
+            <a:r>
+              <a:rPr dirty="0"/>
+              <a:t>Category alert: </a:t>
+            </a:r>
+            <a:r>
+              <a:rPr b="1" dirty="0"/>
+              <a:t>Electronics revenue down approximately 34.2% vs 6-month baseline</a:t>
+            </a:r>
+            <a:br>
+              <a:rPr dirty="0"/>
+            </a:br>
+            <a:br>
+              <a:rPr dirty="0"/>
+            </a:br>
+            <a:r>
+              <a:rPr dirty="0"/>
               <a:t>No alert: Apparel, Grocery, Home &amp; Kitchen, Personal Care</a:t>
             </a:r>
-            <a:br/>
-            <a:br/>
-            <a:r>
+            <a:br>
+              <a:rPr dirty="0"/>
+            </a:br>
+            <a:br>
+              <a:rPr dirty="0"/>
+            </a:br>
+            <a:r>
+              <a:rPr dirty="0"/>
               <a:t>Pipeline status: COMPLETED SUCCESSFULLY</a:t>
             </a:r>
           </a:p>
@@ -22660,7 +20952,7 @@
                                           </p:stCondLst>
                                         </p:cTn>
                                         <p:tgtEl>
-                                          <p:spTgt spid="7"/>
+                                          <p:spTgt spid="8"/>
                                         </p:tgtEl>
                                         <p:attrNameLst>
                                           <p:attrName>style.visibility</p:attrName>
@@ -22673,41 +20965,6 @@
                                     <p:animEffect transition="in" filter="fade">
                                       <p:cBhvr>
                                         <p:cTn id="13" dur="500"/>
-                                        <p:tgtEl>
-                                          <p:spTgt spid="7"/>
-                                        </p:tgtEl>
-                                      </p:cBhvr>
-                                    </p:animEffect>
-                                  </p:childTnLst>
-                                </p:cTn>
-                              </p:par>
-                              <p:par>
-                                <p:cTn id="14" presetID="10" presetClass="entr" presetSubtype="0" fill="hold" grpId="0" nodeType="withEffect">
-                                  <p:stCondLst>
-                                    <p:cond delay="0"/>
-                                  </p:stCondLst>
-                                  <p:childTnLst>
-                                    <p:set>
-                                      <p:cBhvr>
-                                        <p:cTn id="15" dur="1" fill="hold">
-                                          <p:stCondLst>
-                                            <p:cond delay="0"/>
-                                          </p:stCondLst>
-                                        </p:cTn>
-                                        <p:tgtEl>
-                                          <p:spTgt spid="8"/>
-                                        </p:tgtEl>
-                                        <p:attrNameLst>
-                                          <p:attrName>style.visibility</p:attrName>
-                                        </p:attrNameLst>
-                                      </p:cBhvr>
-                                      <p:to>
-                                        <p:strVal val="visible"/>
-                                      </p:to>
-                                    </p:set>
-                                    <p:animEffect transition="in" filter="fade">
-                                      <p:cBhvr>
-                                        <p:cTn id="16" dur="500"/>
                                         <p:tgtEl>
                                           <p:spTgt spid="8"/>
                                         </p:tgtEl>
@@ -22745,7 +21002,6 @@
     </p:tnLst>
     <p:bldLst>
       <p:bldP spid="6" grpId="0" animBg="1"/>
-      <p:bldP spid="7" grpId="0" animBg="1"/>
       <p:bldP spid="8" grpId="0"/>
       <p:bldP spid="9" grpId="0"/>
     </p:bldLst>
@@ -22994,50 +21250,6 @@
       </p:sp>
       <p:sp>
         <p:nvSpPr>
-          <p:cNvPr id="7" name="Rounded Rectangle 6"/>
-          <p:cNvSpPr/>
-          <p:nvPr/>
-        </p:nvSpPr>
-        <p:spPr>
-          <a:xfrm>
-            <a:off x="960120" y="1481328"/>
-            <a:ext cx="73152" cy="2660904"/>
-          </a:xfrm>
-          <a:prstGeom prst="roundRect">
-            <a:avLst/>
-          </a:prstGeom>
-          <a:solidFill>
-            <a:srgbClr val="E65CA4"/>
-          </a:solidFill>
-          <a:ln>
-            <a:noFill/>
-          </a:ln>
-        </p:spPr>
-        <p:style>
-          <a:lnRef idx="1">
-            <a:schemeClr val="accent1"/>
-          </a:lnRef>
-          <a:fillRef idx="3">
-            <a:schemeClr val="accent1"/>
-          </a:fillRef>
-          <a:effectRef idx="2">
-            <a:schemeClr val="accent1"/>
-          </a:effectRef>
-          <a:fontRef idx="minor">
-            <a:schemeClr val="lt1"/>
-          </a:fontRef>
-        </p:style>
-        <p:txBody>
-          <a:bodyPr rtlCol="0" anchor="ctr"/>
-          <a:lstStyle/>
-          <a:p>
-            <a:pPr algn="ctr"/>
-            <a:endParaRPr/>
-          </a:p>
-        </p:txBody>
-      </p:sp>
-      <p:sp>
-        <p:nvSpPr>
           <p:cNvPr id="8" name="TextBox 7"/>
           <p:cNvSpPr txBox="1"/>
           <p:nvPr/>
@@ -23159,50 +21371,6 @@
       </p:sp>
       <p:sp>
         <p:nvSpPr>
-          <p:cNvPr id="11" name="Rounded Rectangle 10"/>
-          <p:cNvSpPr/>
-          <p:nvPr/>
-        </p:nvSpPr>
-        <p:spPr>
-          <a:xfrm>
-            <a:off x="960120" y="4773168"/>
-            <a:ext cx="73152" cy="832103"/>
-          </a:xfrm>
-          <a:prstGeom prst="roundRect">
-            <a:avLst/>
-          </a:prstGeom>
-          <a:solidFill>
-            <a:srgbClr val="6C43B4"/>
-          </a:solidFill>
-          <a:ln>
-            <a:noFill/>
-          </a:ln>
-        </p:spPr>
-        <p:style>
-          <a:lnRef idx="1">
-            <a:schemeClr val="accent1"/>
-          </a:lnRef>
-          <a:fillRef idx="3">
-            <a:schemeClr val="accent1"/>
-          </a:fillRef>
-          <a:effectRef idx="2">
-            <a:schemeClr val="accent1"/>
-          </a:effectRef>
-          <a:fontRef idx="minor">
-            <a:schemeClr val="lt1"/>
-          </a:fontRef>
-        </p:style>
-        <p:txBody>
-          <a:bodyPr rtlCol="0" anchor="ctr"/>
-          <a:lstStyle/>
-          <a:p>
-            <a:pPr algn="ctr"/>
-            <a:endParaRPr/>
-          </a:p>
-        </p:txBody>
-      </p:sp>
-      <p:sp>
-        <p:nvSpPr>
           <p:cNvPr id="12" name="TextBox 11"/>
           <p:cNvSpPr txBox="1"/>
           <p:nvPr/>
@@ -23321,50 +21489,6 @@
       </p:sp>
       <p:sp>
         <p:nvSpPr>
-          <p:cNvPr id="15" name="Rounded Rectangle 14"/>
-          <p:cNvSpPr/>
-          <p:nvPr/>
-        </p:nvSpPr>
-        <p:spPr>
-          <a:xfrm>
-            <a:off x="4617720" y="4773168"/>
-            <a:ext cx="73152" cy="832103"/>
-          </a:xfrm>
-          <a:prstGeom prst="roundRect">
-            <a:avLst/>
-          </a:prstGeom>
-          <a:solidFill>
-            <a:srgbClr val="E65CA4"/>
-          </a:solidFill>
-          <a:ln>
-            <a:noFill/>
-          </a:ln>
-        </p:spPr>
-        <p:style>
-          <a:lnRef idx="1">
-            <a:schemeClr val="accent1"/>
-          </a:lnRef>
-          <a:fillRef idx="3">
-            <a:schemeClr val="accent1"/>
-          </a:fillRef>
-          <a:effectRef idx="2">
-            <a:schemeClr val="accent1"/>
-          </a:effectRef>
-          <a:fontRef idx="minor">
-            <a:schemeClr val="lt1"/>
-          </a:fontRef>
-        </p:style>
-        <p:txBody>
-          <a:bodyPr rtlCol="0" anchor="ctr"/>
-          <a:lstStyle/>
-          <a:p>
-            <a:pPr algn="ctr"/>
-            <a:endParaRPr/>
-          </a:p>
-        </p:txBody>
-      </p:sp>
-      <p:sp>
-        <p:nvSpPr>
           <p:cNvPr id="16" name="TextBox 15"/>
           <p:cNvSpPr txBox="1"/>
           <p:nvPr/>
@@ -23456,50 +21580,6 @@
             <a:solidFill>
               <a:srgbClr val="E8DFF0"/>
             </a:solidFill>
-          </a:ln>
-        </p:spPr>
-        <p:style>
-          <a:lnRef idx="1">
-            <a:schemeClr val="accent1"/>
-          </a:lnRef>
-          <a:fillRef idx="3">
-            <a:schemeClr val="accent1"/>
-          </a:fillRef>
-          <a:effectRef idx="2">
-            <a:schemeClr val="accent1"/>
-          </a:effectRef>
-          <a:fontRef idx="minor">
-            <a:schemeClr val="lt1"/>
-          </a:fontRef>
-        </p:style>
-        <p:txBody>
-          <a:bodyPr rtlCol="0" anchor="ctr"/>
-          <a:lstStyle/>
-          <a:p>
-            <a:pPr algn="ctr"/>
-            <a:endParaRPr/>
-          </a:p>
-        </p:txBody>
-      </p:sp>
-      <p:sp>
-        <p:nvSpPr>
-          <p:cNvPr id="19" name="Rounded Rectangle 18"/>
-          <p:cNvSpPr/>
-          <p:nvPr/>
-        </p:nvSpPr>
-        <p:spPr>
-          <a:xfrm>
-            <a:off x="8275320" y="4773168"/>
-            <a:ext cx="73152" cy="832103"/>
-          </a:xfrm>
-          <a:prstGeom prst="roundRect">
-            <a:avLst/>
-          </a:prstGeom>
-          <a:solidFill>
-            <a:srgbClr val="6C43B4"/>
-          </a:solidFill>
-          <a:ln>
-            <a:noFill/>
           </a:ln>
         </p:spPr>
         <p:style>
@@ -23671,7 +21751,7 @@
                                           </p:stCondLst>
                                         </p:cTn>
                                         <p:tgtEl>
-                                          <p:spTgt spid="7"/>
+                                          <p:spTgt spid="8"/>
                                         </p:tgtEl>
                                         <p:attrNameLst>
                                           <p:attrName>style.visibility</p:attrName>
@@ -23685,7 +21765,7 @@
                                       <p:cBhvr>
                                         <p:cTn id="10" dur="500"/>
                                         <p:tgtEl>
-                                          <p:spTgt spid="7"/>
+                                          <p:spTgt spid="8"/>
                                         </p:tgtEl>
                                       </p:cBhvr>
                                     </p:animEffect>
@@ -23706,7 +21786,7 @@
                                           </p:stCondLst>
                                         </p:cTn>
                                         <p:tgtEl>
-                                          <p:spTgt spid="8"/>
+                                          <p:spTgt spid="9"/>
                                         </p:tgtEl>
                                         <p:attrNameLst>
                                           <p:attrName>style.visibility</p:attrName>
@@ -23720,7 +21800,7 @@
                                       <p:cBhvr>
                                         <p:cTn id="13" dur="500"/>
                                         <p:tgtEl>
-                                          <p:spTgt spid="8"/>
+                                          <p:spTgt spid="9"/>
                                         </p:tgtEl>
                                       </p:cBhvr>
                                     </p:animEffect>
@@ -23741,7 +21821,7 @@
                                           </p:stCondLst>
                                         </p:cTn>
                                         <p:tgtEl>
-                                          <p:spTgt spid="9"/>
+                                          <p:spTgt spid="10"/>
                                         </p:tgtEl>
                                         <p:attrNameLst>
                                           <p:attrName>style.visibility</p:attrName>
@@ -23755,7 +21835,7 @@
                                       <p:cBhvr>
                                         <p:cTn id="16" dur="500"/>
                                         <p:tgtEl>
-                                          <p:spTgt spid="9"/>
+                                          <p:spTgt spid="10"/>
                                         </p:tgtEl>
                                       </p:cBhvr>
                                     </p:animEffect>
@@ -23776,7 +21856,7 @@
                                           </p:stCondLst>
                                         </p:cTn>
                                         <p:tgtEl>
-                                          <p:spTgt spid="10"/>
+                                          <p:spTgt spid="12"/>
                                         </p:tgtEl>
                                         <p:attrNameLst>
                                           <p:attrName>style.visibility</p:attrName>
@@ -23790,7 +21870,7 @@
                                       <p:cBhvr>
                                         <p:cTn id="19" dur="500"/>
                                         <p:tgtEl>
-                                          <p:spTgt spid="10"/>
+                                          <p:spTgt spid="12"/>
                                         </p:tgtEl>
                                       </p:cBhvr>
                                     </p:animEffect>
@@ -23811,7 +21891,7 @@
                                           </p:stCondLst>
                                         </p:cTn>
                                         <p:tgtEl>
-                                          <p:spTgt spid="11"/>
+                                          <p:spTgt spid="13"/>
                                         </p:tgtEl>
                                         <p:attrNameLst>
                                           <p:attrName>style.visibility</p:attrName>
@@ -23825,7 +21905,7 @@
                                       <p:cBhvr>
                                         <p:cTn id="22" dur="500"/>
                                         <p:tgtEl>
-                                          <p:spTgt spid="11"/>
+                                          <p:spTgt spid="13"/>
                                         </p:tgtEl>
                                       </p:cBhvr>
                                     </p:animEffect>
@@ -23846,7 +21926,7 @@
                                           </p:stCondLst>
                                         </p:cTn>
                                         <p:tgtEl>
-                                          <p:spTgt spid="12"/>
+                                          <p:spTgt spid="14"/>
                                         </p:tgtEl>
                                         <p:attrNameLst>
                                           <p:attrName>style.visibility</p:attrName>
@@ -23860,7 +21940,7 @@
                                       <p:cBhvr>
                                         <p:cTn id="25" dur="500"/>
                                         <p:tgtEl>
-                                          <p:spTgt spid="12"/>
+                                          <p:spTgt spid="14"/>
                                         </p:tgtEl>
                                       </p:cBhvr>
                                     </p:animEffect>
@@ -23881,7 +21961,7 @@
                                           </p:stCondLst>
                                         </p:cTn>
                                         <p:tgtEl>
-                                          <p:spTgt spid="13"/>
+                                          <p:spTgt spid="16"/>
                                         </p:tgtEl>
                                         <p:attrNameLst>
                                           <p:attrName>style.visibility</p:attrName>
@@ -23895,7 +21975,7 @@
                                       <p:cBhvr>
                                         <p:cTn id="28" dur="500"/>
                                         <p:tgtEl>
-                                          <p:spTgt spid="13"/>
+                                          <p:spTgt spid="16"/>
                                         </p:tgtEl>
                                       </p:cBhvr>
                                     </p:animEffect>
@@ -23916,7 +21996,7 @@
                                           </p:stCondLst>
                                         </p:cTn>
                                         <p:tgtEl>
-                                          <p:spTgt spid="14"/>
+                                          <p:spTgt spid="17"/>
                                         </p:tgtEl>
                                         <p:attrNameLst>
                                           <p:attrName>style.visibility</p:attrName>
@@ -23930,7 +22010,7 @@
                                       <p:cBhvr>
                                         <p:cTn id="31" dur="500"/>
                                         <p:tgtEl>
-                                          <p:spTgt spid="14"/>
+                                          <p:spTgt spid="17"/>
                                         </p:tgtEl>
                                       </p:cBhvr>
                                     </p:animEffect>
@@ -23951,7 +22031,7 @@
                                           </p:stCondLst>
                                         </p:cTn>
                                         <p:tgtEl>
-                                          <p:spTgt spid="15"/>
+                                          <p:spTgt spid="18"/>
                                         </p:tgtEl>
                                         <p:attrNameLst>
                                           <p:attrName>style.visibility</p:attrName>
@@ -23965,7 +22045,7 @@
                                       <p:cBhvr>
                                         <p:cTn id="34" dur="500"/>
                                         <p:tgtEl>
-                                          <p:spTgt spid="15"/>
+                                          <p:spTgt spid="18"/>
                                         </p:tgtEl>
                                       </p:cBhvr>
                                     </p:animEffect>
@@ -23986,7 +22066,7 @@
                                           </p:stCondLst>
                                         </p:cTn>
                                         <p:tgtEl>
-                                          <p:spTgt spid="16"/>
+                                          <p:spTgt spid="20"/>
                                         </p:tgtEl>
                                         <p:attrNameLst>
                                           <p:attrName>style.visibility</p:attrName>
@@ -24000,7 +22080,7 @@
                                       <p:cBhvr>
                                         <p:cTn id="37" dur="500"/>
                                         <p:tgtEl>
-                                          <p:spTgt spid="16"/>
+                                          <p:spTgt spid="20"/>
                                         </p:tgtEl>
                                       </p:cBhvr>
                                     </p:animEffect>
@@ -24021,7 +22101,7 @@
                                           </p:stCondLst>
                                         </p:cTn>
                                         <p:tgtEl>
-                                          <p:spTgt spid="17"/>
+                                          <p:spTgt spid="21"/>
                                         </p:tgtEl>
                                         <p:attrNameLst>
                                           <p:attrName>style.visibility</p:attrName>
@@ -24034,146 +22114,6 @@
                                     <p:animEffect transition="in" filter="fade">
                                       <p:cBhvr>
                                         <p:cTn id="40" dur="500"/>
-                                        <p:tgtEl>
-                                          <p:spTgt spid="17"/>
-                                        </p:tgtEl>
-                                      </p:cBhvr>
-                                    </p:animEffect>
-                                  </p:childTnLst>
-                                </p:cTn>
-                              </p:par>
-                              <p:par>
-                                <p:cTn id="41" presetID="10" presetClass="entr" presetSubtype="0" fill="hold" grpId="0" nodeType="withEffect">
-                                  <p:stCondLst>
-                                    <p:cond delay="0"/>
-                                  </p:stCondLst>
-                                  <p:childTnLst>
-                                    <p:set>
-                                      <p:cBhvr>
-                                        <p:cTn id="42" dur="1" fill="hold">
-                                          <p:stCondLst>
-                                            <p:cond delay="0"/>
-                                          </p:stCondLst>
-                                        </p:cTn>
-                                        <p:tgtEl>
-                                          <p:spTgt spid="18"/>
-                                        </p:tgtEl>
-                                        <p:attrNameLst>
-                                          <p:attrName>style.visibility</p:attrName>
-                                        </p:attrNameLst>
-                                      </p:cBhvr>
-                                      <p:to>
-                                        <p:strVal val="visible"/>
-                                      </p:to>
-                                    </p:set>
-                                    <p:animEffect transition="in" filter="fade">
-                                      <p:cBhvr>
-                                        <p:cTn id="43" dur="500"/>
-                                        <p:tgtEl>
-                                          <p:spTgt spid="18"/>
-                                        </p:tgtEl>
-                                      </p:cBhvr>
-                                    </p:animEffect>
-                                  </p:childTnLst>
-                                </p:cTn>
-                              </p:par>
-                              <p:par>
-                                <p:cTn id="44" presetID="10" presetClass="entr" presetSubtype="0" fill="hold" grpId="0" nodeType="withEffect">
-                                  <p:stCondLst>
-                                    <p:cond delay="0"/>
-                                  </p:stCondLst>
-                                  <p:childTnLst>
-                                    <p:set>
-                                      <p:cBhvr>
-                                        <p:cTn id="45" dur="1" fill="hold">
-                                          <p:stCondLst>
-                                            <p:cond delay="0"/>
-                                          </p:stCondLst>
-                                        </p:cTn>
-                                        <p:tgtEl>
-                                          <p:spTgt spid="19"/>
-                                        </p:tgtEl>
-                                        <p:attrNameLst>
-                                          <p:attrName>style.visibility</p:attrName>
-                                        </p:attrNameLst>
-                                      </p:cBhvr>
-                                      <p:to>
-                                        <p:strVal val="visible"/>
-                                      </p:to>
-                                    </p:set>
-                                    <p:animEffect transition="in" filter="fade">
-                                      <p:cBhvr>
-                                        <p:cTn id="46" dur="500"/>
-                                        <p:tgtEl>
-                                          <p:spTgt spid="19"/>
-                                        </p:tgtEl>
-                                      </p:cBhvr>
-                                    </p:animEffect>
-                                  </p:childTnLst>
-                                </p:cTn>
-                              </p:par>
-                              <p:par>
-                                <p:cTn id="47" presetID="10" presetClass="entr" presetSubtype="0" fill="hold" grpId="0" nodeType="withEffect">
-                                  <p:stCondLst>
-                                    <p:cond delay="0"/>
-                                  </p:stCondLst>
-                                  <p:childTnLst>
-                                    <p:set>
-                                      <p:cBhvr>
-                                        <p:cTn id="48" dur="1" fill="hold">
-                                          <p:stCondLst>
-                                            <p:cond delay="0"/>
-                                          </p:stCondLst>
-                                        </p:cTn>
-                                        <p:tgtEl>
-                                          <p:spTgt spid="20"/>
-                                        </p:tgtEl>
-                                        <p:attrNameLst>
-                                          <p:attrName>style.visibility</p:attrName>
-                                        </p:attrNameLst>
-                                      </p:cBhvr>
-                                      <p:to>
-                                        <p:strVal val="visible"/>
-                                      </p:to>
-                                    </p:set>
-                                    <p:animEffect transition="in" filter="fade">
-                                      <p:cBhvr>
-                                        <p:cTn id="49" dur="500"/>
-                                        <p:tgtEl>
-                                          <p:spTgt spid="20"/>
-                                        </p:tgtEl>
-                                      </p:cBhvr>
-                                    </p:animEffect>
-                                  </p:childTnLst>
-                                </p:cTn>
-                              </p:par>
-                              <p:par>
-                                <p:cTn id="50" presetID="10" presetClass="entr" presetSubtype="0" fill="hold" grpId="0" nodeType="withEffect">
-                                  <p:stCondLst>
-                                    <p:cond delay="0"/>
-                                  </p:stCondLst>
-                                  <p:childTnLst>
-                                    <p:set>
-                                      <p:cBhvr>
-                                        <p:cTn id="51" dur="1" fill="hold">
-                                          <p:stCondLst>
-                                            <p:cond delay="0"/>
-                                          </p:stCondLst>
-                                        </p:cTn>
-                                        <p:tgtEl>
-                                          <p:spTgt spid="21"/>
-                                        </p:tgtEl>
-                                        <p:attrNameLst>
-                                          <p:attrName>style.visibility</p:attrName>
-                                        </p:attrNameLst>
-                                      </p:cBhvr>
-                                      <p:to>
-                                        <p:strVal val="visible"/>
-                                      </p:to>
-                                    </p:set>
-                                    <p:animEffect transition="in" filter="fade">
-                                      <p:cBhvr>
-                                        <p:cTn id="52" dur="500"/>
                                         <p:tgtEl>
                                           <p:spTgt spid="21"/>
                                         </p:tgtEl>
@@ -24211,19 +22151,15 @@
     </p:tnLst>
     <p:bldLst>
       <p:bldP spid="6" grpId="0" animBg="1"/>
-      <p:bldP spid="7" grpId="0" animBg="1"/>
       <p:bldP spid="8" grpId="0"/>
       <p:bldP spid="9" grpId="0"/>
       <p:bldP spid="10" grpId="0" animBg="1"/>
-      <p:bldP spid="11" grpId="0" animBg="1"/>
       <p:bldP spid="12" grpId="0"/>
       <p:bldP spid="13" grpId="0"/>
       <p:bldP spid="14" grpId="0" animBg="1"/>
-      <p:bldP spid="15" grpId="0" animBg="1"/>
       <p:bldP spid="16" grpId="0"/>
       <p:bldP spid="17" grpId="0"/>
       <p:bldP spid="18" grpId="0" animBg="1"/>
-      <p:bldP spid="19" grpId="0" animBg="1"/>
       <p:bldP spid="20" grpId="0"/>
       <p:bldP spid="21" grpId="0"/>
     </p:bldLst>
@@ -24232,6 +22168,1138 @@
 </file>
 
 <file path=ppt/slides/slide27.xml><?xml version="1.0" encoding="utf-8"?>
+<p:sld xmlns:a="http://schemas.openxmlformats.org/drawingml/2006/main" xmlns:r="http://schemas.openxmlformats.org/officeDocument/2006/relationships" xmlns:p="http://schemas.openxmlformats.org/presentationml/2006/main">
+  <p:cSld>
+    <p:bg>
+      <p:bgPr>
+        <a:solidFill>
+          <a:srgbClr val="FAF7FF"/>
+        </a:solidFill>
+        <a:effectLst/>
+      </p:bgPr>
+    </p:bg>
+    <p:spTree>
+      <p:nvGrpSpPr>
+        <p:cNvPr id="1" name="">
+          <a:extLst>
+            <a:ext uri="{FF2B5EF4-FFF2-40B4-BE49-F238E27FC236}">
+              <a16:creationId xmlns:a16="http://schemas.microsoft.com/office/drawing/2014/main" id="{3EB3BB30-D7A9-6301-F467-8308A19DA533}"/>
+            </a:ext>
+          </a:extLst>
+        </p:cNvPr>
+        <p:cNvGrpSpPr/>
+        <p:nvPr/>
+      </p:nvGrpSpPr>
+      <p:grpSpPr>
+        <a:xfrm>
+          <a:off x="0" y="0"/>
+          <a:ext cx="0" cy="0"/>
+          <a:chOff x="0" y="0"/>
+          <a:chExt cx="0" cy="0"/>
+        </a:xfrm>
+      </p:grpSpPr>
+      <p:sp>
+        <p:nvSpPr>
+          <p:cNvPr id="2" name="Oval 1">
+            <a:extLst>
+              <a:ext uri="{FF2B5EF4-FFF2-40B4-BE49-F238E27FC236}">
+                <a16:creationId xmlns:a16="http://schemas.microsoft.com/office/drawing/2014/main" id="{077A91BE-234A-800D-EC4B-7869F1DD6070}"/>
+              </a:ext>
+            </a:extLst>
+          </p:cNvPr>
+          <p:cNvSpPr/>
+          <p:nvPr/>
+        </p:nvSpPr>
+        <p:spPr>
+          <a:xfrm>
+            <a:off x="10652760" y="-320040"/>
+            <a:ext cx="1828800" cy="1828800"/>
+          </a:xfrm>
+          <a:prstGeom prst="ellipse">
+            <a:avLst/>
+          </a:prstGeom>
+          <a:solidFill>
+            <a:srgbClr val="FCE2F2"/>
+          </a:solidFill>
+          <a:ln>
+            <a:noFill/>
+          </a:ln>
+        </p:spPr>
+        <p:style>
+          <a:lnRef idx="1">
+            <a:schemeClr val="accent1"/>
+          </a:lnRef>
+          <a:fillRef idx="3">
+            <a:schemeClr val="accent1"/>
+          </a:fillRef>
+          <a:effectRef idx="2">
+            <a:schemeClr val="accent1"/>
+          </a:effectRef>
+          <a:fontRef idx="minor">
+            <a:schemeClr val="lt1"/>
+          </a:fontRef>
+        </p:style>
+        <p:txBody>
+          <a:bodyPr rtlCol="0" anchor="ctr"/>
+          <a:lstStyle/>
+          <a:p>
+            <a:pPr algn="ctr"/>
+            <a:endParaRPr/>
+          </a:p>
+        </p:txBody>
+      </p:sp>
+      <p:sp>
+        <p:nvSpPr>
+          <p:cNvPr id="3" name="Oval 2">
+            <a:extLst>
+              <a:ext uri="{FF2B5EF4-FFF2-40B4-BE49-F238E27FC236}">
+                <a16:creationId xmlns:a16="http://schemas.microsoft.com/office/drawing/2014/main" id="{1A1DBB6E-E70F-E622-462B-BC0AC285F2FC}"/>
+              </a:ext>
+            </a:extLst>
+          </p:cNvPr>
+          <p:cNvSpPr/>
+          <p:nvPr/>
+        </p:nvSpPr>
+        <p:spPr>
+          <a:xfrm>
+            <a:off x="-411480" y="5623560"/>
+            <a:ext cx="1554480" cy="1554480"/>
+          </a:xfrm>
+          <a:prstGeom prst="ellipse">
+            <a:avLst/>
+          </a:prstGeom>
+          <a:solidFill>
+            <a:srgbClr val="EBDEFA"/>
+          </a:solidFill>
+          <a:ln>
+            <a:noFill/>
+          </a:ln>
+        </p:spPr>
+        <p:style>
+          <a:lnRef idx="1">
+            <a:schemeClr val="accent1"/>
+          </a:lnRef>
+          <a:fillRef idx="3">
+            <a:schemeClr val="accent1"/>
+          </a:fillRef>
+          <a:effectRef idx="2">
+            <a:schemeClr val="accent1"/>
+          </a:effectRef>
+          <a:fontRef idx="minor">
+            <a:schemeClr val="lt1"/>
+          </a:fontRef>
+        </p:style>
+        <p:txBody>
+          <a:bodyPr rtlCol="0" anchor="ctr"/>
+          <a:lstStyle/>
+          <a:p>
+            <a:pPr algn="ctr"/>
+            <a:endParaRPr/>
+          </a:p>
+        </p:txBody>
+      </p:sp>
+      <p:sp>
+        <p:nvSpPr>
+          <p:cNvPr id="4" name="Oval 3">
+            <a:extLst>
+              <a:ext uri="{FF2B5EF4-FFF2-40B4-BE49-F238E27FC236}">
+                <a16:creationId xmlns:a16="http://schemas.microsoft.com/office/drawing/2014/main" id="{CAC18E59-7939-3FB4-3501-05FF2E46B1E2}"/>
+              </a:ext>
+            </a:extLst>
+          </p:cNvPr>
+          <p:cNvSpPr/>
+          <p:nvPr/>
+        </p:nvSpPr>
+        <p:spPr>
+          <a:xfrm>
+            <a:off x="11201400" y="5440680"/>
+            <a:ext cx="1188720" cy="1188720"/>
+          </a:xfrm>
+          <a:prstGeom prst="ellipse">
+            <a:avLst/>
+          </a:prstGeom>
+          <a:solidFill>
+            <a:srgbClr val="EBDEFA"/>
+          </a:solidFill>
+          <a:ln>
+            <a:noFill/>
+          </a:ln>
+        </p:spPr>
+        <p:style>
+          <a:lnRef idx="1">
+            <a:schemeClr val="accent1"/>
+          </a:lnRef>
+          <a:fillRef idx="3">
+            <a:schemeClr val="accent1"/>
+          </a:fillRef>
+          <a:effectRef idx="2">
+            <a:schemeClr val="accent1"/>
+          </a:effectRef>
+          <a:fontRef idx="minor">
+            <a:schemeClr val="lt1"/>
+          </a:fontRef>
+        </p:style>
+        <p:txBody>
+          <a:bodyPr rtlCol="0" anchor="ctr"/>
+          <a:lstStyle/>
+          <a:p>
+            <a:pPr algn="ctr"/>
+            <a:endParaRPr/>
+          </a:p>
+        </p:txBody>
+      </p:sp>
+      <p:sp>
+        <p:nvSpPr>
+          <p:cNvPr id="5" name="TextBox 4">
+            <a:extLst>
+              <a:ext uri="{FF2B5EF4-FFF2-40B4-BE49-F238E27FC236}">
+                <a16:creationId xmlns:a16="http://schemas.microsoft.com/office/drawing/2014/main" id="{E473DE9C-BD5D-963B-3B88-E7FEA7A3C5B3}"/>
+              </a:ext>
+            </a:extLst>
+          </p:cNvPr>
+          <p:cNvSpPr txBox="1"/>
+          <p:nvPr/>
+        </p:nvSpPr>
+        <p:spPr>
+          <a:xfrm>
+            <a:off x="594360" y="347472"/>
+            <a:ext cx="2386102" cy="523220"/>
+          </a:xfrm>
+          <a:prstGeom prst="rect">
+            <a:avLst/>
+          </a:prstGeom>
+          <a:noFill/>
+        </p:spPr>
+        <p:txBody>
+          <a:bodyPr wrap="none">
+            <a:spAutoFit/>
+          </a:bodyPr>
+          <a:lstStyle/>
+          <a:p>
+            <a:pPr>
+              <a:defRPr sz="2800" b="1">
+                <a:solidFill>
+                  <a:srgbClr val="2D1F44"/>
+                </a:solidFill>
+                <a:latin typeface="Aptos Display"/>
+              </a:defRPr>
+            </a:pPr>
+            <a:r>
+              <a:rPr lang="en-US" dirty="0"/>
+              <a:t>CONCLUSION</a:t>
+            </a:r>
+          </a:p>
+        </p:txBody>
+      </p:sp>
+      <p:sp>
+        <p:nvSpPr>
+          <p:cNvPr id="6" name="Rounded Rectangle 5">
+            <a:extLst>
+              <a:ext uri="{FF2B5EF4-FFF2-40B4-BE49-F238E27FC236}">
+                <a16:creationId xmlns:a16="http://schemas.microsoft.com/office/drawing/2014/main" id="{81E8B3BB-63CA-692B-273A-8EC4B5199F17}"/>
+              </a:ext>
+            </a:extLst>
+          </p:cNvPr>
+          <p:cNvSpPr/>
+          <p:nvPr/>
+        </p:nvSpPr>
+        <p:spPr>
+          <a:xfrm>
+            <a:off x="624056" y="980388"/>
+            <a:ext cx="10515600" cy="5147035"/>
+          </a:xfrm>
+          <a:prstGeom prst="roundRect">
+            <a:avLst/>
+          </a:prstGeom>
+          <a:solidFill>
+            <a:srgbClr val="FFFFFF"/>
+          </a:solidFill>
+          <a:ln w="12700">
+            <a:solidFill>
+              <a:srgbClr val="E8DFF0"/>
+            </a:solidFill>
+          </a:ln>
+        </p:spPr>
+        <p:style>
+          <a:lnRef idx="1">
+            <a:schemeClr val="accent1"/>
+          </a:lnRef>
+          <a:fillRef idx="3">
+            <a:schemeClr val="accent1"/>
+          </a:fillRef>
+          <a:effectRef idx="2">
+            <a:schemeClr val="accent1"/>
+          </a:effectRef>
+          <a:fontRef idx="minor">
+            <a:schemeClr val="lt1"/>
+          </a:fontRef>
+        </p:style>
+        <p:txBody>
+          <a:bodyPr rtlCol="0" anchor="ctr"/>
+          <a:lstStyle/>
+          <a:p>
+            <a:pPr algn="ctr"/>
+            <a:endParaRPr/>
+          </a:p>
+        </p:txBody>
+      </p:sp>
+      <p:sp>
+        <p:nvSpPr>
+          <p:cNvPr id="24" name="TextBox 23">
+            <a:extLst>
+              <a:ext uri="{FF2B5EF4-FFF2-40B4-BE49-F238E27FC236}">
+                <a16:creationId xmlns:a16="http://schemas.microsoft.com/office/drawing/2014/main" id="{9B8AC8B9-EA29-B647-7ED2-A66BA66C3572}"/>
+              </a:ext>
+            </a:extLst>
+          </p:cNvPr>
+          <p:cNvSpPr txBox="1"/>
+          <p:nvPr/>
+        </p:nvSpPr>
+        <p:spPr>
+          <a:xfrm>
+            <a:off x="1114088" y="1174408"/>
+            <a:ext cx="10185663" cy="4832092"/>
+          </a:xfrm>
+          <a:prstGeom prst="rect">
+            <a:avLst/>
+          </a:prstGeom>
+          <a:noFill/>
+        </p:spPr>
+        <p:txBody>
+          <a:bodyPr wrap="square">
+            <a:spAutoFit/>
+          </a:bodyPr>
+          <a:lstStyle/>
+          <a:p>
+            <a:pPr marL="0" marR="0" lvl="0" indent="0" algn="l" defTabSz="914400" rtl="0" eaLnBrk="0" fontAlgn="base" latinLnBrk="0" hangingPunct="0">
+              <a:lnSpc>
+                <a:spcPct val="100000"/>
+              </a:lnSpc>
+              <a:spcBef>
+                <a:spcPct val="0"/>
+              </a:spcBef>
+              <a:spcAft>
+                <a:spcPct val="0"/>
+              </a:spcAft>
+              <a:buClrTx/>
+              <a:buSzTx/>
+              <a:buFontTx/>
+              <a:buChar char="•"/>
+              <a:tabLst/>
+            </a:pPr>
+            <a:r>
+              <a:rPr kumimoji="0" lang="en-US" altLang="en-US" sz="1400" b="1" i="0" u="none" strike="noStrike" cap="none" normalizeH="0" baseline="0" dirty="0">
+                <a:ln>
+                  <a:noFill/>
+                </a:ln>
+                <a:solidFill>
+                  <a:schemeClr val="tx1"/>
+                </a:solidFill>
+                <a:effectLst/>
+                <a:latin typeface="Arial" panose="020B0604020202020204" pitchFamily="34" charset="0"/>
+              </a:rPr>
+              <a:t>S01 Vijayawada is the strongest store</a:t>
+            </a:r>
+            <a:r>
+              <a:rPr kumimoji="0" lang="en-US" altLang="en-US" sz="1400" b="0" i="0" u="none" strike="noStrike" cap="none" normalizeH="0" baseline="0" dirty="0">
+                <a:ln>
+                  <a:noFill/>
+                </a:ln>
+                <a:solidFill>
+                  <a:schemeClr val="tx1"/>
+                </a:solidFill>
+                <a:effectLst/>
+                <a:latin typeface="Arial" panose="020B0604020202020204" pitchFamily="34" charset="0"/>
+              </a:rPr>
+              <a:t>, while </a:t>
+            </a:r>
+            <a:r>
+              <a:rPr kumimoji="0" lang="en-US" altLang="en-US" sz="1400" b="1" i="0" u="none" strike="noStrike" cap="none" normalizeH="0" baseline="0" dirty="0">
+                <a:ln>
+                  <a:noFill/>
+                </a:ln>
+                <a:solidFill>
+                  <a:schemeClr val="tx1"/>
+                </a:solidFill>
+                <a:effectLst/>
+                <a:latin typeface="Arial" panose="020B0604020202020204" pitchFamily="34" charset="0"/>
+              </a:rPr>
+              <a:t>S12 Kakinada is the weakest</a:t>
+            </a:r>
+            <a:r>
+              <a:rPr kumimoji="0" lang="en-US" altLang="en-US" sz="1400" b="0" i="0" u="none" strike="noStrike" cap="none" normalizeH="0" baseline="0" dirty="0">
+                <a:ln>
+                  <a:noFill/>
+                </a:ln>
+                <a:solidFill>
+                  <a:schemeClr val="tx1"/>
+                </a:solidFill>
+                <a:effectLst/>
+                <a:latin typeface="Arial" panose="020B0604020202020204" pitchFamily="34" charset="0"/>
+              </a:rPr>
+              <a:t> → promotional spend should be reviewed by store performance rather than equally distributed. </a:t>
+            </a:r>
+          </a:p>
+          <a:p>
+            <a:pPr marL="0" marR="0" lvl="0" indent="0" algn="l" defTabSz="914400" rtl="0" eaLnBrk="0" fontAlgn="base" latinLnBrk="0" hangingPunct="0">
+              <a:lnSpc>
+                <a:spcPct val="100000"/>
+              </a:lnSpc>
+              <a:spcBef>
+                <a:spcPct val="0"/>
+              </a:spcBef>
+              <a:spcAft>
+                <a:spcPct val="0"/>
+              </a:spcAft>
+              <a:buClrTx/>
+              <a:buSzTx/>
+              <a:buFontTx/>
+              <a:buChar char="•"/>
+              <a:tabLst/>
+            </a:pPr>
+            <a:r>
+              <a:rPr kumimoji="0" lang="en-US" altLang="en-US" sz="1400" b="1" i="0" u="none" strike="noStrike" cap="none" normalizeH="0" baseline="0" dirty="0">
+                <a:ln>
+                  <a:noFill/>
+                </a:ln>
+                <a:solidFill>
+                  <a:schemeClr val="tx1"/>
+                </a:solidFill>
+                <a:effectLst/>
+                <a:latin typeface="Arial" panose="020B0604020202020204" pitchFamily="34" charset="0"/>
+              </a:rPr>
+              <a:t>Electronics needs attention</a:t>
+            </a:r>
+            <a:r>
+              <a:rPr kumimoji="0" lang="en-US" altLang="en-US" sz="1400" b="0" i="0" u="none" strike="noStrike" cap="none" normalizeH="0" baseline="0" dirty="0">
+                <a:ln>
+                  <a:noFill/>
+                </a:ln>
+                <a:solidFill>
+                  <a:schemeClr val="tx1"/>
+                </a:solidFill>
+                <a:effectLst/>
+                <a:latin typeface="Arial" panose="020B0604020202020204" pitchFamily="34" charset="0"/>
+              </a:rPr>
+              <a:t> → it generated the highest revenue but declined by about </a:t>
+            </a:r>
+            <a:r>
+              <a:rPr kumimoji="0" lang="en-US" altLang="en-US" sz="1400" b="1" i="0" u="none" strike="noStrike" cap="none" normalizeH="0" baseline="0" dirty="0">
+                <a:ln>
+                  <a:noFill/>
+                </a:ln>
+                <a:solidFill>
+                  <a:schemeClr val="tx1"/>
+                </a:solidFill>
+                <a:effectLst/>
+                <a:latin typeface="Arial" panose="020B0604020202020204" pitchFamily="34" charset="0"/>
+              </a:rPr>
+              <a:t>25% from January to June</a:t>
+            </a:r>
+            <a:r>
+              <a:rPr kumimoji="0" lang="en-US" altLang="en-US" sz="1400" b="0" i="0" u="none" strike="noStrike" cap="none" normalizeH="0" baseline="0" dirty="0">
+                <a:ln>
+                  <a:noFill/>
+                </a:ln>
+                <a:solidFill>
+                  <a:schemeClr val="tx1"/>
+                </a:solidFill>
+                <a:effectLst/>
+                <a:latin typeface="Arial" panose="020B0604020202020204" pitchFamily="34" charset="0"/>
+              </a:rPr>
+              <a:t>, indicating a need to review pricing, demand, stock availability, and promotions. </a:t>
+            </a:r>
+          </a:p>
+          <a:p>
+            <a:pPr marL="0" marR="0" lvl="0" indent="0" algn="l" defTabSz="914400" rtl="0" eaLnBrk="0" fontAlgn="base" latinLnBrk="0" hangingPunct="0">
+              <a:lnSpc>
+                <a:spcPct val="100000"/>
+              </a:lnSpc>
+              <a:spcBef>
+                <a:spcPct val="0"/>
+              </a:spcBef>
+              <a:spcAft>
+                <a:spcPct val="0"/>
+              </a:spcAft>
+              <a:buClrTx/>
+              <a:buSzTx/>
+              <a:buFontTx/>
+              <a:buChar char="•"/>
+              <a:tabLst/>
+            </a:pPr>
+            <a:endParaRPr kumimoji="0" lang="en-US" altLang="en-US" sz="1400" b="0" i="0" u="none" strike="noStrike" cap="none" normalizeH="0" baseline="0" dirty="0">
+              <a:ln>
+                <a:noFill/>
+              </a:ln>
+              <a:solidFill>
+                <a:schemeClr val="tx1"/>
+              </a:solidFill>
+              <a:effectLst/>
+              <a:latin typeface="Arial" panose="020B0604020202020204" pitchFamily="34" charset="0"/>
+            </a:endParaRPr>
+          </a:p>
+          <a:p>
+            <a:pPr marL="0" marR="0" lvl="0" indent="0" algn="l" defTabSz="914400" rtl="0" eaLnBrk="0" fontAlgn="base" latinLnBrk="0" hangingPunct="0">
+              <a:lnSpc>
+                <a:spcPct val="100000"/>
+              </a:lnSpc>
+              <a:spcBef>
+                <a:spcPct val="0"/>
+              </a:spcBef>
+              <a:spcAft>
+                <a:spcPct val="0"/>
+              </a:spcAft>
+              <a:buClrTx/>
+              <a:buSzTx/>
+              <a:buFontTx/>
+              <a:buChar char="•"/>
+              <a:tabLst/>
+            </a:pPr>
+            <a:r>
+              <a:rPr kumimoji="0" lang="en-US" altLang="en-US" sz="1400" b="1" i="0" u="none" strike="noStrike" cap="none" normalizeH="0" baseline="0" dirty="0">
+                <a:ln>
+                  <a:noFill/>
+                </a:ln>
+                <a:solidFill>
+                  <a:schemeClr val="tx1"/>
+                </a:solidFill>
+                <a:effectLst/>
+                <a:latin typeface="Arial" panose="020B0604020202020204" pitchFamily="34" charset="0"/>
+              </a:rPr>
+              <a:t>S03 Guntur is the current weekly leader</a:t>
+            </a:r>
+            <a:r>
+              <a:rPr kumimoji="0" lang="en-US" altLang="en-US" sz="1400" b="0" i="0" u="none" strike="noStrike" cap="none" normalizeH="0" baseline="0" dirty="0">
+                <a:ln>
+                  <a:noFill/>
+                </a:ln>
+                <a:solidFill>
+                  <a:schemeClr val="tx1"/>
+                </a:solidFill>
+                <a:effectLst/>
+                <a:latin typeface="Arial" panose="020B0604020202020204" pitchFamily="34" charset="0"/>
+              </a:rPr>
+              <a:t>, while </a:t>
+            </a:r>
+            <a:r>
+              <a:rPr kumimoji="0" lang="en-US" altLang="en-US" sz="1400" b="1" i="0" u="none" strike="noStrike" cap="none" normalizeH="0" baseline="0" dirty="0">
+                <a:ln>
+                  <a:noFill/>
+                </a:ln>
+                <a:solidFill>
+                  <a:schemeClr val="tx1"/>
+                </a:solidFill>
+                <a:effectLst/>
+                <a:latin typeface="Arial" panose="020B0604020202020204" pitchFamily="34" charset="0"/>
+              </a:rPr>
+              <a:t>S10 Nellore is the lowest-performing store</a:t>
+            </a:r>
+            <a:r>
+              <a:rPr kumimoji="0" lang="en-US" altLang="en-US" sz="1400" b="0" i="0" u="none" strike="noStrike" cap="none" normalizeH="0" baseline="0" dirty="0">
+                <a:ln>
+                  <a:noFill/>
+                </a:ln>
+                <a:solidFill>
+                  <a:schemeClr val="tx1"/>
+                </a:solidFill>
+                <a:effectLst/>
+                <a:latin typeface="Arial" panose="020B0604020202020204" pitchFamily="34" charset="0"/>
+              </a:rPr>
+              <a:t> in the latest weekly data → investigate the performance gap before allocating additional promotional spend. </a:t>
+            </a:r>
+          </a:p>
+          <a:p>
+            <a:pPr marL="0" marR="0" lvl="0" indent="0" algn="l" defTabSz="914400" rtl="0" eaLnBrk="0" fontAlgn="base" latinLnBrk="0" hangingPunct="0">
+              <a:lnSpc>
+                <a:spcPct val="100000"/>
+              </a:lnSpc>
+              <a:spcBef>
+                <a:spcPct val="0"/>
+              </a:spcBef>
+              <a:spcAft>
+                <a:spcPct val="0"/>
+              </a:spcAft>
+              <a:buClrTx/>
+              <a:buSzTx/>
+              <a:buFontTx/>
+              <a:buChar char="•"/>
+              <a:tabLst/>
+            </a:pPr>
+            <a:endParaRPr kumimoji="0" lang="en-US" altLang="en-US" sz="1400" b="0" i="0" u="none" strike="noStrike" cap="none" normalizeH="0" baseline="0" dirty="0">
+              <a:ln>
+                <a:noFill/>
+              </a:ln>
+              <a:solidFill>
+                <a:schemeClr val="tx1"/>
+              </a:solidFill>
+              <a:effectLst/>
+              <a:latin typeface="Arial" panose="020B0604020202020204" pitchFamily="34" charset="0"/>
+            </a:endParaRPr>
+          </a:p>
+          <a:p>
+            <a:pPr marL="0" marR="0" lvl="0" indent="0" algn="l" defTabSz="914400" rtl="0" eaLnBrk="0" fontAlgn="base" latinLnBrk="0" hangingPunct="0">
+              <a:lnSpc>
+                <a:spcPct val="100000"/>
+              </a:lnSpc>
+              <a:spcBef>
+                <a:spcPct val="0"/>
+              </a:spcBef>
+              <a:spcAft>
+                <a:spcPct val="0"/>
+              </a:spcAft>
+              <a:buClrTx/>
+              <a:buSzTx/>
+              <a:buFontTx/>
+              <a:buChar char="•"/>
+              <a:tabLst/>
+            </a:pPr>
+            <a:r>
+              <a:rPr kumimoji="0" lang="en-US" altLang="en-US" sz="1400" b="1" i="0" u="none" strike="noStrike" cap="none" normalizeH="0" baseline="0" dirty="0">
+                <a:ln>
+                  <a:noFill/>
+                </a:ln>
+                <a:solidFill>
+                  <a:schemeClr val="tx1"/>
+                </a:solidFill>
+                <a:effectLst/>
+                <a:latin typeface="Arial" panose="020B0604020202020204" pitchFamily="34" charset="0"/>
+              </a:rPr>
+              <a:t>Weekend demand is stronger</a:t>
+            </a:r>
+            <a:r>
+              <a:rPr kumimoji="0" lang="en-US" altLang="en-US" sz="1400" b="0" i="0" u="none" strike="noStrike" cap="none" normalizeH="0" baseline="0" dirty="0">
+                <a:ln>
+                  <a:noFill/>
+                </a:ln>
+                <a:solidFill>
+                  <a:schemeClr val="tx1"/>
+                </a:solidFill>
+                <a:effectLst/>
+                <a:latin typeface="Arial" panose="020B0604020202020204" pitchFamily="34" charset="0"/>
+              </a:rPr>
+              <a:t>, especially on </a:t>
+            </a:r>
+            <a:r>
+              <a:rPr kumimoji="0" lang="en-US" altLang="en-US" sz="1400" b="1" i="0" u="none" strike="noStrike" cap="none" normalizeH="0" baseline="0" dirty="0">
+                <a:ln>
+                  <a:noFill/>
+                </a:ln>
+                <a:solidFill>
+                  <a:schemeClr val="tx1"/>
+                </a:solidFill>
+                <a:effectLst/>
+                <a:latin typeface="Arial" panose="020B0604020202020204" pitchFamily="34" charset="0"/>
+              </a:rPr>
+              <a:t>Saturday and Sunday</a:t>
+            </a:r>
+            <a:r>
+              <a:rPr kumimoji="0" lang="en-US" altLang="en-US" sz="1400" b="0" i="0" u="none" strike="noStrike" cap="none" normalizeH="0" baseline="0" dirty="0">
+                <a:ln>
+                  <a:noFill/>
+                </a:ln>
+                <a:solidFill>
+                  <a:schemeClr val="tx1"/>
+                </a:solidFill>
+                <a:effectLst/>
+                <a:latin typeface="Arial" panose="020B0604020202020204" pitchFamily="34" charset="0"/>
+              </a:rPr>
+              <a:t> → promotional campaigns can be concentrated around high-traffic days. </a:t>
+            </a:r>
+          </a:p>
+          <a:p>
+            <a:pPr marL="0" marR="0" lvl="0" indent="0" algn="l" defTabSz="914400" rtl="0" eaLnBrk="0" fontAlgn="base" latinLnBrk="0" hangingPunct="0">
+              <a:lnSpc>
+                <a:spcPct val="100000"/>
+              </a:lnSpc>
+              <a:spcBef>
+                <a:spcPct val="0"/>
+              </a:spcBef>
+              <a:spcAft>
+                <a:spcPct val="0"/>
+              </a:spcAft>
+              <a:buClrTx/>
+              <a:buSzTx/>
+              <a:buFontTx/>
+              <a:buChar char="•"/>
+              <a:tabLst/>
+            </a:pPr>
+            <a:endParaRPr kumimoji="0" lang="en-US" altLang="en-US" sz="1400" b="0" i="0" u="none" strike="noStrike" cap="none" normalizeH="0" baseline="0" dirty="0">
+              <a:ln>
+                <a:noFill/>
+              </a:ln>
+              <a:solidFill>
+                <a:schemeClr val="tx1"/>
+              </a:solidFill>
+              <a:effectLst/>
+              <a:latin typeface="Arial" panose="020B0604020202020204" pitchFamily="34" charset="0"/>
+            </a:endParaRPr>
+          </a:p>
+          <a:p>
+            <a:pPr marL="0" marR="0" lvl="0" indent="0" algn="l" defTabSz="914400" rtl="0" eaLnBrk="0" fontAlgn="base" latinLnBrk="0" hangingPunct="0">
+              <a:lnSpc>
+                <a:spcPct val="100000"/>
+              </a:lnSpc>
+              <a:spcBef>
+                <a:spcPct val="0"/>
+              </a:spcBef>
+              <a:spcAft>
+                <a:spcPct val="0"/>
+              </a:spcAft>
+              <a:buClrTx/>
+              <a:buSzTx/>
+              <a:buFontTx/>
+              <a:buChar char="•"/>
+              <a:tabLst/>
+            </a:pPr>
+            <a:r>
+              <a:rPr kumimoji="0" lang="en-US" altLang="en-US" sz="1400" b="1" i="0" u="none" strike="noStrike" cap="none" normalizeH="0" baseline="0" dirty="0">
+                <a:ln>
+                  <a:noFill/>
+                </a:ln>
+                <a:solidFill>
+                  <a:schemeClr val="tx1"/>
+                </a:solidFill>
+                <a:effectLst/>
+                <a:latin typeface="Arial" panose="020B0604020202020204" pitchFamily="34" charset="0"/>
+              </a:rPr>
+              <a:t>Four unusual low-performing store-weeks were identified</a:t>
+            </a:r>
+            <a:r>
+              <a:rPr kumimoji="0" lang="en-US" altLang="en-US" sz="1400" b="0" i="0" u="none" strike="noStrike" cap="none" normalizeH="0" baseline="0" dirty="0">
+                <a:ln>
+                  <a:noFill/>
+                </a:ln>
+                <a:solidFill>
+                  <a:schemeClr val="tx1"/>
+                </a:solidFill>
+                <a:effectLst/>
+                <a:latin typeface="Arial" panose="020B0604020202020204" pitchFamily="34" charset="0"/>
+              </a:rPr>
+              <a:t> → these should be investigated for possible stock issues, local events, pricing problems, or competitor activity. </a:t>
+            </a:r>
+          </a:p>
+          <a:p>
+            <a:pPr marL="0" marR="0" lvl="0" indent="0" algn="l" defTabSz="914400" rtl="0" eaLnBrk="0" fontAlgn="base" latinLnBrk="0" hangingPunct="0">
+              <a:lnSpc>
+                <a:spcPct val="100000"/>
+              </a:lnSpc>
+              <a:spcBef>
+                <a:spcPct val="0"/>
+              </a:spcBef>
+              <a:spcAft>
+                <a:spcPct val="0"/>
+              </a:spcAft>
+              <a:buClrTx/>
+              <a:buSzTx/>
+              <a:buFontTx/>
+              <a:buChar char="•"/>
+              <a:tabLst/>
+            </a:pPr>
+            <a:endParaRPr kumimoji="0" lang="en-US" altLang="en-US" sz="1400" b="0" i="0" u="none" strike="noStrike" cap="none" normalizeH="0" baseline="0" dirty="0">
+              <a:ln>
+                <a:noFill/>
+              </a:ln>
+              <a:solidFill>
+                <a:schemeClr val="tx1"/>
+              </a:solidFill>
+              <a:effectLst/>
+              <a:latin typeface="Arial" panose="020B0604020202020204" pitchFamily="34" charset="0"/>
+            </a:endParaRPr>
+          </a:p>
+          <a:p>
+            <a:pPr marL="0" marR="0" lvl="0" indent="0" algn="l" defTabSz="914400" rtl="0" eaLnBrk="0" fontAlgn="base" latinLnBrk="0" hangingPunct="0">
+              <a:lnSpc>
+                <a:spcPct val="100000"/>
+              </a:lnSpc>
+              <a:spcBef>
+                <a:spcPct val="0"/>
+              </a:spcBef>
+              <a:spcAft>
+                <a:spcPct val="0"/>
+              </a:spcAft>
+              <a:buClrTx/>
+              <a:buSzTx/>
+              <a:buFontTx/>
+              <a:buChar char="•"/>
+              <a:tabLst/>
+            </a:pPr>
+            <a:r>
+              <a:rPr kumimoji="0" lang="en-US" altLang="en-US" sz="1400" b="1" i="0" u="none" strike="noStrike" cap="none" normalizeH="0" baseline="0" dirty="0">
+                <a:ln>
+                  <a:noFill/>
+                </a:ln>
+                <a:solidFill>
+                  <a:schemeClr val="tx1"/>
+                </a:solidFill>
+                <a:effectLst/>
+                <a:latin typeface="Arial" panose="020B0604020202020204" pitchFamily="34" charset="0"/>
+              </a:rPr>
+              <a:t>The latest weekly data also flags Electronics</a:t>
+            </a:r>
+            <a:r>
+              <a:rPr kumimoji="0" lang="en-US" altLang="en-US" sz="1400" b="0" i="0" u="none" strike="noStrike" cap="none" normalizeH="0" baseline="0" dirty="0">
+                <a:ln>
+                  <a:noFill/>
+                </a:ln>
+                <a:solidFill>
+                  <a:schemeClr val="tx1"/>
+                </a:solidFill>
+                <a:effectLst/>
+                <a:latin typeface="Arial" panose="020B0604020202020204" pitchFamily="34" charset="0"/>
+              </a:rPr>
+              <a:t> as performing more than </a:t>
+            </a:r>
+            <a:r>
+              <a:rPr kumimoji="0" lang="en-US" altLang="en-US" sz="1400" b="1" i="0" u="none" strike="noStrike" cap="none" normalizeH="0" baseline="0" dirty="0">
+                <a:ln>
+                  <a:noFill/>
+                </a:ln>
+                <a:solidFill>
+                  <a:schemeClr val="tx1"/>
+                </a:solidFill>
+                <a:effectLst/>
+                <a:latin typeface="Arial" panose="020B0604020202020204" pitchFamily="34" charset="0"/>
+              </a:rPr>
+              <a:t>20% below its six-month weekly baseline</a:t>
+            </a:r>
+            <a:r>
+              <a:rPr kumimoji="0" lang="en-US" altLang="en-US" sz="1400" b="0" i="0" u="none" strike="noStrike" cap="none" normalizeH="0" baseline="0" dirty="0">
+                <a:ln>
+                  <a:noFill/>
+                </a:ln>
+                <a:solidFill>
+                  <a:schemeClr val="tx1"/>
+                </a:solidFill>
+                <a:effectLst/>
+                <a:latin typeface="Arial" panose="020B0604020202020204" pitchFamily="34" charset="0"/>
+              </a:rPr>
+              <a:t> → this is a clear signal for management attention. </a:t>
+            </a:r>
+          </a:p>
+          <a:p>
+            <a:pPr marL="0" marR="0" lvl="0" indent="0" algn="l" defTabSz="914400" rtl="0" eaLnBrk="0" fontAlgn="base" latinLnBrk="0" hangingPunct="0">
+              <a:lnSpc>
+                <a:spcPct val="100000"/>
+              </a:lnSpc>
+              <a:spcBef>
+                <a:spcPct val="0"/>
+              </a:spcBef>
+              <a:spcAft>
+                <a:spcPct val="0"/>
+              </a:spcAft>
+              <a:buClrTx/>
+              <a:buSzTx/>
+              <a:buFontTx/>
+              <a:buChar char="•"/>
+              <a:tabLst/>
+            </a:pPr>
+            <a:endParaRPr kumimoji="0" lang="en-US" altLang="en-US" sz="1400" b="0" i="0" u="none" strike="noStrike" cap="none" normalizeH="0" baseline="0" dirty="0">
+              <a:ln>
+                <a:noFill/>
+              </a:ln>
+              <a:solidFill>
+                <a:schemeClr val="tx1"/>
+              </a:solidFill>
+              <a:effectLst/>
+              <a:latin typeface="Arial" panose="020B0604020202020204" pitchFamily="34" charset="0"/>
+            </a:endParaRPr>
+          </a:p>
+          <a:p>
+            <a:pPr marL="0" marR="0" lvl="0" indent="0" algn="l" defTabSz="914400" rtl="0" eaLnBrk="0" fontAlgn="base" latinLnBrk="0" hangingPunct="0">
+              <a:lnSpc>
+                <a:spcPct val="100000"/>
+              </a:lnSpc>
+              <a:spcBef>
+                <a:spcPct val="0"/>
+              </a:spcBef>
+              <a:spcAft>
+                <a:spcPct val="0"/>
+              </a:spcAft>
+              <a:buClrTx/>
+              <a:buSzTx/>
+              <a:buFontTx/>
+              <a:buChar char="•"/>
+              <a:tabLst/>
+            </a:pPr>
+            <a:r>
+              <a:rPr kumimoji="0" lang="en-US" altLang="en-US" sz="1400" b="1" i="0" u="none" strike="noStrike" cap="none" normalizeH="0" baseline="0" dirty="0">
+                <a:ln>
+                  <a:noFill/>
+                </a:ln>
+                <a:solidFill>
+                  <a:schemeClr val="tx1"/>
+                </a:solidFill>
+                <a:effectLst/>
+                <a:latin typeface="Arial" panose="020B0604020202020204" pitchFamily="34" charset="0"/>
+              </a:rPr>
+              <a:t>Bottom line:</a:t>
+            </a:r>
+            <a:r>
+              <a:rPr kumimoji="0" lang="en-US" altLang="en-US" sz="1400" b="0" i="0" u="none" strike="noStrike" cap="none" normalizeH="0" baseline="0" dirty="0">
+                <a:ln>
+                  <a:noFill/>
+                </a:ln>
+                <a:solidFill>
+                  <a:schemeClr val="tx1"/>
+                </a:solidFill>
+                <a:effectLst/>
+                <a:latin typeface="Arial" panose="020B0604020202020204" pitchFamily="34" charset="0"/>
+              </a:rPr>
+              <a:t> Use the evidence to </a:t>
+            </a:r>
+            <a:r>
+              <a:rPr kumimoji="0" lang="en-US" altLang="en-US" sz="1400" b="1" i="0" u="none" strike="noStrike" cap="none" normalizeH="0" baseline="0" dirty="0">
+                <a:ln>
+                  <a:noFill/>
+                </a:ln>
+                <a:solidFill>
+                  <a:schemeClr val="tx1"/>
+                </a:solidFill>
+                <a:effectLst/>
+                <a:latin typeface="Arial" panose="020B0604020202020204" pitchFamily="34" charset="0"/>
+              </a:rPr>
+              <a:t>prioritize weak stores, address declining Electronics performance, and target promotions toward high-opportunity periods</a:t>
+            </a:r>
+            <a:r>
+              <a:rPr kumimoji="0" lang="en-US" altLang="en-US" sz="1400" b="0" i="0" u="none" strike="noStrike" cap="none" normalizeH="0" baseline="0" dirty="0">
+                <a:ln>
+                  <a:noFill/>
+                </a:ln>
+                <a:solidFill>
+                  <a:schemeClr val="tx1"/>
+                </a:solidFill>
+                <a:effectLst/>
+                <a:latin typeface="Arial" panose="020B0604020202020204" pitchFamily="34" charset="0"/>
+              </a:rPr>
+              <a:t> rather than relying on equal or gut-feel allocation. </a:t>
+            </a:r>
+          </a:p>
+          <a:p>
+            <a:pPr marL="0" marR="0" lvl="0" indent="0" algn="l" defTabSz="914400" rtl="0" eaLnBrk="0" fontAlgn="base" latinLnBrk="0" hangingPunct="0">
+              <a:lnSpc>
+                <a:spcPct val="100000"/>
+              </a:lnSpc>
+              <a:spcBef>
+                <a:spcPct val="0"/>
+              </a:spcBef>
+              <a:spcAft>
+                <a:spcPct val="0"/>
+              </a:spcAft>
+              <a:buClrTx/>
+              <a:buSzTx/>
+              <a:buFontTx/>
+              <a:buChar char="•"/>
+              <a:tabLst/>
+            </a:pPr>
+            <a:endParaRPr kumimoji="0" lang="en-US" altLang="en-US" sz="1400" b="0" i="0" u="none" strike="noStrike" cap="none" normalizeH="0" baseline="0" dirty="0">
+              <a:ln>
+                <a:noFill/>
+              </a:ln>
+              <a:solidFill>
+                <a:schemeClr val="tx1"/>
+              </a:solidFill>
+              <a:effectLst/>
+              <a:latin typeface="Arial" panose="020B0604020202020204" pitchFamily="34" charset="0"/>
+            </a:endParaRPr>
+          </a:p>
+          <a:p>
+            <a:pPr marL="0" marR="0" lvl="0" indent="0" algn="l" defTabSz="914400" rtl="0" eaLnBrk="0" fontAlgn="base" latinLnBrk="0" hangingPunct="0">
+              <a:lnSpc>
+                <a:spcPct val="100000"/>
+              </a:lnSpc>
+              <a:spcBef>
+                <a:spcPct val="0"/>
+              </a:spcBef>
+              <a:spcAft>
+                <a:spcPct val="0"/>
+              </a:spcAft>
+              <a:buClrTx/>
+              <a:buSzTx/>
+              <a:buFontTx/>
+              <a:buChar char="•"/>
+              <a:tabLst/>
+            </a:pPr>
+            <a:r>
+              <a:rPr kumimoji="0" lang="en-US" altLang="en-US" sz="1400" b="1" i="0" u="none" strike="noStrike" cap="none" normalizeH="0" baseline="0" dirty="0">
+                <a:ln>
+                  <a:noFill/>
+                </a:ln>
+                <a:solidFill>
+                  <a:schemeClr val="tx1"/>
+                </a:solidFill>
+                <a:effectLst/>
+                <a:latin typeface="Arial" panose="020B0604020202020204" pitchFamily="34" charset="0"/>
+              </a:rPr>
+              <a:t>Important:</a:t>
+            </a:r>
+            <a:r>
+              <a:rPr kumimoji="0" lang="en-US" altLang="en-US" sz="1400" b="0" i="0" u="none" strike="noStrike" cap="none" normalizeH="0" baseline="0" dirty="0">
+                <a:ln>
+                  <a:noFill/>
+                </a:ln>
+                <a:solidFill>
+                  <a:schemeClr val="tx1"/>
+                </a:solidFill>
+                <a:effectLst/>
+                <a:latin typeface="Arial" panose="020B0604020202020204" pitchFamily="34" charset="0"/>
+              </a:rPr>
+              <a:t> The analysis covers </a:t>
+            </a:r>
+            <a:r>
+              <a:rPr kumimoji="0" lang="en-US" altLang="en-US" sz="1400" b="1" i="0" u="none" strike="noStrike" cap="none" normalizeH="0" baseline="0" dirty="0">
+                <a:ln>
+                  <a:noFill/>
+                </a:ln>
+                <a:solidFill>
+                  <a:schemeClr val="tx1"/>
+                </a:solidFill>
+                <a:effectLst/>
+                <a:latin typeface="Arial" panose="020B0604020202020204" pitchFamily="34" charset="0"/>
+              </a:rPr>
+              <a:t>January–June 2026</a:t>
+            </a:r>
+            <a:r>
+              <a:rPr kumimoji="0" lang="en-US" altLang="en-US" sz="1400" b="0" i="0" u="none" strike="noStrike" cap="none" normalizeH="0" baseline="0" dirty="0">
+                <a:ln>
+                  <a:noFill/>
+                </a:ln>
+                <a:solidFill>
+                  <a:schemeClr val="tx1"/>
+                </a:solidFill>
+                <a:effectLst/>
+                <a:latin typeface="Arial" panose="020B0604020202020204" pitchFamily="34" charset="0"/>
+              </a:rPr>
+              <a:t>, so it supports Q3 planning but should be combined with new </a:t>
+            </a:r>
+            <a:r>
+              <a:rPr kumimoji="0" lang="en-US" altLang="en-US" sz="1400" b="1" i="0" u="none" strike="noStrike" cap="none" normalizeH="0" baseline="0" dirty="0">
+                <a:ln>
+                  <a:noFill/>
+                </a:ln>
+                <a:solidFill>
+                  <a:schemeClr val="tx1"/>
+                </a:solidFill>
+                <a:effectLst/>
+                <a:latin typeface="Arial" panose="020B0604020202020204" pitchFamily="34" charset="0"/>
+              </a:rPr>
+              <a:t>October–December data</a:t>
+            </a:r>
+            <a:r>
+              <a:rPr kumimoji="0" lang="en-US" altLang="en-US" sz="1400" b="0" i="0" u="none" strike="noStrike" cap="none" normalizeH="0" baseline="0" dirty="0">
+                <a:ln>
+                  <a:noFill/>
+                </a:ln>
+                <a:solidFill>
+                  <a:schemeClr val="tx1"/>
+                </a:solidFill>
+                <a:effectLst/>
+                <a:latin typeface="Arial" panose="020B0604020202020204" pitchFamily="34" charset="0"/>
+              </a:rPr>
+              <a:t> before making final Q3 allocation decisions. </a:t>
+            </a:r>
+          </a:p>
+        </p:txBody>
+      </p:sp>
+    </p:spTree>
+    <p:extLst>
+      <p:ext uri="{BB962C8B-B14F-4D97-AF65-F5344CB8AC3E}">
+        <p14:creationId xmlns:p14="http://schemas.microsoft.com/office/powerpoint/2010/main" val="486329837"/>
+      </p:ext>
+    </p:extLst>
+  </p:cSld>
+  <p:clrMapOvr>
+    <a:masterClrMapping/>
+  </p:clrMapOvr>
+  <p:timing>
+    <p:tnLst>
+      <p:par>
+        <p:cTn id="1" dur="indefinite" restart="never" nodeType="tmRoot">
+          <p:childTnLst>
+            <p:seq concurrent="1" nextAc="seek">
+              <p:cTn id="2" dur="indefinite" nodeType="mainSeq">
+                <p:childTnLst>
+                  <p:par>
+                    <p:cTn id="3" fill="hold">
+                      <p:stCondLst>
+                        <p:cond delay="indefinite"/>
+                      </p:stCondLst>
+                      <p:childTnLst>
+                        <p:par>
+                          <p:cTn id="4" fill="hold">
+                            <p:stCondLst>
+                              <p:cond delay="0"/>
+                            </p:stCondLst>
+                            <p:childTnLst>
+                              <p:par>
+                                <p:cTn id="5" presetID="10" presetClass="entr" presetSubtype="0" fill="hold" grpId="0" nodeType="clickEffect">
+                                  <p:stCondLst>
+                                    <p:cond delay="0"/>
+                                  </p:stCondLst>
+                                  <p:childTnLst>
+                                    <p:set>
+                                      <p:cBhvr>
+                                        <p:cTn id="6" dur="1" fill="hold">
+                                          <p:stCondLst>
+                                            <p:cond delay="0"/>
+                                          </p:stCondLst>
+                                        </p:cTn>
+                                        <p:tgtEl>
+                                          <p:spTgt spid="6"/>
+                                        </p:tgtEl>
+                                        <p:attrNameLst>
+                                          <p:attrName>style.visibility</p:attrName>
+                                        </p:attrNameLst>
+                                      </p:cBhvr>
+                                      <p:to>
+                                        <p:strVal val="visible"/>
+                                      </p:to>
+                                    </p:set>
+                                    <p:animEffect transition="in" filter="fade">
+                                      <p:cBhvr>
+                                        <p:cTn id="7" dur="500"/>
+                                        <p:tgtEl>
+                                          <p:spTgt spid="6"/>
+                                        </p:tgtEl>
+                                      </p:cBhvr>
+                                    </p:animEffect>
+                                  </p:childTnLst>
+                                </p:cTn>
+                              </p:par>
+                            </p:childTnLst>
+                          </p:cTn>
+                        </p:par>
+                      </p:childTnLst>
+                    </p:cTn>
+                  </p:par>
+                </p:childTnLst>
+              </p:cTn>
+              <p:prevCondLst>
+                <p:cond evt="onPrev" delay="0">
+                  <p:tgtEl>
+                    <p:sldTgt/>
+                  </p:tgtEl>
+                </p:cond>
+              </p:prevCondLst>
+              <p:nextCondLst>
+                <p:cond evt="onNext" delay="0">
+                  <p:tgtEl>
+                    <p:sldTgt/>
+                  </p:tgtEl>
+                </p:cond>
+              </p:nextCondLst>
+            </p:seq>
+          </p:childTnLst>
+        </p:cTn>
+      </p:par>
+    </p:tnLst>
+    <p:bldLst>
+      <p:bldP spid="6" grpId="0" animBg="1"/>
+    </p:bldLst>
+  </p:timing>
+</p:sld>
+</file>
+
+<file path=ppt/slides/slide28.xml><?xml version="1.0" encoding="utf-8"?>
 <p:sld xmlns:a="http://schemas.openxmlformats.org/drawingml/2006/main" xmlns:r="http://schemas.openxmlformats.org/officeDocument/2006/relationships" xmlns:p="http://schemas.openxmlformats.org/presentationml/2006/main">
   <p:cSld>
     <p:bg>
@@ -24472,7 +23540,7 @@
 </p:sld>
 </file>
 
-<file path=ppt/slides/slide28.xml><?xml version="1.0" encoding="utf-8"?>
+<file path=ppt/slides/slide29.xml><?xml version="1.0" encoding="utf-8"?>
 <p:sld xmlns:a="http://schemas.openxmlformats.org/drawingml/2006/main" xmlns:r="http://schemas.openxmlformats.org/officeDocument/2006/relationships" xmlns:p="http://schemas.openxmlformats.org/presentationml/2006/main">
   <p:cSld>
     <p:bg>
@@ -25700,50 +24768,6 @@
       </p:sp>
       <p:sp>
         <p:nvSpPr>
-          <p:cNvPr id="19" name="Rounded Rectangle 18"/>
-          <p:cNvSpPr/>
-          <p:nvPr/>
-        </p:nvSpPr>
-        <p:spPr>
-          <a:xfrm>
-            <a:off x="1389888" y="4494276"/>
-            <a:ext cx="45719" cy="1788537"/>
-          </a:xfrm>
-          <a:prstGeom prst="roundRect">
-            <a:avLst/>
-          </a:prstGeom>
-          <a:solidFill>
-            <a:srgbClr val="6C43B4"/>
-          </a:solidFill>
-          <a:ln>
-            <a:noFill/>
-          </a:ln>
-        </p:spPr>
-        <p:style>
-          <a:lnRef idx="1">
-            <a:schemeClr val="accent1"/>
-          </a:lnRef>
-          <a:fillRef idx="3">
-            <a:schemeClr val="accent1"/>
-          </a:fillRef>
-          <a:effectRef idx="2">
-            <a:schemeClr val="accent1"/>
-          </a:effectRef>
-          <a:fontRef idx="minor">
-            <a:schemeClr val="lt1"/>
-          </a:fontRef>
-        </p:style>
-        <p:txBody>
-          <a:bodyPr rtlCol="0" anchor="ctr"/>
-          <a:lstStyle/>
-          <a:p>
-            <a:pPr algn="ctr"/>
-            <a:endParaRPr/>
-          </a:p>
-        </p:txBody>
-      </p:sp>
-      <p:sp>
-        <p:nvSpPr>
           <p:cNvPr id="20" name="TextBox 19"/>
           <p:cNvSpPr txBox="1"/>
           <p:nvPr/>
@@ -25864,50 +24888,6 @@
       </p:sp>
       <p:sp>
         <p:nvSpPr>
-          <p:cNvPr id="23" name="Rounded Rectangle 22"/>
-          <p:cNvSpPr/>
-          <p:nvPr/>
-        </p:nvSpPr>
-        <p:spPr>
-          <a:xfrm>
-            <a:off x="6290677" y="4507698"/>
-            <a:ext cx="73152" cy="1775115"/>
-          </a:xfrm>
-          <a:prstGeom prst="roundRect">
-            <a:avLst/>
-          </a:prstGeom>
-          <a:solidFill>
-            <a:srgbClr val="E65CA4"/>
-          </a:solidFill>
-          <a:ln>
-            <a:noFill/>
-          </a:ln>
-        </p:spPr>
-        <p:style>
-          <a:lnRef idx="1">
-            <a:schemeClr val="accent1"/>
-          </a:lnRef>
-          <a:fillRef idx="3">
-            <a:schemeClr val="accent1"/>
-          </a:fillRef>
-          <a:effectRef idx="2">
-            <a:schemeClr val="accent1"/>
-          </a:effectRef>
-          <a:fontRef idx="minor">
-            <a:schemeClr val="lt1"/>
-          </a:fontRef>
-        </p:style>
-        <p:txBody>
-          <a:bodyPr rtlCol="0" anchor="ctr"/>
-          <a:lstStyle/>
-          <a:p>
-            <a:pPr algn="ctr"/>
-            <a:endParaRPr/>
-          </a:p>
-        </p:txBody>
-      </p:sp>
-      <p:sp>
-        <p:nvSpPr>
           <p:cNvPr id="24" name="TextBox 23"/>
           <p:cNvSpPr txBox="1"/>
           <p:nvPr/>
@@ -26037,7 +25017,7 @@
         </p:nvSpPr>
         <p:spPr>
           <a:xfrm>
-            <a:off x="4812792" y="2843882"/>
+            <a:off x="5934586" y="2843882"/>
             <a:ext cx="2560320" cy="1325880"/>
           </a:xfrm>
           <a:prstGeom prst="roundRect">
@@ -26089,7 +25069,7 @@
         </p:nvSpPr>
         <p:spPr>
           <a:xfrm>
-            <a:off x="5909076" y="3009556"/>
+            <a:off x="7030870" y="3009556"/>
             <a:ext cx="343364" cy="446276"/>
           </a:xfrm>
           <a:prstGeom prst="rect">
@@ -26132,7 +25112,7 @@
         </p:nvSpPr>
         <p:spPr>
           <a:xfrm>
-            <a:off x="5658208" y="3594772"/>
+            <a:off x="6780002" y="3594772"/>
             <a:ext cx="845104" cy="261610"/>
           </a:xfrm>
           <a:prstGeom prst="rect">
@@ -26176,7 +25156,7 @@
         </p:nvSpPr>
         <p:spPr>
           <a:xfrm>
-            <a:off x="7961678" y="2851945"/>
+            <a:off x="9083472" y="2851945"/>
             <a:ext cx="2560320" cy="1325880"/>
           </a:xfrm>
           <a:prstGeom prst="roundRect">
@@ -26228,7 +25208,7 @@
         </p:nvSpPr>
         <p:spPr>
           <a:xfrm>
-            <a:off x="9070156" y="3060546"/>
+            <a:off x="10191950" y="3060546"/>
             <a:ext cx="343364" cy="446276"/>
           </a:xfrm>
           <a:prstGeom prst="rect">
@@ -26271,7 +25251,7 @@
         </p:nvSpPr>
         <p:spPr>
           <a:xfrm>
-            <a:off x="8787230" y="3609522"/>
+            <a:off x="9909024" y="3609522"/>
             <a:ext cx="909223" cy="261610"/>
           </a:xfrm>
           <a:prstGeom prst="rect">
@@ -26315,7 +25295,7 @@
         </p:nvSpPr>
         <p:spPr>
           <a:xfrm>
-            <a:off x="1839696" y="2851945"/>
+            <a:off x="2961490" y="2851945"/>
             <a:ext cx="2560320" cy="1325880"/>
           </a:xfrm>
           <a:prstGeom prst="roundRect">
@@ -26367,7 +25347,7 @@
         </p:nvSpPr>
         <p:spPr>
           <a:xfrm>
-            <a:off x="2517392" y="3153459"/>
+            <a:off x="3639186" y="3153459"/>
             <a:ext cx="1119217" cy="446276"/>
           </a:xfrm>
           <a:prstGeom prst="rect">
@@ -26411,7 +25391,7 @@
         </p:nvSpPr>
         <p:spPr>
           <a:xfrm>
-            <a:off x="2574300" y="3629188"/>
+            <a:off x="3696094" y="3629188"/>
             <a:ext cx="1005404" cy="261610"/>
           </a:xfrm>
           <a:prstGeom prst="rect">
@@ -26440,6 +25420,146 @@
             <a:r>
               <a:rPr lang="en-US" sz="1100" dirty="0"/>
               <a:t>revenue</a:t>
+            </a:r>
+            <a:endParaRPr dirty="0"/>
+          </a:p>
+        </p:txBody>
+      </p:sp>
+      <p:sp>
+        <p:nvSpPr>
+          <p:cNvPr id="36" name="Rounded Rectangle 8">
+            <a:extLst>
+              <a:ext uri="{FF2B5EF4-FFF2-40B4-BE49-F238E27FC236}">
+                <a16:creationId xmlns:a16="http://schemas.microsoft.com/office/drawing/2014/main" id="{2215F0D6-F8B9-6442-724B-AB9F6CAED58C}"/>
+              </a:ext>
+            </a:extLst>
+          </p:cNvPr>
+          <p:cNvSpPr/>
+          <p:nvPr/>
+        </p:nvSpPr>
+        <p:spPr>
+          <a:xfrm>
+            <a:off x="276428" y="2872367"/>
+            <a:ext cx="2560320" cy="1325880"/>
+          </a:xfrm>
+          <a:prstGeom prst="roundRect">
+            <a:avLst/>
+          </a:prstGeom>
+          <a:solidFill>
+            <a:srgbClr val="FFFFFF"/>
+          </a:solidFill>
+          <a:ln>
+            <a:solidFill>
+              <a:srgbClr val="E8DFF0"/>
+            </a:solidFill>
+          </a:ln>
+        </p:spPr>
+        <p:style>
+          <a:lnRef idx="1">
+            <a:schemeClr val="accent1"/>
+          </a:lnRef>
+          <a:fillRef idx="3">
+            <a:schemeClr val="accent1"/>
+          </a:fillRef>
+          <a:effectRef idx="2">
+            <a:schemeClr val="accent1"/>
+          </a:effectRef>
+          <a:fontRef idx="minor">
+            <a:schemeClr val="lt1"/>
+          </a:fontRef>
+        </p:style>
+        <p:txBody>
+          <a:bodyPr rtlCol="0" anchor="ctr"/>
+          <a:lstStyle/>
+          <a:p>
+            <a:pPr algn="ctr"/>
+            <a:endParaRPr dirty="0"/>
+          </a:p>
+        </p:txBody>
+      </p:sp>
+      <p:sp>
+        <p:nvSpPr>
+          <p:cNvPr id="37" name="TextBox 36">
+            <a:extLst>
+              <a:ext uri="{FF2B5EF4-FFF2-40B4-BE49-F238E27FC236}">
+                <a16:creationId xmlns:a16="http://schemas.microsoft.com/office/drawing/2014/main" id="{B10599D3-F4C7-727F-A036-8E2ABE818F6C}"/>
+              </a:ext>
+            </a:extLst>
+          </p:cNvPr>
+          <p:cNvSpPr txBox="1"/>
+          <p:nvPr/>
+        </p:nvSpPr>
+        <p:spPr>
+          <a:xfrm>
+            <a:off x="1262703" y="3173881"/>
+            <a:ext cx="502061" cy="446276"/>
+          </a:xfrm>
+          <a:prstGeom prst="rect">
+            <a:avLst/>
+          </a:prstGeom>
+          <a:noFill/>
+        </p:spPr>
+        <p:txBody>
+          <a:bodyPr wrap="none">
+            <a:spAutoFit/>
+          </a:bodyPr>
+          <a:lstStyle/>
+          <a:p>
+            <a:pPr algn="ctr">
+              <a:defRPr sz="2300" b="1">
+                <a:solidFill>
+                  <a:srgbClr val="6C43B4"/>
+                </a:solidFill>
+                <a:latin typeface="Aptos Display"/>
+              </a:defRPr>
+            </a:pPr>
+            <a:r>
+              <a:rPr lang="en-US" dirty="0"/>
+              <a:t>12</a:t>
+            </a:r>
+            <a:endParaRPr dirty="0"/>
+          </a:p>
+        </p:txBody>
+      </p:sp>
+      <p:sp>
+        <p:nvSpPr>
+          <p:cNvPr id="38" name="TextBox 37">
+            <a:extLst>
+              <a:ext uri="{FF2B5EF4-FFF2-40B4-BE49-F238E27FC236}">
+                <a16:creationId xmlns:a16="http://schemas.microsoft.com/office/drawing/2014/main" id="{C4AD49C4-88EB-3F75-8142-133ED9CF6FA7}"/>
+              </a:ext>
+            </a:extLst>
+          </p:cNvPr>
+          <p:cNvSpPr txBox="1"/>
+          <p:nvPr/>
+        </p:nvSpPr>
+        <p:spPr>
+          <a:xfrm>
+            <a:off x="1225035" y="3649610"/>
+            <a:ext cx="577402" cy="261610"/>
+          </a:xfrm>
+          <a:prstGeom prst="rect">
+            <a:avLst/>
+          </a:prstGeom>
+          <a:noFill/>
+        </p:spPr>
+        <p:txBody>
+          <a:bodyPr wrap="none">
+            <a:spAutoFit/>
+          </a:bodyPr>
+          <a:lstStyle/>
+          <a:p>
+            <a:pPr algn="ctr">
+              <a:defRPr sz="1100">
+                <a:solidFill>
+                  <a:srgbClr val="645B6E"/>
+                </a:solidFill>
+                <a:latin typeface="Aptos"/>
+              </a:defRPr>
+            </a:pPr>
+            <a:r>
+              <a:rPr lang="en-US" dirty="0"/>
+              <a:t>Stores</a:t>
             </a:r>
             <a:endParaRPr dirty="0"/>
           </a:p>
@@ -27450,7 +26570,7 @@
                                           </p:stCondLst>
                                         </p:cTn>
                                         <p:tgtEl>
-                                          <p:spTgt spid="19"/>
+                                          <p:spTgt spid="25"/>
                                         </p:tgtEl>
                                         <p:attrNameLst>
                                           <p:attrName>style.visibility</p:attrName>
@@ -27464,7 +26584,7 @@
                                       <p:cBhvr>
                                         <p:cTn id="93" dur="500"/>
                                         <p:tgtEl>
-                                          <p:spTgt spid="19"/>
+                                          <p:spTgt spid="25"/>
                                         </p:tgtEl>
                                       </p:cBhvr>
                                     </p:animEffect>
@@ -27485,7 +26605,7 @@
                                           </p:stCondLst>
                                         </p:cTn>
                                         <p:tgtEl>
-                                          <p:spTgt spid="25"/>
+                                          <p:spTgt spid="24"/>
                                         </p:tgtEl>
                                         <p:attrNameLst>
                                           <p:attrName>style.visibility</p:attrName>
@@ -27499,7 +26619,7 @@
                                       <p:cBhvr>
                                         <p:cTn id="96" dur="500"/>
                                         <p:tgtEl>
-                                          <p:spTgt spid="25"/>
+                                          <p:spTgt spid="24"/>
                                         </p:tgtEl>
                                       </p:cBhvr>
                                     </p:animEffect>
@@ -27520,7 +26640,7 @@
                                           </p:stCondLst>
                                         </p:cTn>
                                         <p:tgtEl>
-                                          <p:spTgt spid="24"/>
+                                          <p:spTgt spid="22"/>
                                         </p:tgtEl>
                                         <p:attrNameLst>
                                           <p:attrName>style.visibility</p:attrName>
@@ -27534,7 +26654,60 @@
                                       <p:cBhvr>
                                         <p:cTn id="99" dur="500"/>
                                         <p:tgtEl>
-                                          <p:spTgt spid="24"/>
+                                          <p:spTgt spid="22"/>
+                                        </p:tgtEl>
+                                      </p:cBhvr>
+                                    </p:animEffect>
+                                  </p:childTnLst>
+                                </p:cTn>
+                              </p:par>
+                            </p:childTnLst>
+                          </p:cTn>
+                        </p:par>
+                      </p:childTnLst>
+                    </p:cTn>
+                  </p:par>
+                  <p:par>
+                    <p:cTn id="100" fill="hold">
+                      <p:stCondLst>
+                        <p:cond delay="indefinite"/>
+                      </p:stCondLst>
+                      <p:childTnLst>
+                        <p:par>
+                          <p:cTn id="101" fill="hold">
+                            <p:stCondLst>
+                              <p:cond delay="0"/>
+                            </p:stCondLst>
+                            <p:childTnLst>
+                              <p:par>
+                                <p:cTn id="102" presetID="10" presetClass="entr" presetSubtype="0" fill="hold" grpId="0" nodeType="clickEffect">
+                                  <p:stCondLst>
+                                    <p:cond delay="0"/>
+                                  </p:stCondLst>
+                                  <p:childTnLst>
+                                    <p:set>
+                                      <p:cBhvr>
+                                        <p:cTn id="103" dur="1" fill="hold">
+                                          <p:stCondLst>
+                                            <p:cond delay="0"/>
+                                          </p:stCondLst>
+                                        </p:cTn>
+                                        <p:tgtEl>
+                                          <p:spTgt spid="37"/>
+                                        </p:tgtEl>
+                                        <p:attrNameLst>
+                                          <p:attrName>style.visibility</p:attrName>
+                                        </p:attrNameLst>
+                                      </p:cBhvr>
+                                      <p:to>
+                                        <p:strVal val="visible"/>
+                                      </p:to>
+                                    </p:set>
+                                    <p:animEffect transition="in" filter="fade">
+                                      <p:cBhvr>
+                                        <p:cTn id="104" dur="500"/>
+                                        <p:tgtEl>
+                                          <p:spTgt spid="37"/>
                                         </p:tgtEl>
                                       </p:cBhvr>
                                     </p:animEffect>
@@ -27542,20 +26715,20 @@
                                 </p:cTn>
                               </p:par>
                               <p:par>
-                                <p:cTn id="100" presetID="10" presetClass="entr" presetSubtype="0" fill="hold" grpId="0" nodeType="withEffect">
+                                <p:cTn id="105" presetID="10" presetClass="entr" presetSubtype="0" fill="hold" grpId="0" nodeType="withEffect">
                                   <p:stCondLst>
                                     <p:cond delay="0"/>
                                   </p:stCondLst>
                                   <p:childTnLst>
                                     <p:set>
                                       <p:cBhvr>
-                                        <p:cTn id="101" dur="1" fill="hold">
+                                        <p:cTn id="106" dur="1" fill="hold">
                                           <p:stCondLst>
                                             <p:cond delay="0"/>
                                           </p:stCondLst>
                                         </p:cTn>
                                         <p:tgtEl>
-                                          <p:spTgt spid="22"/>
+                                          <p:spTgt spid="36"/>
                                         </p:tgtEl>
                                         <p:attrNameLst>
                                           <p:attrName>style.visibility</p:attrName>
@@ -27567,9 +26740,9 @@
                                     </p:set>
                                     <p:animEffect transition="in" filter="fade">
                                       <p:cBhvr>
-                                        <p:cTn id="102" dur="500"/>
-                                        <p:tgtEl>
-                                          <p:spTgt spid="22"/>
+                                        <p:cTn id="107" dur="500"/>
+                                        <p:tgtEl>
+                                          <p:spTgt spid="36"/>
                                         </p:tgtEl>
                                       </p:cBhvr>
                                     </p:animEffect>
@@ -27577,20 +26750,20 @@
                                 </p:cTn>
                               </p:par>
                               <p:par>
-                                <p:cTn id="103" presetID="10" presetClass="entr" presetSubtype="0" fill="hold" grpId="0" nodeType="withEffect">
+                                <p:cTn id="108" presetID="10" presetClass="entr" presetSubtype="0" fill="hold" grpId="0" nodeType="withEffect">
                                   <p:stCondLst>
                                     <p:cond delay="0"/>
                                   </p:stCondLst>
                                   <p:childTnLst>
                                     <p:set>
                                       <p:cBhvr>
-                                        <p:cTn id="104" dur="1" fill="hold">
+                                        <p:cTn id="109" dur="1" fill="hold">
                                           <p:stCondLst>
                                             <p:cond delay="0"/>
                                           </p:stCondLst>
                                         </p:cTn>
                                         <p:tgtEl>
-                                          <p:spTgt spid="23"/>
+                                          <p:spTgt spid="38"/>
                                         </p:tgtEl>
                                         <p:attrNameLst>
                                           <p:attrName>style.visibility</p:attrName>
@@ -27602,9 +26775,9 @@
                                     </p:set>
                                     <p:animEffect transition="in" filter="fade">
                                       <p:cBhvr>
-                                        <p:cTn id="105" dur="500"/>
-                                        <p:tgtEl>
-                                          <p:spTgt spid="23"/>
+                                        <p:cTn id="110" dur="500"/>
+                                        <p:tgtEl>
+                                          <p:spTgt spid="38"/>
                                         </p:tgtEl>
                                       </p:cBhvr>
                                     </p:animEffect>
@@ -27652,11 +26825,9 @@
       <p:bldP spid="16" grpId="0"/>
       <p:bldP spid="17" grpId="0"/>
       <p:bldP spid="18" grpId="0" animBg="1"/>
-      <p:bldP spid="19" grpId="0" animBg="1"/>
       <p:bldP spid="20" grpId="0"/>
       <p:bldP spid="21" grpId="0"/>
       <p:bldP spid="22" grpId="0" animBg="1"/>
-      <p:bldP spid="23" grpId="0" animBg="1"/>
       <p:bldP spid="24" grpId="0"/>
       <p:bldP spid="25" grpId="0"/>
       <p:bldP spid="27" grpId="0" animBg="1"/>
@@ -27668,6 +26839,9 @@
       <p:bldP spid="33" grpId="0" animBg="1"/>
       <p:bldP spid="34" grpId="0"/>
       <p:bldP spid="35" grpId="0"/>
+      <p:bldP spid="36" grpId="0" animBg="1"/>
+      <p:bldP spid="37" grpId="0"/>
+      <p:bldP spid="38" grpId="0"/>
     </p:bldLst>
   </p:timing>
 </p:sld>
@@ -28002,50 +27176,6 @@
       </p:sp>
       <p:sp>
         <p:nvSpPr>
-          <p:cNvPr id="10" name="Rounded Rectangle 9"/>
-          <p:cNvSpPr/>
-          <p:nvPr/>
-        </p:nvSpPr>
-        <p:spPr>
-          <a:xfrm>
-            <a:off x="7890384" y="1389888"/>
-            <a:ext cx="73152" cy="1746504"/>
-          </a:xfrm>
-          <a:prstGeom prst="roundRect">
-            <a:avLst/>
-          </a:prstGeom>
-          <a:solidFill>
-            <a:srgbClr val="6C43B4"/>
-          </a:solidFill>
-          <a:ln>
-            <a:noFill/>
-          </a:ln>
-        </p:spPr>
-        <p:style>
-          <a:lnRef idx="1">
-            <a:schemeClr val="accent1"/>
-          </a:lnRef>
-          <a:fillRef idx="3">
-            <a:schemeClr val="accent1"/>
-          </a:fillRef>
-          <a:effectRef idx="2">
-            <a:schemeClr val="accent1"/>
-          </a:effectRef>
-          <a:fontRef idx="minor">
-            <a:schemeClr val="lt1"/>
-          </a:fontRef>
-        </p:style>
-        <p:txBody>
-          <a:bodyPr rtlCol="0" anchor="ctr"/>
-          <a:lstStyle/>
-          <a:p>
-            <a:pPr algn="ctr"/>
-            <a:endParaRPr/>
-          </a:p>
-        </p:txBody>
-      </p:sp>
-      <p:sp>
-        <p:nvSpPr>
           <p:cNvPr id="11" name="TextBox 10"/>
           <p:cNvSpPr txBox="1"/>
           <p:nvPr/>
@@ -28176,50 +27306,6 @@
             <a:solidFill>
               <a:srgbClr val="E8DFF0"/>
             </a:solidFill>
-          </a:ln>
-        </p:spPr>
-        <p:style>
-          <a:lnRef idx="1">
-            <a:schemeClr val="accent1"/>
-          </a:lnRef>
-          <a:fillRef idx="3">
-            <a:schemeClr val="accent1"/>
-          </a:fillRef>
-          <a:effectRef idx="2">
-            <a:schemeClr val="accent1"/>
-          </a:effectRef>
-          <a:fontRef idx="minor">
-            <a:schemeClr val="lt1"/>
-          </a:fontRef>
-        </p:style>
-        <p:txBody>
-          <a:bodyPr rtlCol="0" anchor="ctr"/>
-          <a:lstStyle/>
-          <a:p>
-            <a:pPr algn="ctr"/>
-            <a:endParaRPr/>
-          </a:p>
-        </p:txBody>
-      </p:sp>
-      <p:sp>
-        <p:nvSpPr>
-          <p:cNvPr id="14" name="Rounded Rectangle 13"/>
-          <p:cNvSpPr/>
-          <p:nvPr/>
-        </p:nvSpPr>
-        <p:spPr>
-          <a:xfrm>
-            <a:off x="7890384" y="3675888"/>
-            <a:ext cx="73152" cy="1746504"/>
-          </a:xfrm>
-          <a:prstGeom prst="roundRect">
-            <a:avLst/>
-          </a:prstGeom>
-          <a:solidFill>
-            <a:srgbClr val="E65CA4"/>
-          </a:solidFill>
-          <a:ln>
-            <a:noFill/>
           </a:ln>
         </p:spPr>
         <p:style>
@@ -28683,41 +27769,6 @@
                                   </p:childTnLst>
                                 </p:cTn>
                               </p:par>
-                              <p:par>
-                                <p:cTn id="22" presetID="10" presetClass="entr" presetSubtype="0" fill="hold" grpId="0" nodeType="withEffect">
-                                  <p:stCondLst>
-                                    <p:cond delay="0"/>
-                                  </p:stCondLst>
-                                  <p:childTnLst>
-                                    <p:set>
-                                      <p:cBhvr>
-                                        <p:cTn id="23" dur="1" fill="hold">
-                                          <p:stCondLst>
-                                            <p:cond delay="0"/>
-                                          </p:stCondLst>
-                                        </p:cTn>
-                                        <p:tgtEl>
-                                          <p:spTgt spid="10"/>
-                                        </p:tgtEl>
-                                        <p:attrNameLst>
-                                          <p:attrName>style.visibility</p:attrName>
-                                        </p:attrNameLst>
-                                      </p:cBhvr>
-                                      <p:to>
-                                        <p:strVal val="visible"/>
-                                      </p:to>
-                                    </p:set>
-                                    <p:animEffect transition="in" filter="fade">
-                                      <p:cBhvr>
-                                        <p:cTn id="24" dur="500"/>
-                                        <p:tgtEl>
-                                          <p:spTgt spid="10"/>
-                                        </p:tgtEl>
-                                      </p:cBhvr>
-                                    </p:animEffect>
-                                  </p:childTnLst>
-                                </p:cTn>
-                              </p:par>
                             </p:childTnLst>
                           </p:cTn>
                         </p:par>
@@ -28725,32 +27776,67 @@
                     </p:cTn>
                   </p:par>
                   <p:par>
-                    <p:cTn id="25" fill="hold">
+                    <p:cTn id="22" fill="hold">
                       <p:stCondLst>
                         <p:cond delay="indefinite"/>
                       </p:stCondLst>
                       <p:childTnLst>
                         <p:par>
-                          <p:cTn id="26" fill="hold">
+                          <p:cTn id="23" fill="hold">
                             <p:stCondLst>
                               <p:cond delay="0"/>
                             </p:stCondLst>
                             <p:childTnLst>
                               <p:par>
-                                <p:cTn id="27" presetID="10" presetClass="entr" presetSubtype="0" fill="hold" grpId="0" nodeType="clickEffect">
+                                <p:cTn id="24" presetID="10" presetClass="entr" presetSubtype="0" fill="hold" grpId="0" nodeType="clickEffect">
                                   <p:stCondLst>
                                     <p:cond delay="0"/>
                                   </p:stCondLst>
                                   <p:childTnLst>
                                     <p:set>
                                       <p:cBhvr>
+                                        <p:cTn id="25" dur="1" fill="hold">
+                                          <p:stCondLst>
+                                            <p:cond delay="0"/>
+                                          </p:stCondLst>
+                                        </p:cTn>
+                                        <p:tgtEl>
+                                          <p:spTgt spid="13"/>
+                                        </p:tgtEl>
+                                        <p:attrNameLst>
+                                          <p:attrName>style.visibility</p:attrName>
+                                        </p:attrNameLst>
+                                      </p:cBhvr>
+                                      <p:to>
+                                        <p:strVal val="visible"/>
+                                      </p:to>
+                                    </p:set>
+                                    <p:animEffect transition="in" filter="fade">
+                                      <p:cBhvr>
+                                        <p:cTn id="26" dur="500"/>
+                                        <p:tgtEl>
+                                          <p:spTgt spid="13"/>
+                                        </p:tgtEl>
+                                      </p:cBhvr>
+                                    </p:animEffect>
+                                  </p:childTnLst>
+                                </p:cTn>
+                              </p:par>
+                              <p:par>
+                                <p:cTn id="27" presetID="10" presetClass="entr" presetSubtype="0" fill="hold" grpId="0" nodeType="withEffect">
+                                  <p:stCondLst>
+                                    <p:cond delay="0"/>
+                                  </p:stCondLst>
+                                  <p:childTnLst>
+                                    <p:set>
+                                      <p:cBhvr>
                                         <p:cTn id="28" dur="1" fill="hold">
                                           <p:stCondLst>
                                             <p:cond delay="0"/>
                                           </p:stCondLst>
                                         </p:cTn>
                                         <p:tgtEl>
-                                          <p:spTgt spid="13"/>
+                                          <p:spTgt spid="15"/>
                                         </p:tgtEl>
                                         <p:attrNameLst>
                                           <p:attrName>style.visibility</p:attrName>
@@ -28764,7 +27850,7 @@
                                       <p:cBhvr>
                                         <p:cTn id="29" dur="500"/>
                                         <p:tgtEl>
-                                          <p:spTgt spid="13"/>
+                                          <p:spTgt spid="15"/>
                                         </p:tgtEl>
                                       </p:cBhvr>
                                     </p:animEffect>
@@ -28785,7 +27871,7 @@
                                           </p:stCondLst>
                                         </p:cTn>
                                         <p:tgtEl>
-                                          <p:spTgt spid="14"/>
+                                          <p:spTgt spid="16"/>
                                         </p:tgtEl>
                                         <p:attrNameLst>
                                           <p:attrName>style.visibility</p:attrName>
@@ -28798,76 +27884,6 @@
                                     <p:animEffect transition="in" filter="fade">
                                       <p:cBhvr>
                                         <p:cTn id="32" dur="500"/>
-                                        <p:tgtEl>
-                                          <p:spTgt spid="14"/>
-                                        </p:tgtEl>
-                                      </p:cBhvr>
-                                    </p:animEffect>
-                                  </p:childTnLst>
-                                </p:cTn>
-                              </p:par>
-                              <p:par>
-                                <p:cTn id="33" presetID="10" presetClass="entr" presetSubtype="0" fill="hold" grpId="0" nodeType="withEffect">
-                                  <p:stCondLst>
-                                    <p:cond delay="0"/>
-                                  </p:stCondLst>
-                                  <p:childTnLst>
-                                    <p:set>
-                                      <p:cBhvr>
-                                        <p:cTn id="34" dur="1" fill="hold">
-                                          <p:stCondLst>
-                                            <p:cond delay="0"/>
-                                          </p:stCondLst>
-                                        </p:cTn>
-                                        <p:tgtEl>
-                                          <p:spTgt spid="15"/>
-                                        </p:tgtEl>
-                                        <p:attrNameLst>
-                                          <p:attrName>style.visibility</p:attrName>
-                                        </p:attrNameLst>
-                                      </p:cBhvr>
-                                      <p:to>
-                                        <p:strVal val="visible"/>
-                                      </p:to>
-                                    </p:set>
-                                    <p:animEffect transition="in" filter="fade">
-                                      <p:cBhvr>
-                                        <p:cTn id="35" dur="500"/>
-                                        <p:tgtEl>
-                                          <p:spTgt spid="15"/>
-                                        </p:tgtEl>
-                                      </p:cBhvr>
-                                    </p:animEffect>
-                                  </p:childTnLst>
-                                </p:cTn>
-                              </p:par>
-                              <p:par>
-                                <p:cTn id="36" presetID="10" presetClass="entr" presetSubtype="0" fill="hold" grpId="0" nodeType="withEffect">
-                                  <p:stCondLst>
-                                    <p:cond delay="0"/>
-                                  </p:stCondLst>
-                                  <p:childTnLst>
-                                    <p:set>
-                                      <p:cBhvr>
-                                        <p:cTn id="37" dur="1" fill="hold">
-                                          <p:stCondLst>
-                                            <p:cond delay="0"/>
-                                          </p:stCondLst>
-                                        </p:cTn>
-                                        <p:tgtEl>
-                                          <p:spTgt spid="16"/>
-                                        </p:tgtEl>
-                                        <p:attrNameLst>
-                                          <p:attrName>style.visibility</p:attrName>
-                                        </p:attrNameLst>
-                                      </p:cBhvr>
-                                      <p:to>
-                                        <p:strVal val="visible"/>
-                                      </p:to>
-                                    </p:set>
-                                    <p:animEffect transition="in" filter="fade">
-                                      <p:cBhvr>
-                                        <p:cTn id="38" dur="500"/>
                                         <p:tgtEl>
                                           <p:spTgt spid="16"/>
                                         </p:tgtEl>
@@ -28906,11 +27922,9 @@
     <p:bldLst>
       <p:bldP spid="7" grpId="0" animBg="1"/>
       <p:bldP spid="9" grpId="0" animBg="1"/>
-      <p:bldP spid="10" grpId="0" animBg="1"/>
       <p:bldP spid="11" grpId="0"/>
       <p:bldP spid="12" grpId="0"/>
       <p:bldP spid="13" grpId="0" animBg="1"/>
-      <p:bldP spid="14" grpId="0" animBg="1"/>
       <p:bldP spid="15" grpId="0"/>
       <p:bldP spid="16" grpId="0"/>
     </p:bldLst>
@@ -29964,50 +28978,6 @@
       </p:sp>
       <p:sp>
         <p:nvSpPr>
-          <p:cNvPr id="9" name="Rounded Rectangle 8"/>
-          <p:cNvSpPr/>
-          <p:nvPr/>
-        </p:nvSpPr>
-        <p:spPr>
-          <a:xfrm>
-            <a:off x="8984697" y="2483395"/>
-            <a:ext cx="73152" cy="1746504"/>
-          </a:xfrm>
-          <a:prstGeom prst="roundRect">
-            <a:avLst/>
-          </a:prstGeom>
-          <a:solidFill>
-            <a:srgbClr val="6C43B4"/>
-          </a:solidFill>
-          <a:ln>
-            <a:noFill/>
-          </a:ln>
-        </p:spPr>
-        <p:style>
-          <a:lnRef idx="1">
-            <a:schemeClr val="accent1"/>
-          </a:lnRef>
-          <a:fillRef idx="3">
-            <a:schemeClr val="accent1"/>
-          </a:fillRef>
-          <a:effectRef idx="2">
-            <a:schemeClr val="accent1"/>
-          </a:effectRef>
-          <a:fontRef idx="minor">
-            <a:schemeClr val="lt1"/>
-          </a:fontRef>
-        </p:style>
-        <p:txBody>
-          <a:bodyPr rtlCol="0" anchor="ctr"/>
-          <a:lstStyle/>
-          <a:p>
-            <a:pPr algn="ctr"/>
-            <a:endParaRPr/>
-          </a:p>
-        </p:txBody>
-      </p:sp>
-      <p:sp>
-        <p:nvSpPr>
           <p:cNvPr id="10" name="TextBox 9"/>
           <p:cNvSpPr txBox="1"/>
           <p:nvPr/>
@@ -30377,7 +29347,7 @@
                                           </p:stCondLst>
                                         </p:cTn>
                                         <p:tgtEl>
-                                          <p:spTgt spid="9"/>
+                                          <p:spTgt spid="10"/>
                                         </p:tgtEl>
                                         <p:attrNameLst>
                                           <p:attrName>style.visibility</p:attrName>
@@ -30390,41 +29360,6 @@
                                     <p:animEffect transition="in" filter="fade">
                                       <p:cBhvr>
                                         <p:cTn id="21" dur="500"/>
-                                        <p:tgtEl>
-                                          <p:spTgt spid="9"/>
-                                        </p:tgtEl>
-                                      </p:cBhvr>
-                                    </p:animEffect>
-                                  </p:childTnLst>
-                                </p:cTn>
-                              </p:par>
-                              <p:par>
-                                <p:cTn id="22" presetID="10" presetClass="entr" presetSubtype="0" fill="hold" grpId="0" nodeType="withEffect">
-                                  <p:stCondLst>
-                                    <p:cond delay="0"/>
-                                  </p:stCondLst>
-                                  <p:childTnLst>
-                                    <p:set>
-                                      <p:cBhvr>
-                                        <p:cTn id="23" dur="1" fill="hold">
-                                          <p:stCondLst>
-                                            <p:cond delay="0"/>
-                                          </p:stCondLst>
-                                        </p:cTn>
-                                        <p:tgtEl>
-                                          <p:spTgt spid="10"/>
-                                        </p:tgtEl>
-                                        <p:attrNameLst>
-                                          <p:attrName>style.visibility</p:attrName>
-                                        </p:attrNameLst>
-                                      </p:cBhvr>
-                                      <p:to>
-                                        <p:strVal val="visible"/>
-                                      </p:to>
-                                    </p:set>
-                                    <p:animEffect transition="in" filter="fade">
-                                      <p:cBhvr>
-                                        <p:cTn id="24" dur="500"/>
                                         <p:tgtEl>
                                           <p:spTgt spid="10"/>
                                         </p:tgtEl>
@@ -30463,7 +29398,6 @@
     <p:bldLst>
       <p:bldP spid="6" grpId="0" animBg="1"/>
       <p:bldP spid="8" grpId="0" animBg="1"/>
-      <p:bldP spid="9" grpId="0" animBg="1"/>
       <p:bldP spid="10" grpId="0"/>
       <p:bldP spid="11" grpId="0"/>
     </p:bldLst>
